--- a/index/designs/y7-l10/l1-oclock/l1-oclock.pptx
+++ b/index/designs/y7-l10/l1-oclock/l1-oclock.pptx
@@ -17,9 +17,10 @@
     <p:sldId id="265" r:id="rId11"/>
     <p:sldId id="266" r:id="rId12"/>
     <p:sldId id="267" r:id="rId13"/>
+    <p:sldId id="268" r:id="rId14"/>
   </p:sldIdLst>
   <p:notesMasterIdLst>
-    <p:notesMasterId r:id="rId14"/>
+    <p:notesMasterId r:id="rId15"/>
   </p:notesMasterIdLst>
   <p:sldSz cx="12192000" cy="6858000"/>
   <p:notesSz cx="6858000" cy="12192000"/>
@@ -801,6 +802,94 @@
             <a:fld id="{F7021451-1387-4CA6-816F-3879F97B5CBC}" type="slidenum">
               <a:rPr lang="en-US"/>
               <a:t>12</a:t>
+            </a:fld>
+            <a:endParaRPr lang="en-US"/>
+          </a:p>
+        </p:txBody>
+      </p:sp>
+    </p:spTree>
+    <p:extLst>
+      <p:ext uri="{BB962C8B-B14F-4D97-AF65-F5344CB8AC3E}">
+        <p14:creationId xmlns:p14="http://schemas.microsoft.com/office/powerpoint/2010/main" val="1024086991"/>
+      </p:ext>
+    </p:extLst>
+  </p:cSld>
+  <p:clrMapOvr>
+    <a:masterClrMapping/>
+  </p:clrMapOvr>
+</p:notes>
+</file>
+
+<file path=ppt/notesSlides/notesSlide13.xml><?xml version="1.0" encoding="utf-8"?>
+<p:notes xmlns:a="http://schemas.openxmlformats.org/drawingml/2006/main" xmlns:r="http://schemas.openxmlformats.org/officeDocument/2006/relationships" xmlns:p="http://schemas.openxmlformats.org/presentationml/2006/main">
+  <p:cSld>
+    <p:spTree>
+      <p:nvGrpSpPr>
+        <p:cNvPr id="1" name=""/>
+        <p:cNvGrpSpPr/>
+        <p:nvPr/>
+      </p:nvGrpSpPr>
+      <p:grpSpPr>
+        <a:xfrm>
+          <a:off x="0" y="0"/>
+          <a:ext cx="0" cy="0"/>
+          <a:chOff x="0" y="0"/>
+          <a:chExt cx="0" cy="0"/>
+        </a:xfrm>
+      </p:grpSpPr>
+      <p:sp>
+        <p:nvSpPr>
+          <p:cNvPr id="2" name="Slide Image Placeholder 1"/>
+          <p:cNvSpPr>
+            <a:spLocks noGrp="1" noRot="1" noChangeAspect="1"/>
+          </p:cNvSpPr>
+          <p:nvPr>
+            <p:ph type="sldImg"/>
+          </p:nvPr>
+        </p:nvSpPr>
+        <p:spPr/>
+      </p:sp>
+      <p:sp>
+        <p:nvSpPr>
+          <p:cNvPr id="3" name="Notes Placeholder 2"/>
+          <p:cNvSpPr>
+            <a:spLocks noGrp="1"/>
+          </p:cNvSpPr>
+          <p:nvPr>
+            <p:ph type="body" idx="1"/>
+          </p:nvPr>
+        </p:nvSpPr>
+        <p:spPr/>
+        <p:txBody>
+          <a:bodyPr/>
+          <a:lstStyle/>
+          <a:p>
+            <a:r>
+              <a:rPr lang="en-US" dirty="0"/>
+              <a:t/>
+            </a:r>
+            <a:endParaRPr lang="en-US" dirty="0"/>
+          </a:p>
+        </p:txBody>
+      </p:sp>
+      <p:sp>
+        <p:nvSpPr>
+          <p:cNvPr id="4" name="Slide Number Placeholder 3"/>
+          <p:cNvSpPr>
+            <a:spLocks noGrp="1"/>
+          </p:cNvSpPr>
+          <p:nvPr>
+            <p:ph type="sldNum" sz="quarter" idx="10"/>
+          </p:nvPr>
+        </p:nvSpPr>
+        <p:spPr/>
+        <p:txBody>
+          <a:bodyPr/>
+          <a:lstStyle/>
+          <a:p>
+            <a:fld id="{F7021451-1387-4CA6-816F-3879F97B5CBC}" type="slidenum">
+              <a:rPr lang="en-US"/>
+              <a:t>13</a:t>
             </a:fld>
             <a:endParaRPr lang="en-US"/>
           </a:p>
@@ -2180,7 +2269,7 @@
         <p:spPr>
           <a:xfrm>
             <a:off x="1433959" y="166688"/>
-            <a:ext cx="644107" cy="123825"/>
+            <a:ext cx="1456718" cy="123825"/>
           </a:xfrm>
           <a:prstGeom prst="rect">
             <a:avLst/>
@@ -2204,7 +2293,7 @@
                 <a:ea typeface="Noto Sans SC" pitchFamily="34" charset="-122"/>
                 <a:cs typeface="Noto Sans SC" pitchFamily="34" charset="-120"/>
               </a:rPr>
-              <a:t>Game · 传声筒</a:t>
+              <a:t>You Do · Clock Hands Challenge</a:t>
             </a:r>
             <a:endParaRPr lang="en-US" sz="700" dirty="0"/>
           </a:p>
@@ -2248,32 +2337,32 @@
         </p:nvSpPr>
         <p:spPr>
           <a:xfrm>
-            <a:off x="5648329" y="1897261"/>
-            <a:ext cx="895192" cy="142875"/>
-          </a:xfrm>
-          <a:prstGeom prst="rect">
-            <a:avLst/>
-          </a:prstGeom>
-          <a:noFill/>
-          <a:ln/>
-        </p:spPr>
-        <p:txBody>
-          <a:bodyPr wrap="square" lIns="0" tIns="0" rIns="0" bIns="0" rtlCol="0" anchor="t"/>
-          <a:lstStyle/>
-          <a:p>
-            <a:pPr algn="ctr" indent="0" marL="0">
+            <a:off x="609600" y="1357610"/>
+            <a:ext cx="11192256" cy="142875"/>
+          </a:xfrm>
+          <a:prstGeom prst="rect">
+            <a:avLst/>
+          </a:prstGeom>
+          <a:noFill/>
+          <a:ln/>
+        </p:spPr>
+        <p:txBody>
+          <a:bodyPr wrap="square" lIns="0" tIns="0" rIns="0" bIns="0" rtlCol="0" anchor="t"/>
+          <a:lstStyle/>
+          <a:p>
+            <a:pPr algn="l" indent="0" marL="0">
               <a:buNone/>
             </a:pPr>
             <a:r>
               <a:rPr lang="en-US" sz="800" b="1" dirty="0">
                 <a:solidFill>
-                  <a:srgbClr val="D4756B"/>
-                </a:solidFill>
-                <a:latin typeface="Noto Sans SC" pitchFamily="34" charset="0"/>
-                <a:ea typeface="Noto Sans SC" pitchFamily="34" charset="-122"/>
-                <a:cs typeface="Noto Sans SC" pitchFamily="34" charset="-120"/>
-              </a:rPr>
-              <a:t>Game · 5 min</a:t>
+                  <a:srgbClr val="3A7D8C"/>
+                </a:solidFill>
+                <a:latin typeface="Noto Sans SC" pitchFamily="34" charset="0"/>
+                <a:ea typeface="Noto Sans SC" pitchFamily="34" charset="-122"/>
+                <a:cs typeface="Noto Sans SC" pitchFamily="34" charset="-120"/>
+              </a:rPr>
+              <a:t>Activity 2 · 8 min — Textbook p85</a:t>
             </a:r>
             <a:endParaRPr lang="en-US" sz="800" dirty="0"/>
           </a:p>
@@ -2287,24 +2376,24 @@
         </p:nvSpPr>
         <p:spPr>
           <a:xfrm>
-            <a:off x="4851051" y="2090886"/>
-            <a:ext cx="2489749" cy="390525"/>
-          </a:xfrm>
-          <a:prstGeom prst="rect">
-            <a:avLst/>
-          </a:prstGeom>
-          <a:noFill/>
-          <a:ln/>
-        </p:spPr>
-        <p:txBody>
-          <a:bodyPr wrap="square" lIns="0" tIns="0" rIns="0" bIns="0" rtlCol="0" anchor="t"/>
-          <a:lstStyle/>
-          <a:p>
-            <a:pPr algn="ctr" indent="0" marL="0">
-              <a:buNone/>
-            </a:pPr>
-            <a:r>
-              <a:rPr lang="en-US" sz="2200" b="1" dirty="0">
+            <a:off x="609600" y="1551236"/>
+            <a:ext cx="11192256" cy="352425"/>
+          </a:xfrm>
+          <a:prstGeom prst="rect">
+            <a:avLst/>
+          </a:prstGeom>
+          <a:noFill/>
+          <a:ln/>
+        </p:spPr>
+        <p:txBody>
+          <a:bodyPr wrap="square" lIns="0" tIns="0" rIns="0" bIns="0" rtlCol="0" anchor="t"/>
+          <a:lstStyle/>
+          <a:p>
+            <a:pPr algn="l" indent="0" marL="0">
+              <a:buNone/>
+            </a:pPr>
+            <a:r>
+              <a:rPr lang="en-US" sz="2000" b="1" dirty="0">
                 <a:solidFill>
                   <a:srgbClr val="1E2A38"/>
                 </a:solidFill>
@@ -2312,9 +2401,9 @@
                 <a:ea typeface="Noto Serif SC" pitchFamily="34" charset="-122"/>
                 <a:cs typeface="Noto Serif SC" pitchFamily="34" charset="-120"/>
               </a:rPr>
-              <a:t>Telephone · 传声筒</a:t>
-            </a:r>
-            <a:endParaRPr lang="en-US" sz="2200" dirty="0"/>
+              <a:t>Clock Hands Challenge · 画钟表</a:t>
+            </a:r>
+            <a:endParaRPr lang="en-US" sz="2000" dirty="0"/>
           </a:p>
         </p:txBody>
       </p:sp>
@@ -2326,8 +2415,47 @@
         </p:nvSpPr>
         <p:spPr>
           <a:xfrm>
-            <a:off x="3978933" y="2506712"/>
-            <a:ext cx="4233985" cy="180975"/>
+            <a:off x="609600" y="1928961"/>
+            <a:ext cx="11192256" cy="161925"/>
+          </a:xfrm>
+          <a:prstGeom prst="rect">
+            <a:avLst/>
+          </a:prstGeom>
+          <a:noFill/>
+          <a:ln/>
+        </p:spPr>
+        <p:txBody>
+          <a:bodyPr wrap="square" lIns="0" tIns="0" rIns="0" bIns="0" rtlCol="0" anchor="t"/>
+          <a:lstStyle/>
+          <a:p>
+            <a:pPr algn="l" indent="0" marL="0">
+              <a:buNone/>
+            </a:pPr>
+            <a:r>
+              <a:rPr lang="en-US" sz="900" dirty="0">
+                <a:solidFill>
+                  <a:srgbClr val="8B94A3"/>
+                </a:solidFill>
+                <a:latin typeface="Noto Sans SC" pitchFamily="34" charset="0"/>
+                <a:ea typeface="Noto Sans SC" pitchFamily="34" charset="-122"/>
+                <a:cs typeface="Noto Sans SC" pitchFamily="34" charset="-120"/>
+              </a:rPr>
+              <a:t>Draw the clock hands on your A4 paper. Hold it up!</a:t>
+            </a:r>
+            <a:endParaRPr lang="en-US" sz="900" dirty="0"/>
+          </a:p>
+        </p:txBody>
+      </p:sp>
+      <p:sp>
+        <p:nvSpPr>
+          <p:cNvPr id="10" name="Text 8"/>
+          <p:cNvSpPr/>
+          <p:nvPr/>
+        </p:nvSpPr>
+        <p:spPr>
+          <a:xfrm>
+            <a:off x="556768" y="2268587"/>
+            <a:ext cx="5388915" cy="228600"/>
           </a:xfrm>
           <a:prstGeom prst="rect">
             <a:avLst/>
@@ -2343,6 +2471,84 @@
               <a:buNone/>
             </a:pPr>
             <a:r>
+              <a:rPr lang="en-US" sz="1100" b="1" dirty="0">
+                <a:solidFill>
+                  <a:srgbClr val="3A7D8C"/>
+                </a:solidFill>
+                <a:latin typeface="Noto Sans SC" pitchFamily="34" charset="0"/>
+                <a:ea typeface="Noto Sans SC" pitchFamily="34" charset="-122"/>
+                <a:cs typeface="Noto Sans SC" pitchFamily="34" charset="-120"/>
+              </a:rPr>
+              <a:t>🎧 Listen &amp; Draw</a:t>
+            </a:r>
+            <a:endParaRPr lang="en-US" sz="1100" dirty="0"/>
+          </a:p>
+        </p:txBody>
+      </p:sp>
+      <p:sp>
+        <p:nvSpPr>
+          <p:cNvPr id="11" name="Text 9"/>
+          <p:cNvSpPr/>
+          <p:nvPr/>
+        </p:nvSpPr>
+        <p:spPr>
+          <a:xfrm>
+            <a:off x="556768" y="2624138"/>
+            <a:ext cx="5388915" cy="504825"/>
+          </a:xfrm>
+          <a:prstGeom prst="rect">
+            <a:avLst/>
+          </a:prstGeom>
+          <a:noFill/>
+          <a:ln/>
+        </p:spPr>
+        <p:txBody>
+          <a:bodyPr wrap="square" lIns="0" tIns="0" rIns="0" bIns="0" rtlCol="0" anchor="t"/>
+          <a:lstStyle/>
+          <a:p>
+            <a:pPr algn="ctr" indent="0" marL="0">
+              <a:buNone/>
+            </a:pPr>
+            <a:r>
+              <a:rPr lang="en-US" sz="2800" b="1" dirty="0">
+                <a:solidFill>
+                  <a:srgbClr val="C8943E"/>
+                </a:solidFill>
+                <a:latin typeface="Noto Serif SC" pitchFamily="34" charset="0"/>
+                <a:ea typeface="Noto Serif SC" pitchFamily="34" charset="-122"/>
+                <a:cs typeface="Noto Serif SC" pitchFamily="34" charset="-120"/>
+              </a:rPr>
+              <a:t>三点</a:t>
+            </a:r>
+            <a:endParaRPr lang="en-US" sz="2800" dirty="0"/>
+          </a:p>
+        </p:txBody>
+      </p:sp>
+      <p:sp>
+        <p:nvSpPr>
+          <p:cNvPr id="12" name="Text 10"/>
+          <p:cNvSpPr/>
+          <p:nvPr/>
+        </p:nvSpPr>
+        <p:spPr>
+          <a:xfrm>
+            <a:off x="556768" y="3179713"/>
+            <a:ext cx="5388915" cy="180975"/>
+          </a:xfrm>
+          <a:prstGeom prst="rect">
+            <a:avLst/>
+          </a:prstGeom>
+          <a:noFill/>
+          <a:ln/>
+        </p:spPr>
+        <p:txBody>
+          <a:bodyPr wrap="square" lIns="0" tIns="0" rIns="0" bIns="0" rtlCol="0" anchor="t"/>
+          <a:lstStyle/>
+          <a:p>
+            <a:pPr algn="ctr" indent="0" marL="0">
+              <a:buNone/>
+            </a:pPr>
+            <a:r>
               <a:rPr lang="en-US" sz="1000" dirty="0">
                 <a:solidFill>
                   <a:srgbClr val="8B94A3"/>
@@ -2351,7 +2557,7 @@
                 <a:ea typeface="Noto Sans SC" pitchFamily="34" charset="-122"/>
                 <a:cs typeface="Noto Sans SC" pitchFamily="34" charset="-120"/>
               </a:rPr>
-              <a:t>Whisper the time down the row. Last person writes it on the board!</a:t>
+              <a:t>3:00</a:t>
             </a:r>
             <a:endParaRPr lang="en-US" sz="1000" dirty="0"/>
           </a:p>
@@ -2359,18 +2565,219 @@
       </p:sp>
       <p:sp>
         <p:nvSpPr>
-          <p:cNvPr id="10" name="Text 8"/>
-          <p:cNvSpPr/>
-          <p:nvPr/>
-        </p:nvSpPr>
-        <p:spPr>
-          <a:xfrm>
-            <a:off x="3989189" y="2865388"/>
-            <a:ext cx="771525" cy="749201"/>
+          <p:cNvPr id="13" name="Text 11"/>
+          <p:cNvSpPr/>
+          <p:nvPr/>
+        </p:nvSpPr>
+        <p:spPr>
+          <a:xfrm>
+            <a:off x="2597200" y="3487638"/>
+            <a:ext cx="1308050" cy="1308050"/>
           </a:xfrm>
           <a:prstGeom prst="roundRect">
             <a:avLst>
-              <a:gd name="adj" fmla="val 13561"/>
+              <a:gd name="adj" fmla="val 69906"/>
+            </a:avLst>
+          </a:prstGeom>
+          <a:solidFill>
+            <a:srgbClr val="FFFFFF"/>
+          </a:solidFill>
+          <a:ln w="19050">
+            <a:solidFill>
+              <a:srgbClr val="C8943E"/>
+            </a:solidFill>
+          </a:ln>
+        </p:spPr>
+        <p:txBody>
+          <a:bodyPr wrap="square" rtlCol="0" anchor="ctr"/>
+          <a:lstStyle/>
+          <a:p>
+            <a:pPr indent="0" marL="0">
+              <a:buNone/>
+            </a:pPr>
+            <a:endParaRPr lang="en-US" dirty="0"/>
+          </a:p>
+        </p:txBody>
+      </p:sp>
+      <p:sp>
+        <p:nvSpPr>
+          <p:cNvPr id="14" name="Text 12"/>
+          <p:cNvSpPr/>
+          <p:nvPr/>
+        </p:nvSpPr>
+        <p:spPr>
+          <a:xfrm>
+            <a:off x="556768" y="4897189"/>
+            <a:ext cx="5388915" cy="142875"/>
+          </a:xfrm>
+          <a:prstGeom prst="rect">
+            <a:avLst/>
+          </a:prstGeom>
+          <a:noFill/>
+          <a:ln/>
+        </p:spPr>
+        <p:txBody>
+          <a:bodyPr wrap="square" lIns="0" tIns="0" rIns="0" bIns="0" rtlCol="0" anchor="t"/>
+          <a:lstStyle/>
+          <a:p>
+            <a:pPr algn="ctr" indent="0" marL="0">
+              <a:spcBef>
+                <a:spcPts val="800"/>
+              </a:spcBef>
+              <a:spcAft>
+                <a:spcPts val="800"/>
+              </a:spcAft>
+              <a:buNone/>
+            </a:pPr>
+            <a:r>
+              <a:rPr lang="en-US" sz="800" dirty="0">
+                <a:solidFill>
+                  <a:srgbClr val="8B94A3"/>
+                </a:solidFill>
+                <a:latin typeface="Noto Sans SC" pitchFamily="34" charset="0"/>
+                <a:ea typeface="Noto Sans SC" pitchFamily="34" charset="-122"/>
+                <a:cs typeface="Noto Sans SC" pitchFamily="34" charset="-120"/>
+              </a:rPr>
+              <a:t>Teacher says the time → students DRAW the hands</a:t>
+            </a:r>
+            <a:endParaRPr lang="en-US" sz="800" dirty="0"/>
+          </a:p>
+        </p:txBody>
+      </p:sp>
+      <p:sp>
+        <p:nvSpPr>
+          <p:cNvPr id="15" name="Text 13"/>
+          <p:cNvSpPr/>
+          <p:nvPr/>
+        </p:nvSpPr>
+        <p:spPr>
+          <a:xfrm>
+            <a:off x="6246318" y="2268587"/>
+            <a:ext cx="5388915" cy="228600"/>
+          </a:xfrm>
+          <a:prstGeom prst="rect">
+            <a:avLst/>
+          </a:prstGeom>
+          <a:noFill/>
+          <a:ln/>
+        </p:spPr>
+        <p:txBody>
+          <a:bodyPr wrap="square" lIns="0" tIns="0" rIns="0" bIns="0" rtlCol="0" anchor="t"/>
+          <a:lstStyle/>
+          <a:p>
+            <a:pPr algn="ctr" indent="0" marL="0">
+              <a:buNone/>
+            </a:pPr>
+            <a:r>
+              <a:rPr lang="en-US" sz="1100" b="1" dirty="0">
+                <a:solidFill>
+                  <a:srgbClr val="3A7D8C"/>
+                </a:solidFill>
+                <a:latin typeface="Noto Sans SC" pitchFamily="34" charset="0"/>
+                <a:ea typeface="Noto Sans SC" pitchFamily="34" charset="-122"/>
+                <a:cs typeface="Noto Sans SC" pitchFamily="34" charset="-120"/>
+              </a:rPr>
+              <a:t>👀 See &amp; Write</a:t>
+            </a:r>
+            <a:endParaRPr lang="en-US" sz="1100" dirty="0"/>
+          </a:p>
+        </p:txBody>
+      </p:sp>
+      <p:sp>
+        <p:nvSpPr>
+          <p:cNvPr id="16" name="Text 14"/>
+          <p:cNvSpPr/>
+          <p:nvPr/>
+        </p:nvSpPr>
+        <p:spPr>
+          <a:xfrm>
+            <a:off x="8286750" y="2624138"/>
+            <a:ext cx="1308050" cy="1308050"/>
+          </a:xfrm>
+          <a:prstGeom prst="roundRect">
+            <a:avLst>
+              <a:gd name="adj" fmla="val 69906"/>
+            </a:avLst>
+          </a:prstGeom>
+          <a:solidFill>
+            <a:srgbClr val="FFFFFF"/>
+          </a:solidFill>
+          <a:ln w="19050">
+            <a:solidFill>
+              <a:srgbClr val="C8943E"/>
+            </a:solidFill>
+          </a:ln>
+        </p:spPr>
+        <p:txBody>
+          <a:bodyPr wrap="square" rtlCol="0" anchor="ctr"/>
+          <a:lstStyle/>
+          <a:p>
+            <a:pPr indent="0" marL="0">
+              <a:buNone/>
+            </a:pPr>
+            <a:endParaRPr lang="en-US" dirty="0"/>
+          </a:p>
+        </p:txBody>
+      </p:sp>
+      <p:sp>
+        <p:nvSpPr>
+          <p:cNvPr id="17" name="Text 15"/>
+          <p:cNvSpPr/>
+          <p:nvPr/>
+        </p:nvSpPr>
+        <p:spPr>
+          <a:xfrm>
+            <a:off x="6246318" y="4033689"/>
+            <a:ext cx="5388915" cy="142875"/>
+          </a:xfrm>
+          <a:prstGeom prst="rect">
+            <a:avLst/>
+          </a:prstGeom>
+          <a:noFill/>
+          <a:ln/>
+        </p:spPr>
+        <p:txBody>
+          <a:bodyPr wrap="square" lIns="0" tIns="0" rIns="0" bIns="0" rtlCol="0" anchor="t"/>
+          <a:lstStyle/>
+          <a:p>
+            <a:pPr algn="ctr" indent="0" marL="0">
+              <a:spcBef>
+                <a:spcPts val="800"/>
+              </a:spcBef>
+              <a:spcAft>
+                <a:spcPts val="800"/>
+              </a:spcAft>
+              <a:buNone/>
+            </a:pPr>
+            <a:r>
+              <a:rPr lang="en-US" sz="800" dirty="0">
+                <a:solidFill>
+                  <a:srgbClr val="8B94A3"/>
+                </a:solidFill>
+                <a:latin typeface="Noto Sans SC" pitchFamily="34" charset="0"/>
+                <a:ea typeface="Noto Sans SC" pitchFamily="34" charset="-122"/>
+                <a:cs typeface="Noto Sans SC" pitchFamily="34" charset="-120"/>
+              </a:rPr>
+              <a:t>Teacher shows clock → students WRITE the Chinese</a:t>
+            </a:r>
+            <a:endParaRPr lang="en-US" sz="800" dirty="0"/>
+          </a:p>
+        </p:txBody>
+      </p:sp>
+      <p:sp>
+        <p:nvSpPr>
+          <p:cNvPr id="18" name="Text 16"/>
+          <p:cNvSpPr/>
+          <p:nvPr/>
+        </p:nvSpPr>
+        <p:spPr>
+          <a:xfrm>
+            <a:off x="3169593" y="5319266"/>
+            <a:ext cx="1846957" cy="333375"/>
+          </a:xfrm>
+          <a:prstGeom prst="roundRect">
+            <a:avLst>
+              <a:gd name="adj" fmla="val 3805714"/>
             </a:avLst>
           </a:prstGeom>
           <a:solidFill>
@@ -2391,141 +2798,128 @@
       </p:sp>
       <p:sp>
         <p:nvSpPr>
-          <p:cNvPr id="11" name="Text 9"/>
-          <p:cNvSpPr/>
-          <p:nvPr/>
-        </p:nvSpPr>
-        <p:spPr>
-          <a:xfrm>
-            <a:off x="4162729" y="2992338"/>
-            <a:ext cx="424446" cy="352425"/>
-          </a:xfrm>
-          <a:prstGeom prst="rect">
-            <a:avLst/>
-          </a:prstGeom>
-          <a:noFill/>
-          <a:ln/>
-        </p:spPr>
-        <p:txBody>
-          <a:bodyPr wrap="square" lIns="0" tIns="0" rIns="0" bIns="0" rtlCol="0" anchor="t"/>
-          <a:lstStyle/>
-          <a:p>
-            <a:pPr algn="ctr" indent="0" marL="0">
-              <a:buNone/>
-            </a:pPr>
-            <a:r>
-              <a:rPr lang="en-US" sz="2000" dirty="0">
-                <a:solidFill>
-                  <a:srgbClr val="1E2A38"/>
-                </a:solidFill>
-                <a:latin typeface="Noto Sans SC" pitchFamily="34" charset="0"/>
-                <a:ea typeface="Noto Sans SC" pitchFamily="34" charset="-122"/>
-                <a:cs typeface="Noto Sans SC" pitchFamily="34" charset="-120"/>
-              </a:rPr>
-              <a:t>👂</a:t>
-            </a:r>
-            <a:endParaRPr lang="en-US" sz="2000" dirty="0"/>
-          </a:p>
-        </p:txBody>
-      </p:sp>
-      <p:sp>
-        <p:nvSpPr>
-          <p:cNvPr id="12" name="Text 10"/>
-          <p:cNvSpPr/>
-          <p:nvPr/>
-        </p:nvSpPr>
-        <p:spPr>
-          <a:xfrm>
-            <a:off x="4162729" y="3344763"/>
-            <a:ext cx="424446" cy="142875"/>
-          </a:xfrm>
-          <a:prstGeom prst="rect">
-            <a:avLst/>
-          </a:prstGeom>
-          <a:noFill/>
-          <a:ln/>
-        </p:spPr>
-        <p:txBody>
-          <a:bodyPr wrap="square" lIns="0" tIns="0" rIns="0" bIns="0" rtlCol="0" anchor="t"/>
-          <a:lstStyle/>
-          <a:p>
-            <a:pPr algn="ctr" indent="0" marL="0">
-              <a:buNone/>
-            </a:pPr>
-            <a:r>
-              <a:rPr lang="en-US" sz="800" b="1" dirty="0">
-                <a:solidFill>
-                  <a:srgbClr val="1E2A38"/>
-                </a:solidFill>
-                <a:latin typeface="Noto Sans SC" pitchFamily="34" charset="0"/>
-                <a:ea typeface="Noto Sans SC" pitchFamily="34" charset="-122"/>
-                <a:cs typeface="Noto Sans SC" pitchFamily="34" charset="-120"/>
-              </a:rPr>
-              <a:t>Whisper</a:t>
-            </a:r>
-            <a:endParaRPr lang="en-US" sz="800" dirty="0"/>
-          </a:p>
-        </p:txBody>
-      </p:sp>
-      <p:sp>
-        <p:nvSpPr>
-          <p:cNvPr id="13" name="Text 11"/>
-          <p:cNvSpPr/>
-          <p:nvPr/>
-        </p:nvSpPr>
-        <p:spPr>
-          <a:xfrm>
-            <a:off x="4885886" y="3116163"/>
-            <a:ext cx="181407" cy="247650"/>
-          </a:xfrm>
-          <a:prstGeom prst="rect">
-            <a:avLst/>
-          </a:prstGeom>
-          <a:noFill/>
-          <a:ln/>
-        </p:spPr>
-        <p:txBody>
-          <a:bodyPr wrap="square" lIns="0" tIns="0" rIns="0" bIns="0" rtlCol="0" anchor="t"/>
-          <a:lstStyle/>
-          <a:p>
-            <a:pPr algn="ctr" indent="0" marL="0">
-              <a:spcBef>
-                <a:spcPts val="1400"/>
-              </a:spcBef>
-              <a:spcAft>
-                <a:spcPts val="1400"/>
-              </a:spcAft>
-              <a:buNone/>
-            </a:pPr>
-            <a:r>
-              <a:rPr lang="en-US" sz="1400" dirty="0">
-                <a:solidFill>
-                  <a:srgbClr val="C8943E"/>
-                </a:solidFill>
-                <a:latin typeface="Noto Sans SC" pitchFamily="34" charset="0"/>
-                <a:ea typeface="Noto Sans SC" pitchFamily="34" charset="-122"/>
-                <a:cs typeface="Noto Sans SC" pitchFamily="34" charset="-120"/>
-              </a:rPr>
-              <a:t>→</a:t>
-            </a:r>
-            <a:endParaRPr lang="en-US" sz="1400" dirty="0"/>
-          </a:p>
-        </p:txBody>
-      </p:sp>
-      <p:sp>
-        <p:nvSpPr>
-          <p:cNvPr id="14" name="Text 12"/>
-          <p:cNvSpPr/>
-          <p:nvPr/>
-        </p:nvSpPr>
-        <p:spPr>
-          <a:xfrm>
-            <a:off x="5192464" y="2865388"/>
-            <a:ext cx="869454" cy="749201"/>
+          <p:cNvPr id="19" name="Text 17"/>
+          <p:cNvSpPr/>
+          <p:nvPr/>
+        </p:nvSpPr>
+        <p:spPr>
+          <a:xfrm>
+            <a:off x="3321993" y="5397103"/>
+            <a:ext cx="177701" cy="177701"/>
           </a:xfrm>
           <a:prstGeom prst="roundRect">
             <a:avLst>
-              <a:gd name="adj" fmla="val 13561"/>
+              <a:gd name="adj" fmla="val 514572"/>
+            </a:avLst>
+          </a:prstGeom>
+          <a:solidFill>
+            <a:srgbClr val="C8943E"/>
+          </a:solidFill>
+          <a:ln/>
+        </p:spPr>
+        <p:txBody>
+          <a:bodyPr wrap="square" rtlCol="0" anchor="ctr"/>
+          <a:lstStyle/>
+          <a:p>
+            <a:pPr indent="0" marL="0">
+              <a:buNone/>
+            </a:pPr>
+            <a:endParaRPr lang="en-US" dirty="0"/>
+          </a:p>
+        </p:txBody>
+      </p:sp>
+      <p:sp>
+        <p:nvSpPr>
+          <p:cNvPr id="20" name="Text 18"/>
+          <p:cNvSpPr/>
+          <p:nvPr/>
+        </p:nvSpPr>
+        <p:spPr>
+          <a:xfrm>
+            <a:off x="3390602" y="5424041"/>
+            <a:ext cx="41139" cy="123825"/>
+          </a:xfrm>
+          <a:prstGeom prst="rect">
+            <a:avLst/>
+          </a:prstGeom>
+          <a:noFill/>
+          <a:ln/>
+        </p:spPr>
+        <p:txBody>
+          <a:bodyPr wrap="square" lIns="0" tIns="0" rIns="0" bIns="0" rtlCol="0" anchor="t"/>
+          <a:lstStyle/>
+          <a:p>
+            <a:pPr algn="l" indent="0" marL="0">
+              <a:buNone/>
+            </a:pPr>
+            <a:r>
+              <a:rPr lang="en-US" sz="700" b="1" dirty="0">
+                <a:solidFill>
+                  <a:srgbClr val="FFFFFF"/>
+                </a:solidFill>
+                <a:latin typeface="Noto Sans SC" pitchFamily="34" charset="0"/>
+                <a:ea typeface="Noto Sans SC" pitchFamily="34" charset="-122"/>
+                <a:cs typeface="Noto Sans SC" pitchFamily="34" charset="-120"/>
+              </a:rPr>
+              <a:t>1</a:t>
+            </a:r>
+            <a:endParaRPr lang="en-US" sz="700" dirty="0"/>
+          </a:p>
+        </p:txBody>
+      </p:sp>
+      <p:sp>
+        <p:nvSpPr>
+          <p:cNvPr id="21" name="Text 19"/>
+          <p:cNvSpPr/>
+          <p:nvPr/>
+        </p:nvSpPr>
+        <p:spPr>
+          <a:xfrm>
+            <a:off x="3575893" y="5395466"/>
+            <a:ext cx="1314021" cy="180975"/>
+          </a:xfrm>
+          <a:prstGeom prst="rect">
+            <a:avLst/>
+          </a:prstGeom>
+          <a:noFill/>
+          <a:ln/>
+        </p:spPr>
+        <p:txBody>
+          <a:bodyPr wrap="square" lIns="0" tIns="0" rIns="0" bIns="0" rtlCol="0" anchor="t"/>
+          <a:lstStyle/>
+          <a:p>
+            <a:pPr algn="l" indent="0" marL="0">
+              <a:buNone/>
+            </a:pPr>
+            <a:r>
+              <a:rPr lang="en-US" sz="1000" dirty="0">
+                <a:solidFill>
+                  <a:srgbClr val="5B6677"/>
+                </a:solidFill>
+                <a:latin typeface="Noto Sans SC" pitchFamily="34" charset="0"/>
+                <a:ea typeface="Noto Sans SC" pitchFamily="34" charset="-122"/>
+                <a:cs typeface="Noto Sans SC" pitchFamily="34" charset="-120"/>
+              </a:rPr>
+              <a:t>Listen to the teacher</a:t>
+            </a:r>
+            <a:endParaRPr lang="en-US" sz="1000" dirty="0"/>
+          </a:p>
+        </p:txBody>
+      </p:sp>
+      <p:sp>
+        <p:nvSpPr>
+          <p:cNvPr id="22" name="Text 20"/>
+          <p:cNvSpPr/>
+          <p:nvPr/>
+        </p:nvSpPr>
+        <p:spPr>
+          <a:xfrm>
+            <a:off x="5321350" y="5319266"/>
+            <a:ext cx="2190304" cy="333375"/>
+          </a:xfrm>
+          <a:prstGeom prst="roundRect">
+            <a:avLst>
+              <a:gd name="adj" fmla="val 3805714"/>
             </a:avLst>
           </a:prstGeom>
           <a:solidFill>
@@ -2546,141 +2940,128 @@
       </p:sp>
       <p:sp>
         <p:nvSpPr>
-          <p:cNvPr id="15" name="Text 13"/>
-          <p:cNvSpPr/>
-          <p:nvPr/>
-        </p:nvSpPr>
-        <p:spPr>
-          <a:xfrm>
-            <a:off x="5365025" y="2992338"/>
-            <a:ext cx="524333" cy="352425"/>
-          </a:xfrm>
-          <a:prstGeom prst="rect">
-            <a:avLst/>
-          </a:prstGeom>
-          <a:noFill/>
-          <a:ln/>
-        </p:spPr>
-        <p:txBody>
-          <a:bodyPr wrap="square" lIns="0" tIns="0" rIns="0" bIns="0" rtlCol="0" anchor="t"/>
-          <a:lstStyle/>
-          <a:p>
-            <a:pPr algn="ctr" indent="0" marL="0">
-              <a:buNone/>
-            </a:pPr>
-            <a:r>
-              <a:rPr lang="en-US" sz="2000" dirty="0">
-                <a:solidFill>
-                  <a:srgbClr val="1E2A38"/>
-                </a:solidFill>
-                <a:latin typeface="Noto Sans SC" pitchFamily="34" charset="0"/>
-                <a:ea typeface="Noto Sans SC" pitchFamily="34" charset="-122"/>
-                <a:cs typeface="Noto Sans SC" pitchFamily="34" charset="-120"/>
-              </a:rPr>
-              <a:t>🗣️</a:t>
-            </a:r>
-            <a:endParaRPr lang="en-US" sz="2000" dirty="0"/>
-          </a:p>
-        </p:txBody>
-      </p:sp>
-      <p:sp>
-        <p:nvSpPr>
-          <p:cNvPr id="16" name="Text 14"/>
-          <p:cNvSpPr/>
-          <p:nvPr/>
-        </p:nvSpPr>
-        <p:spPr>
-          <a:xfrm>
-            <a:off x="5365025" y="3344763"/>
-            <a:ext cx="524333" cy="142875"/>
-          </a:xfrm>
-          <a:prstGeom prst="rect">
-            <a:avLst/>
-          </a:prstGeom>
-          <a:noFill/>
-          <a:ln/>
-        </p:spPr>
-        <p:txBody>
-          <a:bodyPr wrap="square" lIns="0" tIns="0" rIns="0" bIns="0" rtlCol="0" anchor="t"/>
-          <a:lstStyle/>
-          <a:p>
-            <a:pPr algn="ctr" indent="0" marL="0">
-              <a:buNone/>
-            </a:pPr>
-            <a:r>
-              <a:rPr lang="en-US" sz="800" b="1" dirty="0">
-                <a:solidFill>
-                  <a:srgbClr val="1E2A38"/>
-                </a:solidFill>
-                <a:latin typeface="Noto Sans SC" pitchFamily="34" charset="0"/>
-                <a:ea typeface="Noto Sans SC" pitchFamily="34" charset="-122"/>
-                <a:cs typeface="Noto Sans SC" pitchFamily="34" charset="-120"/>
-              </a:rPr>
-              <a:t>Pass it on</a:t>
-            </a:r>
-            <a:endParaRPr lang="en-US" sz="800" dirty="0"/>
-          </a:p>
-        </p:txBody>
-      </p:sp>
-      <p:sp>
-        <p:nvSpPr>
-          <p:cNvPr id="17" name="Text 15"/>
-          <p:cNvSpPr/>
-          <p:nvPr/>
-        </p:nvSpPr>
-        <p:spPr>
-          <a:xfrm>
-            <a:off x="6187090" y="3116163"/>
-            <a:ext cx="181407" cy="247650"/>
-          </a:xfrm>
-          <a:prstGeom prst="rect">
-            <a:avLst/>
-          </a:prstGeom>
-          <a:noFill/>
-          <a:ln/>
-        </p:spPr>
-        <p:txBody>
-          <a:bodyPr wrap="square" lIns="0" tIns="0" rIns="0" bIns="0" rtlCol="0" anchor="t"/>
-          <a:lstStyle/>
-          <a:p>
-            <a:pPr algn="ctr" indent="0" marL="0">
-              <a:spcBef>
-                <a:spcPts val="1400"/>
-              </a:spcBef>
-              <a:spcAft>
-                <a:spcPts val="1400"/>
-              </a:spcAft>
-              <a:buNone/>
-            </a:pPr>
-            <a:r>
-              <a:rPr lang="en-US" sz="1400" dirty="0">
-                <a:solidFill>
-                  <a:srgbClr val="C8943E"/>
-                </a:solidFill>
-                <a:latin typeface="Noto Sans SC" pitchFamily="34" charset="0"/>
-                <a:ea typeface="Noto Sans SC" pitchFamily="34" charset="-122"/>
-                <a:cs typeface="Noto Sans SC" pitchFamily="34" charset="-120"/>
-              </a:rPr>
-              <a:t>→</a:t>
-            </a:r>
-            <a:endParaRPr lang="en-US" sz="1400" dirty="0"/>
-          </a:p>
-        </p:txBody>
-      </p:sp>
-      <p:sp>
-        <p:nvSpPr>
-          <p:cNvPr id="18" name="Text 16"/>
-          <p:cNvSpPr/>
-          <p:nvPr/>
-        </p:nvSpPr>
-        <p:spPr>
-          <a:xfrm>
-            <a:off x="6493669" y="2865388"/>
-            <a:ext cx="612577" cy="749201"/>
+          <p:cNvPr id="23" name="Text 21"/>
+          <p:cNvSpPr/>
+          <p:nvPr/>
+        </p:nvSpPr>
+        <p:spPr>
+          <a:xfrm>
+            <a:off x="5473750" y="5397103"/>
+            <a:ext cx="177701" cy="177701"/>
           </a:xfrm>
           <a:prstGeom prst="roundRect">
             <a:avLst>
-              <a:gd name="adj" fmla="val 16586"/>
+              <a:gd name="adj" fmla="val 514572"/>
+            </a:avLst>
+          </a:prstGeom>
+          <a:solidFill>
+            <a:srgbClr val="C8943E"/>
+          </a:solidFill>
+          <a:ln/>
+        </p:spPr>
+        <p:txBody>
+          <a:bodyPr wrap="square" rtlCol="0" anchor="ctr"/>
+          <a:lstStyle/>
+          <a:p>
+            <a:pPr indent="0" marL="0">
+              <a:buNone/>
+            </a:pPr>
+            <a:endParaRPr lang="en-US" dirty="0"/>
+          </a:p>
+        </p:txBody>
+      </p:sp>
+      <p:sp>
+        <p:nvSpPr>
+          <p:cNvPr id="24" name="Text 22"/>
+          <p:cNvSpPr/>
+          <p:nvPr/>
+        </p:nvSpPr>
+        <p:spPr>
+          <a:xfrm>
+            <a:off x="5534323" y="5424041"/>
+            <a:ext cx="57686" cy="123825"/>
+          </a:xfrm>
+          <a:prstGeom prst="rect">
+            <a:avLst/>
+          </a:prstGeom>
+          <a:noFill/>
+          <a:ln/>
+        </p:spPr>
+        <p:txBody>
+          <a:bodyPr wrap="square" lIns="0" tIns="0" rIns="0" bIns="0" rtlCol="0" anchor="t"/>
+          <a:lstStyle/>
+          <a:p>
+            <a:pPr algn="l" indent="0" marL="0">
+              <a:buNone/>
+            </a:pPr>
+            <a:r>
+              <a:rPr lang="en-US" sz="700" b="1" dirty="0">
+                <a:solidFill>
+                  <a:srgbClr val="FFFFFF"/>
+                </a:solidFill>
+                <a:latin typeface="Noto Sans SC" pitchFamily="34" charset="0"/>
+                <a:ea typeface="Noto Sans SC" pitchFamily="34" charset="-122"/>
+                <a:cs typeface="Noto Sans SC" pitchFamily="34" charset="-120"/>
+              </a:rPr>
+              <a:t>2</a:t>
+            </a:r>
+            <a:endParaRPr lang="en-US" sz="700" dirty="0"/>
+          </a:p>
+        </p:txBody>
+      </p:sp>
+      <p:sp>
+        <p:nvSpPr>
+          <p:cNvPr id="25" name="Text 23"/>
+          <p:cNvSpPr/>
+          <p:nvPr/>
+        </p:nvSpPr>
+        <p:spPr>
+          <a:xfrm>
+            <a:off x="5727650" y="5395466"/>
+            <a:ext cx="1664235" cy="180975"/>
+          </a:xfrm>
+          <a:prstGeom prst="rect">
+            <a:avLst/>
+          </a:prstGeom>
+          <a:noFill/>
+          <a:ln/>
+        </p:spPr>
+        <p:txBody>
+          <a:bodyPr wrap="square" lIns="0" tIns="0" rIns="0" bIns="0" rtlCol="0" anchor="t"/>
+          <a:lstStyle/>
+          <a:p>
+            <a:pPr algn="l" indent="0" marL="0">
+              <a:buNone/>
+            </a:pPr>
+            <a:r>
+              <a:rPr lang="en-US" sz="1000" dirty="0">
+                <a:solidFill>
+                  <a:srgbClr val="5B6677"/>
+                </a:solidFill>
+                <a:latin typeface="Noto Sans SC" pitchFamily="34" charset="0"/>
+                <a:ea typeface="Noto Sans SC" pitchFamily="34" charset="-122"/>
+                <a:cs typeface="Noto Sans SC" pitchFamily="34" charset="-120"/>
+              </a:rPr>
+              <a:t>Draw or write on A4 paper</a:t>
+            </a:r>
+            <a:endParaRPr lang="en-US" sz="1000" dirty="0"/>
+          </a:p>
+        </p:txBody>
+      </p:sp>
+      <p:sp>
+        <p:nvSpPr>
+          <p:cNvPr id="26" name="Text 24"/>
+          <p:cNvSpPr/>
+          <p:nvPr/>
+        </p:nvSpPr>
+        <p:spPr>
+          <a:xfrm>
+            <a:off x="7816453" y="5319266"/>
+            <a:ext cx="1205805" cy="333375"/>
+          </a:xfrm>
+          <a:prstGeom prst="roundRect">
+            <a:avLst>
+              <a:gd name="adj" fmla="val 3805714"/>
             </a:avLst>
           </a:prstGeom>
           <a:solidFill>
@@ -2701,145 +3082,22 @@
       </p:sp>
       <p:sp>
         <p:nvSpPr>
-          <p:cNvPr id="19" name="Text 17"/>
-          <p:cNvSpPr/>
-          <p:nvPr/>
-        </p:nvSpPr>
-        <p:spPr>
-          <a:xfrm>
-            <a:off x="6668798" y="2992338"/>
-            <a:ext cx="262319" cy="352425"/>
-          </a:xfrm>
-          <a:prstGeom prst="rect">
-            <a:avLst/>
-          </a:prstGeom>
-          <a:noFill/>
-          <a:ln/>
-        </p:spPr>
-        <p:txBody>
-          <a:bodyPr wrap="square" lIns="0" tIns="0" rIns="0" bIns="0" rtlCol="0" anchor="t"/>
-          <a:lstStyle/>
-          <a:p>
-            <a:pPr algn="ctr" indent="0" marL="0">
-              <a:buNone/>
-            </a:pPr>
-            <a:r>
-              <a:rPr lang="en-US" sz="2000" dirty="0">
-                <a:solidFill>
-                  <a:srgbClr val="1E2A38"/>
-                </a:solidFill>
-                <a:latin typeface="Noto Sans SC" pitchFamily="34" charset="0"/>
-                <a:ea typeface="Noto Sans SC" pitchFamily="34" charset="-122"/>
-                <a:cs typeface="Noto Sans SC" pitchFamily="34" charset="-120"/>
-              </a:rPr>
-              <a:t>🏃</a:t>
-            </a:r>
-            <a:endParaRPr lang="en-US" sz="2000" dirty="0"/>
-          </a:p>
-        </p:txBody>
-      </p:sp>
-      <p:sp>
-        <p:nvSpPr>
-          <p:cNvPr id="20" name="Text 18"/>
-          <p:cNvSpPr/>
-          <p:nvPr/>
-        </p:nvSpPr>
-        <p:spPr>
-          <a:xfrm>
-            <a:off x="6668798" y="3344763"/>
-            <a:ext cx="262319" cy="142875"/>
-          </a:xfrm>
-          <a:prstGeom prst="rect">
-            <a:avLst/>
-          </a:prstGeom>
-          <a:noFill/>
-          <a:ln/>
-        </p:spPr>
-        <p:txBody>
-          <a:bodyPr wrap="square" lIns="0" tIns="0" rIns="0" bIns="0" rtlCol="0" anchor="t"/>
-          <a:lstStyle/>
-          <a:p>
-            <a:pPr algn="ctr" indent="0" marL="0">
-              <a:buNone/>
-            </a:pPr>
-            <a:r>
-              <a:rPr lang="en-US" sz="800" b="1" dirty="0">
-                <a:solidFill>
-                  <a:srgbClr val="1E2A38"/>
-                </a:solidFill>
-                <a:latin typeface="Noto Sans SC" pitchFamily="34" charset="0"/>
-                <a:ea typeface="Noto Sans SC" pitchFamily="34" charset="-122"/>
-                <a:cs typeface="Noto Sans SC" pitchFamily="34" charset="-120"/>
-              </a:rPr>
-              <a:t>Run!</a:t>
-            </a:r>
-            <a:endParaRPr lang="en-US" sz="800" dirty="0"/>
-          </a:p>
-        </p:txBody>
-      </p:sp>
-      <p:sp>
-        <p:nvSpPr>
-          <p:cNvPr id="21" name="Text 19"/>
-          <p:cNvSpPr/>
-          <p:nvPr/>
-        </p:nvSpPr>
-        <p:spPr>
-          <a:xfrm>
-            <a:off x="7231417" y="3116163"/>
-            <a:ext cx="181407" cy="247650"/>
-          </a:xfrm>
-          <a:prstGeom prst="rect">
-            <a:avLst/>
-          </a:prstGeom>
-          <a:noFill/>
-          <a:ln/>
-        </p:spPr>
-        <p:txBody>
-          <a:bodyPr wrap="square" lIns="0" tIns="0" rIns="0" bIns="0" rtlCol="0" anchor="t"/>
-          <a:lstStyle/>
-          <a:p>
-            <a:pPr algn="ctr" indent="0" marL="0">
-              <a:spcBef>
-                <a:spcPts val="1400"/>
-              </a:spcBef>
-              <a:spcAft>
-                <a:spcPts val="1400"/>
-              </a:spcAft>
-              <a:buNone/>
-            </a:pPr>
-            <a:r>
-              <a:rPr lang="en-US" sz="1400" dirty="0">
-                <a:solidFill>
-                  <a:srgbClr val="C8943E"/>
-                </a:solidFill>
-                <a:latin typeface="Noto Sans SC" pitchFamily="34" charset="0"/>
-                <a:ea typeface="Noto Sans SC" pitchFamily="34" charset="-122"/>
-                <a:cs typeface="Noto Sans SC" pitchFamily="34" charset="-120"/>
-              </a:rPr>
-              <a:t>→</a:t>
-            </a:r>
-            <a:endParaRPr lang="en-US" sz="1400" dirty="0"/>
-          </a:p>
-        </p:txBody>
-      </p:sp>
-      <p:sp>
-        <p:nvSpPr>
-          <p:cNvPr id="22" name="Text 20"/>
-          <p:cNvSpPr/>
-          <p:nvPr/>
-        </p:nvSpPr>
-        <p:spPr>
-          <a:xfrm>
-            <a:off x="7537996" y="2865388"/>
-            <a:ext cx="664815" cy="749201"/>
+          <p:cNvPr id="27" name="Text 25"/>
+          <p:cNvSpPr/>
+          <p:nvPr/>
+        </p:nvSpPr>
+        <p:spPr>
+          <a:xfrm>
+            <a:off x="7968853" y="5397103"/>
+            <a:ext cx="177701" cy="177701"/>
           </a:xfrm>
           <a:prstGeom prst="roundRect">
             <a:avLst>
-              <a:gd name="adj" fmla="val 15282"/>
+              <a:gd name="adj" fmla="val 514572"/>
             </a:avLst>
           </a:prstGeom>
           <a:solidFill>
-            <a:srgbClr val="F6F2E8"/>
+            <a:srgbClr val="C8943E"/>
           </a:solidFill>
           <a:ln/>
         </p:spPr>
@@ -2856,148 +3114,38 @@
       </p:sp>
       <p:sp>
         <p:nvSpPr>
-          <p:cNvPr id="23" name="Text 21"/>
-          <p:cNvSpPr/>
-          <p:nvPr/>
-        </p:nvSpPr>
-        <p:spPr>
-          <a:xfrm>
-            <a:off x="7712602" y="2992338"/>
-            <a:ext cx="315602" cy="352425"/>
-          </a:xfrm>
-          <a:prstGeom prst="rect">
-            <a:avLst/>
-          </a:prstGeom>
-          <a:noFill/>
-          <a:ln/>
-        </p:spPr>
-        <p:txBody>
-          <a:bodyPr wrap="square" lIns="0" tIns="0" rIns="0" bIns="0" rtlCol="0" anchor="t"/>
-          <a:lstStyle/>
-          <a:p>
-            <a:pPr algn="ctr" indent="0" marL="0">
-              <a:buNone/>
-            </a:pPr>
-            <a:r>
-              <a:rPr lang="en-US" sz="2000" dirty="0">
-                <a:solidFill>
-                  <a:srgbClr val="1E2A38"/>
-                </a:solidFill>
-                <a:latin typeface="Noto Sans SC" pitchFamily="34" charset="0"/>
-                <a:ea typeface="Noto Sans SC" pitchFamily="34" charset="-122"/>
-                <a:cs typeface="Noto Sans SC" pitchFamily="34" charset="-120"/>
-              </a:rPr>
-              <a:t>✍️</a:t>
-            </a:r>
-            <a:endParaRPr lang="en-US" sz="2000" dirty="0"/>
-          </a:p>
-        </p:txBody>
-      </p:sp>
-      <p:sp>
-        <p:nvSpPr>
-          <p:cNvPr id="24" name="Text 22"/>
-          <p:cNvSpPr/>
-          <p:nvPr/>
-        </p:nvSpPr>
-        <p:spPr>
-          <a:xfrm>
-            <a:off x="7712602" y="3344763"/>
-            <a:ext cx="315602" cy="142875"/>
-          </a:xfrm>
-          <a:prstGeom prst="rect">
-            <a:avLst/>
-          </a:prstGeom>
-          <a:noFill/>
-          <a:ln/>
-        </p:spPr>
-        <p:txBody>
-          <a:bodyPr wrap="square" lIns="0" tIns="0" rIns="0" bIns="0" rtlCol="0" anchor="t"/>
-          <a:lstStyle/>
-          <a:p>
-            <a:pPr algn="ctr" indent="0" marL="0">
-              <a:buNone/>
-            </a:pPr>
-            <a:r>
-              <a:rPr lang="en-US" sz="800" b="1" dirty="0">
-                <a:solidFill>
-                  <a:srgbClr val="1E2A38"/>
-                </a:solidFill>
-                <a:latin typeface="Noto Sans SC" pitchFamily="34" charset="0"/>
-                <a:ea typeface="Noto Sans SC" pitchFamily="34" charset="-122"/>
-                <a:cs typeface="Noto Sans SC" pitchFamily="34" charset="-120"/>
-              </a:rPr>
-              <a:t>Write!</a:t>
-            </a:r>
-            <a:endParaRPr lang="en-US" sz="800" dirty="0"/>
-          </a:p>
-        </p:txBody>
-      </p:sp>
-      <p:sp>
-        <p:nvSpPr>
-          <p:cNvPr id="25" name="Text 23"/>
-          <p:cNvSpPr/>
-          <p:nvPr/>
-        </p:nvSpPr>
-        <p:spPr>
-          <a:xfrm>
-            <a:off x="3006030" y="3817739"/>
-            <a:ext cx="1449735" cy="952500"/>
-          </a:xfrm>
-          <a:prstGeom prst="roundRect">
-            <a:avLst>
-              <a:gd name="adj" fmla="val 10667"/>
-            </a:avLst>
-          </a:prstGeom>
-          <a:solidFill>
-            <a:srgbClr val="F6F2E8"/>
-          </a:solidFill>
-          <a:ln/>
-        </p:spPr>
-        <p:txBody>
-          <a:bodyPr wrap="square" rtlCol="0" anchor="ctr"/>
-          <a:lstStyle/>
-          <a:p>
-            <a:pPr indent="0" marL="0">
-              <a:buNone/>
-            </a:pPr>
-            <a:endParaRPr lang="en-US" dirty="0"/>
-          </a:p>
-        </p:txBody>
-      </p:sp>
-      <p:sp>
-        <p:nvSpPr>
-          <p:cNvPr id="26" name="Text 24"/>
-          <p:cNvSpPr/>
-          <p:nvPr/>
-        </p:nvSpPr>
-        <p:spPr>
-          <a:xfrm>
-            <a:off x="3121023" y="3970139"/>
-            <a:ext cx="1219751" cy="123825"/>
-          </a:xfrm>
-          <a:prstGeom prst="rect">
-            <a:avLst/>
-          </a:prstGeom>
-          <a:noFill/>
-          <a:ln/>
-        </p:spPr>
-        <p:txBody>
-          <a:bodyPr wrap="square" lIns="0" tIns="0" rIns="0" bIns="0" rtlCol="0" anchor="t"/>
-          <a:lstStyle/>
-          <a:p>
-            <a:pPr algn="ctr" indent="0" marL="0">
+          <p:cNvPr id="28" name="Text 26"/>
+          <p:cNvSpPr/>
+          <p:nvPr/>
+        </p:nvSpPr>
+        <p:spPr>
+          <a:xfrm>
+            <a:off x="8029129" y="5424041"/>
+            <a:ext cx="58141" cy="123825"/>
+          </a:xfrm>
+          <a:prstGeom prst="rect">
+            <a:avLst/>
+          </a:prstGeom>
+          <a:noFill/>
+          <a:ln/>
+        </p:spPr>
+        <p:txBody>
+          <a:bodyPr wrap="square" lIns="0" tIns="0" rIns="0" bIns="0" rtlCol="0" anchor="t"/>
+          <a:lstStyle/>
+          <a:p>
+            <a:pPr algn="l" indent="0" marL="0">
               <a:buNone/>
             </a:pPr>
             <a:r>
               <a:rPr lang="en-US" sz="700" b="1" dirty="0">
                 <a:solidFill>
-                  <a:srgbClr val="3A7D8C"/>
-                </a:solidFill>
-                <a:latin typeface="Noto Sans SC" pitchFamily="34" charset="0"/>
-                <a:ea typeface="Noto Sans SC" pitchFamily="34" charset="-122"/>
-                <a:cs typeface="Noto Sans SC" pitchFamily="34" charset="-120"/>
-              </a:rPr>
-              <a:t>Round 1</a:t>
+                  <a:srgbClr val="FFFFFF"/>
+                </a:solidFill>
+                <a:latin typeface="Noto Sans SC" pitchFamily="34" charset="0"/>
+                <a:ea typeface="Noto Sans SC" pitchFamily="34" charset="-122"/>
+                <a:cs typeface="Noto Sans SC" pitchFamily="34" charset="-120"/>
+              </a:rPr>
+              <a:t>3</a:t>
             </a:r>
             <a:endParaRPr lang="en-US" sz="700" dirty="0"/>
           </a:p>
@@ -3005,614 +3153,46 @@
       </p:sp>
       <p:sp>
         <p:nvSpPr>
-          <p:cNvPr id="27" name="Text 25"/>
-          <p:cNvSpPr/>
-          <p:nvPr/>
-        </p:nvSpPr>
-        <p:spPr>
-          <a:xfrm>
-            <a:off x="3121023" y="4093964"/>
-            <a:ext cx="1219751" cy="314325"/>
-          </a:xfrm>
-          <a:prstGeom prst="rect">
-            <a:avLst/>
-          </a:prstGeom>
-          <a:noFill/>
-          <a:ln/>
-        </p:spPr>
-        <p:txBody>
-          <a:bodyPr wrap="square" lIns="0" tIns="0" rIns="0" bIns="0" rtlCol="0" anchor="t"/>
-          <a:lstStyle/>
-          <a:p>
-            <a:pPr algn="ctr" indent="0" marL="0">
-              <a:buNone/>
-            </a:pPr>
-            <a:r>
-              <a:rPr lang="en-US" sz="1800" b="1" dirty="0">
-                <a:solidFill>
-                  <a:srgbClr val="1E2A38"/>
-                </a:solidFill>
-                <a:latin typeface="Noto Serif SC" pitchFamily="34" charset="0"/>
-                <a:ea typeface="Noto Serif SC" pitchFamily="34" charset="-122"/>
-                <a:cs typeface="Noto Serif SC" pitchFamily="34" charset="-120"/>
-              </a:rPr>
-              <a:t>五点</a:t>
-            </a:r>
-            <a:endParaRPr lang="en-US" sz="1800" dirty="0"/>
-          </a:p>
-        </p:txBody>
-      </p:sp>
-      <p:sp>
-        <p:nvSpPr>
-          <p:cNvPr id="28" name="Text 26"/>
-          <p:cNvSpPr/>
-          <p:nvPr/>
-        </p:nvSpPr>
-        <p:spPr>
-          <a:xfrm>
-            <a:off x="3121023" y="4408289"/>
-            <a:ext cx="1219751" cy="142875"/>
-          </a:xfrm>
-          <a:prstGeom prst="rect">
-            <a:avLst/>
-          </a:prstGeom>
-          <a:noFill/>
-          <a:ln/>
-        </p:spPr>
-        <p:txBody>
-          <a:bodyPr wrap="square" lIns="0" tIns="0" rIns="0" bIns="0" rtlCol="0" anchor="t"/>
-          <a:lstStyle/>
-          <a:p>
-            <a:pPr algn="ctr" indent="0" marL="0">
-              <a:buNone/>
-            </a:pPr>
-            <a:r>
-              <a:rPr lang="en-US" sz="800" dirty="0">
-                <a:solidFill>
-                  <a:srgbClr val="8B94A3"/>
-                </a:solidFill>
-                <a:latin typeface="Noto Sans SC" pitchFamily="34" charset="0"/>
-                <a:ea typeface="Noto Sans SC" pitchFamily="34" charset="-122"/>
-                <a:cs typeface="Noto Sans SC" pitchFamily="34" charset="-120"/>
-              </a:rPr>
-              <a:t>5:00</a:t>
-            </a:r>
-            <a:endParaRPr lang="en-US" sz="800" dirty="0"/>
-          </a:p>
-        </p:txBody>
-      </p:sp>
-      <p:sp>
-        <p:nvSpPr>
           <p:cNvPr id="29" name="Text 27"/>
           <p:cNvSpPr/>
           <p:nvPr/>
         </p:nvSpPr>
         <p:spPr>
           <a:xfrm>
-            <a:off x="4582716" y="3817739"/>
-            <a:ext cx="1449735" cy="952500"/>
-          </a:xfrm>
-          <a:prstGeom prst="roundRect">
-            <a:avLst>
-              <a:gd name="adj" fmla="val 10667"/>
-            </a:avLst>
-          </a:prstGeom>
-          <a:solidFill>
-            <a:srgbClr val="F6F2E8"/>
-          </a:solidFill>
-          <a:ln w="19050">
-            <a:solidFill>
-              <a:srgbClr val="D4756B"/>
-            </a:solidFill>
-          </a:ln>
-        </p:spPr>
-        <p:txBody>
-          <a:bodyPr wrap="square" rtlCol="0" anchor="ctr"/>
-          <a:lstStyle/>
-          <a:p>
-            <a:pPr indent="0" marL="0">
-              <a:buNone/>
-            </a:pPr>
-            <a:endParaRPr lang="en-US" dirty="0"/>
-          </a:p>
-        </p:txBody>
-      </p:sp>
-      <p:sp>
-        <p:nvSpPr>
-          <p:cNvPr id="30" name="Text 28"/>
-          <p:cNvSpPr/>
-          <p:nvPr/>
-        </p:nvSpPr>
-        <p:spPr>
-          <a:xfrm>
-            <a:off x="4717139" y="3989189"/>
-            <a:ext cx="1180889" cy="152400"/>
-          </a:xfrm>
-          <a:prstGeom prst="rect">
-            <a:avLst/>
-          </a:prstGeom>
-          <a:noFill/>
-          <a:ln/>
-        </p:spPr>
-        <p:txBody>
-          <a:bodyPr wrap="square" lIns="0" tIns="0" rIns="0" bIns="0" rtlCol="0" anchor="t"/>
-          <a:lstStyle/>
-          <a:p>
-            <a:pPr algn="ctr" indent="0" marL="0">
-              <a:buNone/>
-            </a:pPr>
-            <a:r>
-              <a:rPr lang="en-US" sz="700" b="1" dirty="0">
-                <a:solidFill>
-                  <a:srgbClr val="3A7D8C"/>
-                </a:solidFill>
-                <a:latin typeface="Noto Sans SC" pitchFamily="34" charset="0"/>
-                <a:ea typeface="Noto Sans SC" pitchFamily="34" charset="-122"/>
-                <a:cs typeface="Noto Sans SC" pitchFamily="34" charset="-120"/>
-              </a:rPr>
-              <a:t>Round 2 · ⚠️ 两 Trap!</a:t>
-            </a:r>
-            <a:endParaRPr lang="en-US" sz="700" dirty="0"/>
-          </a:p>
-        </p:txBody>
-      </p:sp>
-      <p:sp>
-        <p:nvSpPr>
-          <p:cNvPr id="31" name="Text 29"/>
-          <p:cNvSpPr/>
-          <p:nvPr/>
-        </p:nvSpPr>
-        <p:spPr>
-          <a:xfrm>
-            <a:off x="4717139" y="4141589"/>
-            <a:ext cx="1180889" cy="314325"/>
-          </a:xfrm>
-          <a:prstGeom prst="rect">
-            <a:avLst/>
-          </a:prstGeom>
-          <a:noFill/>
-          <a:ln/>
-        </p:spPr>
-        <p:txBody>
-          <a:bodyPr wrap="square" lIns="0" tIns="0" rIns="0" bIns="0" rtlCol="0" anchor="t"/>
-          <a:lstStyle/>
-          <a:p>
-            <a:pPr algn="ctr" indent="0" marL="0">
-              <a:buNone/>
-            </a:pPr>
-            <a:r>
-              <a:rPr lang="en-US" sz="1800" b="1" dirty="0">
-                <a:solidFill>
-                  <a:srgbClr val="D4756B"/>
-                </a:solidFill>
-                <a:latin typeface="Noto Serif SC" pitchFamily="34" charset="0"/>
-                <a:ea typeface="Noto Serif SC" pitchFamily="34" charset="-122"/>
-                <a:cs typeface="Noto Serif SC" pitchFamily="34" charset="-120"/>
-              </a:rPr>
-              <a:t>两点</a:t>
-            </a:r>
-            <a:endParaRPr lang="en-US" sz="1800" dirty="0"/>
-          </a:p>
-        </p:txBody>
-      </p:sp>
-      <p:sp>
-        <p:nvSpPr>
-          <p:cNvPr id="32" name="Text 30"/>
-          <p:cNvSpPr/>
-          <p:nvPr/>
-        </p:nvSpPr>
-        <p:spPr>
-          <a:xfrm>
-            <a:off x="4717139" y="4455914"/>
-            <a:ext cx="1180889" cy="142875"/>
-          </a:xfrm>
-          <a:prstGeom prst="rect">
-            <a:avLst/>
-          </a:prstGeom>
-          <a:noFill/>
-          <a:ln/>
-        </p:spPr>
-        <p:txBody>
-          <a:bodyPr wrap="square" lIns="0" tIns="0" rIns="0" bIns="0" rtlCol="0" anchor="t"/>
-          <a:lstStyle/>
-          <a:p>
-            <a:pPr algn="ctr" indent="0" marL="0">
-              <a:buNone/>
-            </a:pPr>
-            <a:r>
-              <a:rPr lang="en-US" sz="800" dirty="0">
-                <a:solidFill>
-                  <a:srgbClr val="8B94A3"/>
-                </a:solidFill>
-                <a:latin typeface="Noto Sans SC" pitchFamily="34" charset="0"/>
-                <a:ea typeface="Noto Sans SC" pitchFamily="34" charset="-122"/>
-                <a:cs typeface="Noto Sans SC" pitchFamily="34" charset="-120"/>
-              </a:rPr>
-              <a:t>2:00 — NOT 二点!</a:t>
-            </a:r>
-            <a:endParaRPr lang="en-US" sz="800" dirty="0"/>
-          </a:p>
-        </p:txBody>
-      </p:sp>
-      <p:sp>
-        <p:nvSpPr>
-          <p:cNvPr id="33" name="Text 31"/>
-          <p:cNvSpPr/>
-          <p:nvPr/>
-        </p:nvSpPr>
-        <p:spPr>
-          <a:xfrm>
-            <a:off x="6159401" y="3817739"/>
-            <a:ext cx="1449735" cy="952500"/>
-          </a:xfrm>
-          <a:prstGeom prst="roundRect">
-            <a:avLst>
-              <a:gd name="adj" fmla="val 10667"/>
-            </a:avLst>
-          </a:prstGeom>
-          <a:solidFill>
-            <a:srgbClr val="F6F2E8"/>
-          </a:solidFill>
-          <a:ln/>
-        </p:spPr>
-        <p:txBody>
-          <a:bodyPr wrap="square" rtlCol="0" anchor="ctr"/>
-          <a:lstStyle/>
-          <a:p>
-            <a:pPr indent="0" marL="0">
-              <a:buNone/>
-            </a:pPr>
-            <a:endParaRPr lang="en-US" dirty="0"/>
-          </a:p>
-        </p:txBody>
-      </p:sp>
-      <p:sp>
-        <p:nvSpPr>
-          <p:cNvPr id="34" name="Text 32"/>
-          <p:cNvSpPr/>
-          <p:nvPr/>
-        </p:nvSpPr>
-        <p:spPr>
-          <a:xfrm>
-            <a:off x="6274393" y="3970139"/>
-            <a:ext cx="1219751" cy="123825"/>
-          </a:xfrm>
-          <a:prstGeom prst="rect">
-            <a:avLst/>
-          </a:prstGeom>
-          <a:noFill/>
-          <a:ln/>
-        </p:spPr>
-        <p:txBody>
-          <a:bodyPr wrap="square" lIns="0" tIns="0" rIns="0" bIns="0" rtlCol="0" anchor="t"/>
-          <a:lstStyle/>
-          <a:p>
-            <a:pPr algn="ctr" indent="0" marL="0">
-              <a:buNone/>
-            </a:pPr>
-            <a:r>
-              <a:rPr lang="en-US" sz="700" b="1" dirty="0">
-                <a:solidFill>
-                  <a:srgbClr val="3A7D8C"/>
-                </a:solidFill>
-                <a:latin typeface="Noto Sans SC" pitchFamily="34" charset="0"/>
-                <a:ea typeface="Noto Sans SC" pitchFamily="34" charset="-122"/>
-                <a:cs typeface="Noto Sans SC" pitchFamily="34" charset="-120"/>
-              </a:rPr>
-              <a:t>Round 3</a:t>
-            </a:r>
-            <a:endParaRPr lang="en-US" sz="700" dirty="0"/>
-          </a:p>
-        </p:txBody>
-      </p:sp>
-      <p:sp>
-        <p:nvSpPr>
-          <p:cNvPr id="35" name="Text 33"/>
-          <p:cNvSpPr/>
-          <p:nvPr/>
-        </p:nvSpPr>
-        <p:spPr>
-          <a:xfrm>
-            <a:off x="6274393" y="4093964"/>
-            <a:ext cx="1219751" cy="314325"/>
-          </a:xfrm>
-          <a:prstGeom prst="rect">
-            <a:avLst/>
-          </a:prstGeom>
-          <a:noFill/>
-          <a:ln/>
-        </p:spPr>
-        <p:txBody>
-          <a:bodyPr wrap="square" lIns="0" tIns="0" rIns="0" bIns="0" rtlCol="0" anchor="t"/>
-          <a:lstStyle/>
-          <a:p>
-            <a:pPr algn="ctr" indent="0" marL="0">
-              <a:buNone/>
-            </a:pPr>
-            <a:r>
-              <a:rPr lang="en-US" sz="1800" b="1" dirty="0">
-                <a:solidFill>
-                  <a:srgbClr val="1E2A38"/>
-                </a:solidFill>
-                <a:latin typeface="Noto Serif SC" pitchFamily="34" charset="0"/>
-                <a:ea typeface="Noto Serif SC" pitchFamily="34" charset="-122"/>
-                <a:cs typeface="Noto Serif SC" pitchFamily="34" charset="-120"/>
-              </a:rPr>
-              <a:t>十二点</a:t>
-            </a:r>
-            <a:endParaRPr lang="en-US" sz="1800" dirty="0"/>
-          </a:p>
-        </p:txBody>
-      </p:sp>
-      <p:sp>
-        <p:nvSpPr>
-          <p:cNvPr id="36" name="Text 34"/>
-          <p:cNvSpPr/>
-          <p:nvPr/>
-        </p:nvSpPr>
-        <p:spPr>
-          <a:xfrm>
-            <a:off x="6274393" y="4408289"/>
-            <a:ext cx="1219751" cy="142875"/>
-          </a:xfrm>
-          <a:prstGeom prst="rect">
-            <a:avLst/>
-          </a:prstGeom>
-          <a:noFill/>
-          <a:ln/>
-        </p:spPr>
-        <p:txBody>
-          <a:bodyPr wrap="square" lIns="0" tIns="0" rIns="0" bIns="0" rtlCol="0" anchor="t"/>
-          <a:lstStyle/>
-          <a:p>
-            <a:pPr algn="ctr" indent="0" marL="0">
-              <a:buNone/>
-            </a:pPr>
-            <a:r>
-              <a:rPr lang="en-US" sz="800" dirty="0">
-                <a:solidFill>
-                  <a:srgbClr val="8B94A3"/>
-                </a:solidFill>
-                <a:latin typeface="Noto Sans SC" pitchFamily="34" charset="0"/>
-                <a:ea typeface="Noto Sans SC" pitchFamily="34" charset="-122"/>
-                <a:cs typeface="Noto Sans SC" pitchFamily="34" charset="-120"/>
-              </a:rPr>
-              <a:t>12:00</a:t>
-            </a:r>
-            <a:endParaRPr lang="en-US" sz="800" dirty="0"/>
-          </a:p>
-        </p:txBody>
-      </p:sp>
-      <p:sp>
-        <p:nvSpPr>
-          <p:cNvPr id="37" name="Text 35"/>
-          <p:cNvSpPr/>
-          <p:nvPr/>
-        </p:nvSpPr>
-        <p:spPr>
-          <a:xfrm>
-            <a:off x="7736086" y="3817739"/>
-            <a:ext cx="1449735" cy="952500"/>
-          </a:xfrm>
-          <a:prstGeom prst="roundRect">
-            <a:avLst>
-              <a:gd name="adj" fmla="val 10667"/>
-            </a:avLst>
-          </a:prstGeom>
-          <a:solidFill>
-            <a:srgbClr val="F6F2E8"/>
-          </a:solidFill>
-          <a:ln/>
-        </p:spPr>
-        <p:txBody>
-          <a:bodyPr wrap="square" rtlCol="0" anchor="ctr"/>
-          <a:lstStyle/>
-          <a:p>
-            <a:pPr indent="0" marL="0">
-              <a:buNone/>
-            </a:pPr>
-            <a:endParaRPr lang="en-US" dirty="0"/>
-          </a:p>
-        </p:txBody>
-      </p:sp>
-      <p:sp>
-        <p:nvSpPr>
-          <p:cNvPr id="38" name="Text 36"/>
-          <p:cNvSpPr/>
-          <p:nvPr/>
-        </p:nvSpPr>
-        <p:spPr>
-          <a:xfrm>
-            <a:off x="7851078" y="3970139"/>
-            <a:ext cx="1219751" cy="123825"/>
-          </a:xfrm>
-          <a:prstGeom prst="rect">
-            <a:avLst/>
-          </a:prstGeom>
-          <a:noFill/>
-          <a:ln/>
-        </p:spPr>
-        <p:txBody>
-          <a:bodyPr wrap="square" lIns="0" tIns="0" rIns="0" bIns="0" rtlCol="0" anchor="t"/>
-          <a:lstStyle/>
-          <a:p>
-            <a:pPr algn="ctr" indent="0" marL="0">
-              <a:buNone/>
-            </a:pPr>
-            <a:r>
-              <a:rPr lang="en-US" sz="700" b="1" dirty="0">
-                <a:solidFill>
-                  <a:srgbClr val="3A7D8C"/>
-                </a:solidFill>
-                <a:latin typeface="Noto Sans SC" pitchFamily="34" charset="0"/>
-                <a:ea typeface="Noto Sans SC" pitchFamily="34" charset="-122"/>
-                <a:cs typeface="Noto Sans SC" pitchFamily="34" charset="-120"/>
-              </a:rPr>
-              <a:t>Round 4</a:t>
-            </a:r>
-            <a:endParaRPr lang="en-US" sz="700" dirty="0"/>
-          </a:p>
-        </p:txBody>
-      </p:sp>
-      <p:sp>
-        <p:nvSpPr>
-          <p:cNvPr id="39" name="Text 37"/>
-          <p:cNvSpPr/>
-          <p:nvPr/>
-        </p:nvSpPr>
-        <p:spPr>
-          <a:xfrm>
-            <a:off x="7851078" y="4093964"/>
-            <a:ext cx="1219751" cy="314325"/>
-          </a:xfrm>
-          <a:prstGeom prst="rect">
-            <a:avLst/>
-          </a:prstGeom>
-          <a:noFill/>
-          <a:ln/>
-        </p:spPr>
-        <p:txBody>
-          <a:bodyPr wrap="square" lIns="0" tIns="0" rIns="0" bIns="0" rtlCol="0" anchor="t"/>
-          <a:lstStyle/>
-          <a:p>
-            <a:pPr algn="ctr" indent="0" marL="0">
-              <a:buNone/>
-            </a:pPr>
-            <a:r>
-              <a:rPr lang="en-US" sz="1800" b="1" dirty="0">
-                <a:solidFill>
-                  <a:srgbClr val="1E2A38"/>
-                </a:solidFill>
-                <a:latin typeface="Noto Serif SC" pitchFamily="34" charset="0"/>
-                <a:ea typeface="Noto Serif SC" pitchFamily="34" charset="-122"/>
-                <a:cs typeface="Noto Serif SC" pitchFamily="34" charset="-120"/>
-              </a:rPr>
-              <a:t>八点</a:t>
-            </a:r>
-            <a:endParaRPr lang="en-US" sz="1800" dirty="0"/>
-          </a:p>
-        </p:txBody>
-      </p:sp>
-      <p:sp>
-        <p:nvSpPr>
-          <p:cNvPr id="40" name="Text 38"/>
-          <p:cNvSpPr/>
-          <p:nvPr/>
-        </p:nvSpPr>
-        <p:spPr>
-          <a:xfrm>
-            <a:off x="7851078" y="4408289"/>
-            <a:ext cx="1219751" cy="142875"/>
-          </a:xfrm>
-          <a:prstGeom prst="rect">
-            <a:avLst/>
-          </a:prstGeom>
-          <a:noFill/>
-          <a:ln/>
-        </p:spPr>
-        <p:txBody>
-          <a:bodyPr wrap="square" lIns="0" tIns="0" rIns="0" bIns="0" rtlCol="0" anchor="t"/>
-          <a:lstStyle/>
-          <a:p>
-            <a:pPr algn="ctr" indent="0" marL="0">
-              <a:buNone/>
-            </a:pPr>
-            <a:r>
-              <a:rPr lang="en-US" sz="800" dirty="0">
-                <a:solidFill>
-                  <a:srgbClr val="8B94A3"/>
-                </a:solidFill>
-                <a:latin typeface="Noto Sans SC" pitchFamily="34" charset="0"/>
-                <a:ea typeface="Noto Sans SC" pitchFamily="34" charset="-122"/>
-                <a:cs typeface="Noto Sans SC" pitchFamily="34" charset="-120"/>
-              </a:rPr>
-              <a:t>8:00</a:t>
-            </a:r>
-            <a:endParaRPr lang="en-US" sz="800" dirty="0"/>
-          </a:p>
-        </p:txBody>
-      </p:sp>
-      <p:sp>
-        <p:nvSpPr>
-          <p:cNvPr id="41" name="Text 39"/>
-          <p:cNvSpPr/>
-          <p:nvPr/>
-        </p:nvSpPr>
-        <p:spPr>
-          <a:xfrm>
-            <a:off x="3461052" y="4922639"/>
-            <a:ext cx="1937635" cy="190500"/>
-          </a:xfrm>
-          <a:prstGeom prst="rect">
-            <a:avLst/>
-          </a:prstGeom>
-          <a:noFill/>
-          <a:ln/>
-        </p:spPr>
-        <p:txBody>
-          <a:bodyPr wrap="square" lIns="0" tIns="0" rIns="0" bIns="0" rtlCol="0" anchor="t"/>
-          <a:lstStyle/>
-          <a:p>
-            <a:pPr algn="ctr" indent="0" marL="0">
-              <a:buNone/>
-            </a:pPr>
-            <a:r>
-              <a:rPr lang="en-US" sz="900" dirty="0">
-                <a:solidFill>
-                  <a:srgbClr val="8B94A3"/>
-                </a:solidFill>
-                <a:latin typeface="Noto Sans SC" pitchFamily="34" charset="0"/>
-                <a:ea typeface="Noto Sans SC" pitchFamily="34" charset="-122"/>
-                <a:cs typeface="Noto Sans SC" pitchFamily="34" charset="-120"/>
-              </a:rPr>
-              <a:t>🏆 First correct team wins a point</a:t>
-            </a:r>
-            <a:endParaRPr lang="en-US" sz="900" dirty="0"/>
-          </a:p>
-        </p:txBody>
-      </p:sp>
-      <p:sp>
-        <p:nvSpPr>
-          <p:cNvPr id="42" name="Text 40"/>
-          <p:cNvSpPr/>
-          <p:nvPr/>
-        </p:nvSpPr>
-        <p:spPr>
-          <a:xfrm>
-            <a:off x="5551551" y="4922639"/>
-            <a:ext cx="3191542" cy="190500"/>
-          </a:xfrm>
-          <a:prstGeom prst="rect">
-            <a:avLst/>
-          </a:prstGeom>
-          <a:noFill/>
-          <a:ln/>
-        </p:spPr>
-        <p:txBody>
-          <a:bodyPr wrap="square" lIns="0" tIns="0" rIns="0" bIns="0" rtlCol="0" anchor="t"/>
-          <a:lstStyle/>
-          <a:p>
-            <a:pPr algn="ctr" indent="0" marL="0">
-              <a:buNone/>
-            </a:pPr>
-            <a:r>
-              <a:rPr lang="en-US" sz="900" dirty="0">
-                <a:solidFill>
-                  <a:srgbClr val="8B94A3"/>
-                </a:solidFill>
-                <a:latin typeface="Noto Sans SC" pitchFamily="34" charset="0"/>
-                <a:ea typeface="Noto Sans SC" pitchFamily="34" charset="-122"/>
-                <a:cs typeface="Noto Sans SC" pitchFamily="34" charset="-120"/>
-              </a:rPr>
-              <a:t>📢 After each round: everyone says the answer together</a:t>
-            </a:r>
-            <a:endParaRPr lang="en-US" sz="900" dirty="0"/>
-          </a:p>
-        </p:txBody>
-      </p:sp>
-      <p:sp>
-        <p:nvSpPr>
-          <p:cNvPr id="43" name="Shape 41"/>
+            <a:off x="8222754" y="5395466"/>
+            <a:ext cx="660047" cy="180975"/>
+          </a:xfrm>
+          <a:prstGeom prst="rect">
+            <a:avLst/>
+          </a:prstGeom>
+          <a:noFill/>
+          <a:ln/>
+        </p:spPr>
+        <p:txBody>
+          <a:bodyPr wrap="square" lIns="0" tIns="0" rIns="0" bIns="0" rtlCol="0" anchor="t"/>
+          <a:lstStyle/>
+          <a:p>
+            <a:pPr algn="l" indent="0" marL="0">
+              <a:buNone/>
+            </a:pPr>
+            <a:r>
+              <a:rPr lang="en-US" sz="1000" dirty="0">
+                <a:solidFill>
+                  <a:srgbClr val="5B6677"/>
+                </a:solidFill>
+                <a:latin typeface="Noto Sans SC" pitchFamily="34" charset="0"/>
+                <a:ea typeface="Noto Sans SC" pitchFamily="34" charset="-122"/>
+                <a:cs typeface="Noto Sans SC" pitchFamily="34" charset="-120"/>
+              </a:rPr>
+              <a:t>Hold it up!</a:t>
+            </a:r>
+            <a:endParaRPr lang="en-US" sz="1000" dirty="0"/>
+          </a:p>
+        </p:txBody>
+      </p:sp>
+      <p:sp>
+        <p:nvSpPr>
+          <p:cNvPr id="30" name="Shape 28"/>
           <p:cNvSpPr/>
           <p:nvPr/>
         </p:nvSpPr>
@@ -3635,7 +3215,7 @@
       </p:sp>
       <p:sp>
         <p:nvSpPr>
-          <p:cNvPr id="44" name="Text 42"/>
+          <p:cNvPr id="31" name="Text 29"/>
           <p:cNvSpPr/>
           <p:nvPr/>
         </p:nvSpPr>
@@ -3805,7 +3385,7 @@
         <p:spPr>
           <a:xfrm>
             <a:off x="1433959" y="166688"/>
-            <a:ext cx="323648" cy="123825"/>
+            <a:ext cx="644107" cy="123825"/>
           </a:xfrm>
           <a:prstGeom prst="rect">
             <a:avLst/>
@@ -3829,7 +3409,7 @@
                 <a:ea typeface="Noto Sans SC" pitchFamily="34" charset="-122"/>
                 <a:cs typeface="Noto Sans SC" pitchFamily="34" charset="-120"/>
               </a:rPr>
-              <a:t>Plenary</a:t>
+              <a:t>Game · 传声筒</a:t>
             </a:r>
             <a:endParaRPr lang="en-US" sz="700" dirty="0"/>
           </a:p>
@@ -3873,20 +3453,20 @@
         </p:nvSpPr>
         <p:spPr>
           <a:xfrm>
-            <a:off x="711101" y="1630561"/>
-            <a:ext cx="10985194" cy="142875"/>
-          </a:xfrm>
-          <a:prstGeom prst="rect">
-            <a:avLst/>
-          </a:prstGeom>
-          <a:noFill/>
-          <a:ln/>
-        </p:spPr>
-        <p:txBody>
-          <a:bodyPr wrap="square" lIns="0" tIns="0" rIns="0" bIns="0" rtlCol="0" anchor="t"/>
-          <a:lstStyle/>
-          <a:p>
-            <a:pPr algn="l" indent="0" marL="0">
+            <a:off x="5648329" y="1897261"/>
+            <a:ext cx="895192" cy="142875"/>
+          </a:xfrm>
+          <a:prstGeom prst="rect">
+            <a:avLst/>
+          </a:prstGeom>
+          <a:noFill/>
+          <a:ln/>
+        </p:spPr>
+        <p:txBody>
+          <a:bodyPr wrap="square" lIns="0" tIns="0" rIns="0" bIns="0" rtlCol="0" anchor="t"/>
+          <a:lstStyle/>
+          <a:p>
+            <a:pPr algn="ctr" indent="0" marL="0">
               <a:buNone/>
             </a:pPr>
             <a:r>
@@ -3898,7 +3478,7 @@
                 <a:ea typeface="Noto Sans SC" pitchFamily="34" charset="-122"/>
                 <a:cs typeface="Noto Sans SC" pitchFamily="34" charset="-120"/>
               </a:rPr>
-              <a:t>43–50 min · Plenary</a:t>
+              <a:t>Game · 5 min</a:t>
             </a:r>
             <a:endParaRPr lang="en-US" sz="800" dirty="0"/>
           </a:p>
@@ -3912,20 +3492,20 @@
         </p:nvSpPr>
         <p:spPr>
           <a:xfrm>
-            <a:off x="711101" y="1824186"/>
-            <a:ext cx="10985194" cy="390525"/>
-          </a:xfrm>
-          <a:prstGeom prst="rect">
-            <a:avLst/>
-          </a:prstGeom>
-          <a:noFill/>
-          <a:ln/>
-        </p:spPr>
-        <p:txBody>
-          <a:bodyPr wrap="square" lIns="0" tIns="0" rIns="0" bIns="0" rtlCol="0" anchor="t"/>
-          <a:lstStyle/>
-          <a:p>
-            <a:pPr algn="l" indent="0" marL="0">
+            <a:off x="4851051" y="2090886"/>
+            <a:ext cx="2489749" cy="390525"/>
+          </a:xfrm>
+          <a:prstGeom prst="rect">
+            <a:avLst/>
+          </a:prstGeom>
+          <a:noFill/>
+          <a:ln/>
+        </p:spPr>
+        <p:txBody>
+          <a:bodyPr wrap="square" lIns="0" tIns="0" rIns="0" bIns="0" rtlCol="0" anchor="t"/>
+          <a:lstStyle/>
+          <a:p>
+            <a:pPr algn="ctr" indent="0" marL="0">
               <a:buNone/>
             </a:pPr>
             <a:r>
@@ -3937,7 +3517,7 @@
                 <a:ea typeface="Noto Serif SC" pitchFamily="34" charset="-122"/>
                 <a:cs typeface="Noto Serif SC" pitchFamily="34" charset="-120"/>
               </a:rPr>
-              <a:t>Review &amp; Reflect</a:t>
+              <a:t>Telephone · 传声筒</a:t>
             </a:r>
             <a:endParaRPr lang="en-US" sz="2200" dirty="0"/>
           </a:p>
@@ -3951,24 +3531,24 @@
         </p:nvSpPr>
         <p:spPr>
           <a:xfrm>
-            <a:off x="711101" y="2392412"/>
-            <a:ext cx="10985194" cy="123825"/>
-          </a:xfrm>
-          <a:prstGeom prst="rect">
-            <a:avLst/>
-          </a:prstGeom>
-          <a:noFill/>
-          <a:ln/>
-        </p:spPr>
-        <p:txBody>
-          <a:bodyPr wrap="square" lIns="0" tIns="0" rIns="0" bIns="0" rtlCol="0" anchor="t"/>
-          <a:lstStyle/>
-          <a:p>
-            <a:pPr algn="l" indent="0" marL="0">
-              <a:buNone/>
-            </a:pPr>
-            <a:r>
-              <a:rPr lang="en-US" sz="700" b="1" dirty="0">
+            <a:off x="3978933" y="2506712"/>
+            <a:ext cx="4233985" cy="180975"/>
+          </a:xfrm>
+          <a:prstGeom prst="rect">
+            <a:avLst/>
+          </a:prstGeom>
+          <a:noFill/>
+          <a:ln/>
+        </p:spPr>
+        <p:txBody>
+          <a:bodyPr wrap="square" lIns="0" tIns="0" rIns="0" bIns="0" rtlCol="0" anchor="t"/>
+          <a:lstStyle/>
+          <a:p>
+            <a:pPr algn="ctr" indent="0" marL="0">
+              <a:buNone/>
+            </a:pPr>
+            <a:r>
+              <a:rPr lang="en-US" sz="1000" dirty="0">
                 <a:solidFill>
                   <a:srgbClr val="8B94A3"/>
                 </a:solidFill>
@@ -3976,9 +3556,9 @@
                 <a:ea typeface="Noto Sans SC" pitchFamily="34" charset="-122"/>
                 <a:cs typeface="Noto Sans SC" pitchFamily="34" charset="-120"/>
               </a:rPr>
-              <a:t>REVISIT SUCCESS CRITERIA</a:t>
-            </a:r>
-            <a:endParaRPr lang="en-US" sz="700" dirty="0"/>
+              <a:t>Whisper the time down the row. Last person writes it on the board!</a:t>
+            </a:r>
+            <a:endParaRPr lang="en-US" sz="1000" dirty="0"/>
           </a:p>
         </p:txBody>
       </p:sp>
@@ -3990,225 +3570,12 @@
         </p:nvSpPr>
         <p:spPr>
           <a:xfrm>
-            <a:off x="711101" y="2635300"/>
-            <a:ext cx="63401" cy="63401"/>
+            <a:off x="3989189" y="2865388"/>
+            <a:ext cx="771525" cy="749201"/>
           </a:xfrm>
           <a:prstGeom prst="roundRect">
             <a:avLst>
-              <a:gd name="adj" fmla="val 1442249"/>
-            </a:avLst>
-          </a:prstGeom>
-          <a:solidFill>
-            <a:srgbClr val="C8943E"/>
-          </a:solidFill>
-          <a:ln/>
-        </p:spPr>
-        <p:txBody>
-          <a:bodyPr wrap="square" rtlCol="0" anchor="ctr"/>
-          <a:lstStyle/>
-          <a:p>
-            <a:pPr indent="0" marL="0">
-              <a:buNone/>
-            </a:pPr>
-            <a:endParaRPr lang="en-US" dirty="0"/>
-          </a:p>
-        </p:txBody>
-      </p:sp>
-      <p:sp>
-        <p:nvSpPr>
-          <p:cNvPr id="11" name="Text 9"/>
-          <p:cNvSpPr/>
-          <p:nvPr/>
-        </p:nvSpPr>
-        <p:spPr>
-          <a:xfrm>
-            <a:off x="850702" y="2566988"/>
-            <a:ext cx="3423955" cy="200025"/>
-          </a:xfrm>
-          <a:prstGeom prst="rect">
-            <a:avLst/>
-          </a:prstGeom>
-          <a:noFill/>
-          <a:ln/>
-        </p:spPr>
-        <p:txBody>
-          <a:bodyPr wrap="square" lIns="0" tIns="0" rIns="0" bIns="0" rtlCol="0" anchor="t"/>
-          <a:lstStyle/>
-          <a:p>
-            <a:pPr algn="l" indent="0" marL="0">
-              <a:buNone/>
-            </a:pPr>
-            <a:r>
-              <a:rPr lang="en-US" sz="1100" dirty="0">
-                <a:solidFill>
-                  <a:srgbClr val="5B6677"/>
-                </a:solidFill>
-                <a:latin typeface="Noto Sans SC" pitchFamily="34" charset="0"/>
-                <a:ea typeface="Noto Sans SC" pitchFamily="34" charset="-122"/>
-                <a:cs typeface="Noto Sans SC" pitchFamily="34" charset="-120"/>
-              </a:rPr>
-              <a:t>I can recognise and say numbers 1–12 in Chinese</a:t>
-            </a:r>
-            <a:endParaRPr lang="en-US" sz="1100" dirty="0"/>
-          </a:p>
-        </p:txBody>
-      </p:sp>
-      <p:sp>
-        <p:nvSpPr>
-          <p:cNvPr id="12" name="Text 10"/>
-          <p:cNvSpPr/>
-          <p:nvPr/>
-        </p:nvSpPr>
-        <p:spPr>
-          <a:xfrm>
-            <a:off x="711101" y="2835325"/>
-            <a:ext cx="63401" cy="63401"/>
-          </a:xfrm>
-          <a:prstGeom prst="roundRect">
-            <a:avLst>
-              <a:gd name="adj" fmla="val 1442249"/>
-            </a:avLst>
-          </a:prstGeom>
-          <a:solidFill>
-            <a:srgbClr val="C8943E"/>
-          </a:solidFill>
-          <a:ln/>
-        </p:spPr>
-        <p:txBody>
-          <a:bodyPr wrap="square" rtlCol="0" anchor="ctr"/>
-          <a:lstStyle/>
-          <a:p>
-            <a:pPr indent="0" marL="0">
-              <a:buNone/>
-            </a:pPr>
-            <a:endParaRPr lang="en-US" dirty="0"/>
-          </a:p>
-        </p:txBody>
-      </p:sp>
-      <p:sp>
-        <p:nvSpPr>
-          <p:cNvPr id="13" name="Text 11"/>
-          <p:cNvSpPr/>
-          <p:nvPr/>
-        </p:nvSpPr>
-        <p:spPr>
-          <a:xfrm>
-            <a:off x="850702" y="2767013"/>
-            <a:ext cx="2192819" cy="200025"/>
-          </a:xfrm>
-          <a:prstGeom prst="rect">
-            <a:avLst/>
-          </a:prstGeom>
-          <a:noFill/>
-          <a:ln/>
-        </p:spPr>
-        <p:txBody>
-          <a:bodyPr wrap="square" lIns="0" tIns="0" rIns="0" bIns="0" rtlCol="0" anchor="t"/>
-          <a:lstStyle/>
-          <a:p>
-            <a:pPr algn="l" indent="0" marL="0">
-              <a:buNone/>
-            </a:pPr>
-            <a:r>
-              <a:rPr lang="en-US" sz="1100" dirty="0">
-                <a:solidFill>
-                  <a:srgbClr val="5B6677"/>
-                </a:solidFill>
-                <a:latin typeface="Noto Sans SC" pitchFamily="34" charset="0"/>
-                <a:ea typeface="Noto Sans SC" pitchFamily="34" charset="-122"/>
-                <a:cs typeface="Noto Sans SC" pitchFamily="34" charset="-120"/>
-              </a:rPr>
-              <a:t>I can say o'clock times using 点</a:t>
-            </a:r>
-            <a:endParaRPr lang="en-US" sz="1100" dirty="0"/>
-          </a:p>
-        </p:txBody>
-      </p:sp>
-      <p:sp>
-        <p:nvSpPr>
-          <p:cNvPr id="14" name="Text 12"/>
-          <p:cNvSpPr/>
-          <p:nvPr/>
-        </p:nvSpPr>
-        <p:spPr>
-          <a:xfrm>
-            <a:off x="711101" y="3035350"/>
-            <a:ext cx="63401" cy="63401"/>
-          </a:xfrm>
-          <a:prstGeom prst="roundRect">
-            <a:avLst>
-              <a:gd name="adj" fmla="val 1442249"/>
-            </a:avLst>
-          </a:prstGeom>
-          <a:solidFill>
-            <a:srgbClr val="C8943E"/>
-          </a:solidFill>
-          <a:ln/>
-        </p:spPr>
-        <p:txBody>
-          <a:bodyPr wrap="square" rtlCol="0" anchor="ctr"/>
-          <a:lstStyle/>
-          <a:p>
-            <a:pPr indent="0" marL="0">
-              <a:buNone/>
-            </a:pPr>
-            <a:endParaRPr lang="en-US" dirty="0"/>
-          </a:p>
-        </p:txBody>
-      </p:sp>
-      <p:sp>
-        <p:nvSpPr>
-          <p:cNvPr id="15" name="Text 13"/>
-          <p:cNvSpPr/>
-          <p:nvPr/>
-        </p:nvSpPr>
-        <p:spPr>
-          <a:xfrm>
-            <a:off x="850702" y="2967038"/>
-            <a:ext cx="2933474" cy="200025"/>
-          </a:xfrm>
-          <a:prstGeom prst="rect">
-            <a:avLst/>
-          </a:prstGeom>
-          <a:noFill/>
-          <a:ln/>
-        </p:spPr>
-        <p:txBody>
-          <a:bodyPr wrap="square" lIns="0" tIns="0" rIns="0" bIns="0" rtlCol="0" anchor="t"/>
-          <a:lstStyle/>
-          <a:p>
-            <a:pPr algn="l" indent="0" marL="0">
-              <a:buNone/>
-            </a:pPr>
-            <a:r>
-              <a:rPr lang="en-US" sz="1100" dirty="0">
-                <a:solidFill>
-                  <a:srgbClr val="5B6677"/>
-                </a:solidFill>
-                <a:latin typeface="Noto Sans SC" pitchFamily="34" charset="0"/>
-                <a:ea typeface="Noto Sans SC" pitchFamily="34" charset="-122"/>
-                <a:cs typeface="Noto Sans SC" pitchFamily="34" charset="-120"/>
-              </a:rPr>
-              <a:t>I can tell the difference between 两 and 二</a:t>
-            </a:r>
-            <a:endParaRPr lang="en-US" sz="1100" dirty="0"/>
-          </a:p>
-        </p:txBody>
-      </p:sp>
-      <p:sp>
-        <p:nvSpPr>
-          <p:cNvPr id="16" name="Text 14"/>
-          <p:cNvSpPr/>
-          <p:nvPr/>
-        </p:nvSpPr>
-        <p:spPr>
-          <a:xfrm>
-            <a:off x="711101" y="3370213"/>
-            <a:ext cx="10769798" cy="771525"/>
-          </a:xfrm>
-          <a:prstGeom prst="roundRect">
-            <a:avLst>
-              <a:gd name="adj" fmla="val 13169"/>
+              <a:gd name="adj" fmla="val 13561"/>
             </a:avLst>
           </a:prstGeom>
           <a:solidFill>
@@ -4229,106 +3596,718 @@
       </p:sp>
       <p:sp>
         <p:nvSpPr>
-          <p:cNvPr id="17" name="Text 15"/>
-          <p:cNvSpPr/>
-          <p:nvPr/>
-        </p:nvSpPr>
-        <p:spPr>
-          <a:xfrm>
-            <a:off x="914251" y="3522613"/>
-            <a:ext cx="10570768" cy="190500"/>
-          </a:xfrm>
-          <a:prstGeom prst="rect">
-            <a:avLst/>
-          </a:prstGeom>
-          <a:noFill/>
-          <a:ln/>
-        </p:spPr>
-        <p:txBody>
-          <a:bodyPr wrap="square" lIns="0" tIns="0" rIns="0" bIns="0" rtlCol="0" anchor="t"/>
-          <a:lstStyle/>
-          <a:p>
-            <a:pPr algn="l" indent="0" marL="0">
-              <a:buNone/>
-            </a:pPr>
-            <a:r>
-              <a:rPr lang="en-US" sz="900" b="1" dirty="0">
-                <a:solidFill>
-                  <a:srgbClr val="3A7D8C"/>
-                </a:solidFill>
-                <a:latin typeface="Noto Sans SC" pitchFamily="34" charset="0"/>
-                <a:ea typeface="Noto Sans SC" pitchFamily="34" charset="-122"/>
-                <a:cs typeface="Noto Sans SC" pitchFamily="34" charset="-120"/>
-              </a:rPr>
-              <a:t>📝 Self-Assessment</a:t>
-            </a:r>
-            <a:endParaRPr lang="en-US" sz="900" dirty="0"/>
-          </a:p>
-        </p:txBody>
-      </p:sp>
-      <p:sp>
-        <p:nvSpPr>
-          <p:cNvPr id="18" name="Text 16"/>
-          <p:cNvSpPr/>
-          <p:nvPr/>
-        </p:nvSpPr>
-        <p:spPr>
-          <a:xfrm>
-            <a:off x="914251" y="3789313"/>
-            <a:ext cx="10570768" cy="200025"/>
-          </a:xfrm>
-          <a:prstGeom prst="rect">
-            <a:avLst/>
-          </a:prstGeom>
-          <a:noFill/>
-          <a:ln/>
-        </p:spPr>
-        <p:txBody>
-          <a:bodyPr wrap="square" lIns="0" tIns="0" rIns="0" bIns="0" rtlCol="0" anchor="t"/>
-          <a:lstStyle/>
-          <a:p>
-            <a:pPr algn="l" indent="0" marL="0">
-              <a:buNone/>
-            </a:pPr>
-            <a:r>
-              <a:rPr lang="en-US" sz="1100" dirty="0">
-                <a:solidFill>
-                  <a:srgbClr val="5B6677"/>
-                </a:solidFill>
-                <a:latin typeface="Noto Sans SC" pitchFamily="34" charset="0"/>
-                <a:ea typeface="Noto Sans SC" pitchFamily="34" charset="-122"/>
-                <a:cs typeface="Noto Sans SC" pitchFamily="34" charset="-120"/>
-              </a:rPr>
-              <a:t>On your paper, write the one time you feel most confident saying, and one time you still find tricky.</a:t>
-            </a:r>
-            <a:endParaRPr lang="en-US" sz="1100" dirty="0"/>
-          </a:p>
-        </p:txBody>
-      </p:sp>
-      <p:sp>
-        <p:nvSpPr>
-          <p:cNvPr id="19" name="Text 17"/>
-          <p:cNvSpPr/>
-          <p:nvPr/>
-        </p:nvSpPr>
-        <p:spPr>
-          <a:xfrm>
-            <a:off x="711101" y="4319439"/>
-            <a:ext cx="10769798" cy="742950"/>
+          <p:cNvPr id="11" name="Text 9"/>
+          <p:cNvSpPr/>
+          <p:nvPr/>
+        </p:nvSpPr>
+        <p:spPr>
+          <a:xfrm>
+            <a:off x="4162729" y="2992338"/>
+            <a:ext cx="424446" cy="352425"/>
+          </a:xfrm>
+          <a:prstGeom prst="rect">
+            <a:avLst/>
+          </a:prstGeom>
+          <a:noFill/>
+          <a:ln/>
+        </p:spPr>
+        <p:txBody>
+          <a:bodyPr wrap="square" lIns="0" tIns="0" rIns="0" bIns="0" rtlCol="0" anchor="t"/>
+          <a:lstStyle/>
+          <a:p>
+            <a:pPr algn="ctr" indent="0" marL="0">
+              <a:buNone/>
+            </a:pPr>
+            <a:r>
+              <a:rPr lang="en-US" sz="2000" dirty="0">
+                <a:solidFill>
+                  <a:srgbClr val="1E2A38"/>
+                </a:solidFill>
+                <a:latin typeface="Noto Sans SC" pitchFamily="34" charset="0"/>
+                <a:ea typeface="Noto Sans SC" pitchFamily="34" charset="-122"/>
+                <a:cs typeface="Noto Sans SC" pitchFamily="34" charset="-120"/>
+              </a:rPr>
+              <a:t>👂</a:t>
+            </a:r>
+            <a:endParaRPr lang="en-US" sz="2000" dirty="0"/>
+          </a:p>
+        </p:txBody>
+      </p:sp>
+      <p:sp>
+        <p:nvSpPr>
+          <p:cNvPr id="12" name="Text 10"/>
+          <p:cNvSpPr/>
+          <p:nvPr/>
+        </p:nvSpPr>
+        <p:spPr>
+          <a:xfrm>
+            <a:off x="4162729" y="3344763"/>
+            <a:ext cx="424446" cy="142875"/>
+          </a:xfrm>
+          <a:prstGeom prst="rect">
+            <a:avLst/>
+          </a:prstGeom>
+          <a:noFill/>
+          <a:ln/>
+        </p:spPr>
+        <p:txBody>
+          <a:bodyPr wrap="square" lIns="0" tIns="0" rIns="0" bIns="0" rtlCol="0" anchor="t"/>
+          <a:lstStyle/>
+          <a:p>
+            <a:pPr algn="ctr" indent="0" marL="0">
+              <a:buNone/>
+            </a:pPr>
+            <a:r>
+              <a:rPr lang="en-US" sz="800" b="1" dirty="0">
+                <a:solidFill>
+                  <a:srgbClr val="1E2A38"/>
+                </a:solidFill>
+                <a:latin typeface="Noto Sans SC" pitchFamily="34" charset="0"/>
+                <a:ea typeface="Noto Sans SC" pitchFamily="34" charset="-122"/>
+                <a:cs typeface="Noto Sans SC" pitchFamily="34" charset="-120"/>
+              </a:rPr>
+              <a:t>Whisper</a:t>
+            </a:r>
+            <a:endParaRPr lang="en-US" sz="800" dirty="0"/>
+          </a:p>
+        </p:txBody>
+      </p:sp>
+      <p:sp>
+        <p:nvSpPr>
+          <p:cNvPr id="13" name="Text 11"/>
+          <p:cNvSpPr/>
+          <p:nvPr/>
+        </p:nvSpPr>
+        <p:spPr>
+          <a:xfrm>
+            <a:off x="4885886" y="3116163"/>
+            <a:ext cx="181407" cy="247650"/>
+          </a:xfrm>
+          <a:prstGeom prst="rect">
+            <a:avLst/>
+          </a:prstGeom>
+          <a:noFill/>
+          <a:ln/>
+        </p:spPr>
+        <p:txBody>
+          <a:bodyPr wrap="square" lIns="0" tIns="0" rIns="0" bIns="0" rtlCol="0" anchor="t"/>
+          <a:lstStyle/>
+          <a:p>
+            <a:pPr algn="ctr" indent="0" marL="0">
+              <a:spcBef>
+                <a:spcPts val="1400"/>
+              </a:spcBef>
+              <a:spcAft>
+                <a:spcPts val="1400"/>
+              </a:spcAft>
+              <a:buNone/>
+            </a:pPr>
+            <a:r>
+              <a:rPr lang="en-US" sz="1400" dirty="0">
+                <a:solidFill>
+                  <a:srgbClr val="C8943E"/>
+                </a:solidFill>
+                <a:latin typeface="Noto Sans SC" pitchFamily="34" charset="0"/>
+                <a:ea typeface="Noto Sans SC" pitchFamily="34" charset="-122"/>
+                <a:cs typeface="Noto Sans SC" pitchFamily="34" charset="-120"/>
+              </a:rPr>
+              <a:t>→</a:t>
+            </a:r>
+            <a:endParaRPr lang="en-US" sz="1400" dirty="0"/>
+          </a:p>
+        </p:txBody>
+      </p:sp>
+      <p:sp>
+        <p:nvSpPr>
+          <p:cNvPr id="14" name="Text 12"/>
+          <p:cNvSpPr/>
+          <p:nvPr/>
+        </p:nvSpPr>
+        <p:spPr>
+          <a:xfrm>
+            <a:off x="5192464" y="2865388"/>
+            <a:ext cx="869454" cy="749201"/>
           </a:xfrm>
           <a:prstGeom prst="roundRect">
             <a:avLst>
-              <a:gd name="adj" fmla="val 13675"/>
+              <a:gd name="adj" fmla="val 13561"/>
             </a:avLst>
           </a:prstGeom>
           <a:solidFill>
-            <a:srgbClr val="C8943E">
-              <a:alpha val="12000"/>
-            </a:srgbClr>
+            <a:srgbClr val="F6F2E8"/>
+          </a:solidFill>
+          <a:ln/>
+        </p:spPr>
+        <p:txBody>
+          <a:bodyPr wrap="square" rtlCol="0" anchor="ctr"/>
+          <a:lstStyle/>
+          <a:p>
+            <a:pPr indent="0" marL="0">
+              <a:buNone/>
+            </a:pPr>
+            <a:endParaRPr lang="en-US" dirty="0"/>
+          </a:p>
+        </p:txBody>
+      </p:sp>
+      <p:sp>
+        <p:nvSpPr>
+          <p:cNvPr id="15" name="Text 13"/>
+          <p:cNvSpPr/>
+          <p:nvPr/>
+        </p:nvSpPr>
+        <p:spPr>
+          <a:xfrm>
+            <a:off x="5365025" y="2992338"/>
+            <a:ext cx="524333" cy="352425"/>
+          </a:xfrm>
+          <a:prstGeom prst="rect">
+            <a:avLst/>
+          </a:prstGeom>
+          <a:noFill/>
+          <a:ln/>
+        </p:spPr>
+        <p:txBody>
+          <a:bodyPr wrap="square" lIns="0" tIns="0" rIns="0" bIns="0" rtlCol="0" anchor="t"/>
+          <a:lstStyle/>
+          <a:p>
+            <a:pPr algn="ctr" indent="0" marL="0">
+              <a:buNone/>
+            </a:pPr>
+            <a:r>
+              <a:rPr lang="en-US" sz="2000" dirty="0">
+                <a:solidFill>
+                  <a:srgbClr val="1E2A38"/>
+                </a:solidFill>
+                <a:latin typeface="Noto Sans SC" pitchFamily="34" charset="0"/>
+                <a:ea typeface="Noto Sans SC" pitchFamily="34" charset="-122"/>
+                <a:cs typeface="Noto Sans SC" pitchFamily="34" charset="-120"/>
+              </a:rPr>
+              <a:t>🗣️</a:t>
+            </a:r>
+            <a:endParaRPr lang="en-US" sz="2000" dirty="0"/>
+          </a:p>
+        </p:txBody>
+      </p:sp>
+      <p:sp>
+        <p:nvSpPr>
+          <p:cNvPr id="16" name="Text 14"/>
+          <p:cNvSpPr/>
+          <p:nvPr/>
+        </p:nvSpPr>
+        <p:spPr>
+          <a:xfrm>
+            <a:off x="5365025" y="3344763"/>
+            <a:ext cx="524333" cy="142875"/>
+          </a:xfrm>
+          <a:prstGeom prst="rect">
+            <a:avLst/>
+          </a:prstGeom>
+          <a:noFill/>
+          <a:ln/>
+        </p:spPr>
+        <p:txBody>
+          <a:bodyPr wrap="square" lIns="0" tIns="0" rIns="0" bIns="0" rtlCol="0" anchor="t"/>
+          <a:lstStyle/>
+          <a:p>
+            <a:pPr algn="ctr" indent="0" marL="0">
+              <a:buNone/>
+            </a:pPr>
+            <a:r>
+              <a:rPr lang="en-US" sz="800" b="1" dirty="0">
+                <a:solidFill>
+                  <a:srgbClr val="1E2A38"/>
+                </a:solidFill>
+                <a:latin typeface="Noto Sans SC" pitchFamily="34" charset="0"/>
+                <a:ea typeface="Noto Sans SC" pitchFamily="34" charset="-122"/>
+                <a:cs typeface="Noto Sans SC" pitchFamily="34" charset="-120"/>
+              </a:rPr>
+              <a:t>Pass it on</a:t>
+            </a:r>
+            <a:endParaRPr lang="en-US" sz="800" dirty="0"/>
+          </a:p>
+        </p:txBody>
+      </p:sp>
+      <p:sp>
+        <p:nvSpPr>
+          <p:cNvPr id="17" name="Text 15"/>
+          <p:cNvSpPr/>
+          <p:nvPr/>
+        </p:nvSpPr>
+        <p:spPr>
+          <a:xfrm>
+            <a:off x="6187090" y="3116163"/>
+            <a:ext cx="181407" cy="247650"/>
+          </a:xfrm>
+          <a:prstGeom prst="rect">
+            <a:avLst/>
+          </a:prstGeom>
+          <a:noFill/>
+          <a:ln/>
+        </p:spPr>
+        <p:txBody>
+          <a:bodyPr wrap="square" lIns="0" tIns="0" rIns="0" bIns="0" rtlCol="0" anchor="t"/>
+          <a:lstStyle/>
+          <a:p>
+            <a:pPr algn="ctr" indent="0" marL="0">
+              <a:spcBef>
+                <a:spcPts val="1400"/>
+              </a:spcBef>
+              <a:spcAft>
+                <a:spcPts val="1400"/>
+              </a:spcAft>
+              <a:buNone/>
+            </a:pPr>
+            <a:r>
+              <a:rPr lang="en-US" sz="1400" dirty="0">
+                <a:solidFill>
+                  <a:srgbClr val="C8943E"/>
+                </a:solidFill>
+                <a:latin typeface="Noto Sans SC" pitchFamily="34" charset="0"/>
+                <a:ea typeface="Noto Sans SC" pitchFamily="34" charset="-122"/>
+                <a:cs typeface="Noto Sans SC" pitchFamily="34" charset="-120"/>
+              </a:rPr>
+              <a:t>→</a:t>
+            </a:r>
+            <a:endParaRPr lang="en-US" sz="1400" dirty="0"/>
+          </a:p>
+        </p:txBody>
+      </p:sp>
+      <p:sp>
+        <p:nvSpPr>
+          <p:cNvPr id="18" name="Text 16"/>
+          <p:cNvSpPr/>
+          <p:nvPr/>
+        </p:nvSpPr>
+        <p:spPr>
+          <a:xfrm>
+            <a:off x="6493669" y="2865388"/>
+            <a:ext cx="612577" cy="749201"/>
+          </a:xfrm>
+          <a:prstGeom prst="roundRect">
+            <a:avLst>
+              <a:gd name="adj" fmla="val 16586"/>
+            </a:avLst>
+          </a:prstGeom>
+          <a:solidFill>
+            <a:srgbClr val="F6F2E8"/>
+          </a:solidFill>
+          <a:ln/>
+        </p:spPr>
+        <p:txBody>
+          <a:bodyPr wrap="square" rtlCol="0" anchor="ctr"/>
+          <a:lstStyle/>
+          <a:p>
+            <a:pPr indent="0" marL="0">
+              <a:buNone/>
+            </a:pPr>
+            <a:endParaRPr lang="en-US" dirty="0"/>
+          </a:p>
+        </p:txBody>
+      </p:sp>
+      <p:sp>
+        <p:nvSpPr>
+          <p:cNvPr id="19" name="Text 17"/>
+          <p:cNvSpPr/>
+          <p:nvPr/>
+        </p:nvSpPr>
+        <p:spPr>
+          <a:xfrm>
+            <a:off x="6668798" y="2992338"/>
+            <a:ext cx="262319" cy="352425"/>
+          </a:xfrm>
+          <a:prstGeom prst="rect">
+            <a:avLst/>
+          </a:prstGeom>
+          <a:noFill/>
+          <a:ln/>
+        </p:spPr>
+        <p:txBody>
+          <a:bodyPr wrap="square" lIns="0" tIns="0" rIns="0" bIns="0" rtlCol="0" anchor="t"/>
+          <a:lstStyle/>
+          <a:p>
+            <a:pPr algn="ctr" indent="0" marL="0">
+              <a:buNone/>
+            </a:pPr>
+            <a:r>
+              <a:rPr lang="en-US" sz="2000" dirty="0">
+                <a:solidFill>
+                  <a:srgbClr val="1E2A38"/>
+                </a:solidFill>
+                <a:latin typeface="Noto Sans SC" pitchFamily="34" charset="0"/>
+                <a:ea typeface="Noto Sans SC" pitchFamily="34" charset="-122"/>
+                <a:cs typeface="Noto Sans SC" pitchFamily="34" charset="-120"/>
+              </a:rPr>
+              <a:t>🏃</a:t>
+            </a:r>
+            <a:endParaRPr lang="en-US" sz="2000" dirty="0"/>
+          </a:p>
+        </p:txBody>
+      </p:sp>
+      <p:sp>
+        <p:nvSpPr>
+          <p:cNvPr id="20" name="Text 18"/>
+          <p:cNvSpPr/>
+          <p:nvPr/>
+        </p:nvSpPr>
+        <p:spPr>
+          <a:xfrm>
+            <a:off x="6668798" y="3344763"/>
+            <a:ext cx="262319" cy="142875"/>
+          </a:xfrm>
+          <a:prstGeom prst="rect">
+            <a:avLst/>
+          </a:prstGeom>
+          <a:noFill/>
+          <a:ln/>
+        </p:spPr>
+        <p:txBody>
+          <a:bodyPr wrap="square" lIns="0" tIns="0" rIns="0" bIns="0" rtlCol="0" anchor="t"/>
+          <a:lstStyle/>
+          <a:p>
+            <a:pPr algn="ctr" indent="0" marL="0">
+              <a:buNone/>
+            </a:pPr>
+            <a:r>
+              <a:rPr lang="en-US" sz="800" b="1" dirty="0">
+                <a:solidFill>
+                  <a:srgbClr val="1E2A38"/>
+                </a:solidFill>
+                <a:latin typeface="Noto Sans SC" pitchFamily="34" charset="0"/>
+                <a:ea typeface="Noto Sans SC" pitchFamily="34" charset="-122"/>
+                <a:cs typeface="Noto Sans SC" pitchFamily="34" charset="-120"/>
+              </a:rPr>
+              <a:t>Run!</a:t>
+            </a:r>
+            <a:endParaRPr lang="en-US" sz="800" dirty="0"/>
+          </a:p>
+        </p:txBody>
+      </p:sp>
+      <p:sp>
+        <p:nvSpPr>
+          <p:cNvPr id="21" name="Text 19"/>
+          <p:cNvSpPr/>
+          <p:nvPr/>
+        </p:nvSpPr>
+        <p:spPr>
+          <a:xfrm>
+            <a:off x="7231417" y="3116163"/>
+            <a:ext cx="181407" cy="247650"/>
+          </a:xfrm>
+          <a:prstGeom prst="rect">
+            <a:avLst/>
+          </a:prstGeom>
+          <a:noFill/>
+          <a:ln/>
+        </p:spPr>
+        <p:txBody>
+          <a:bodyPr wrap="square" lIns="0" tIns="0" rIns="0" bIns="0" rtlCol="0" anchor="t"/>
+          <a:lstStyle/>
+          <a:p>
+            <a:pPr algn="ctr" indent="0" marL="0">
+              <a:spcBef>
+                <a:spcPts val="1400"/>
+              </a:spcBef>
+              <a:spcAft>
+                <a:spcPts val="1400"/>
+              </a:spcAft>
+              <a:buNone/>
+            </a:pPr>
+            <a:r>
+              <a:rPr lang="en-US" sz="1400" dirty="0">
+                <a:solidFill>
+                  <a:srgbClr val="C8943E"/>
+                </a:solidFill>
+                <a:latin typeface="Noto Sans SC" pitchFamily="34" charset="0"/>
+                <a:ea typeface="Noto Sans SC" pitchFamily="34" charset="-122"/>
+                <a:cs typeface="Noto Sans SC" pitchFamily="34" charset="-120"/>
+              </a:rPr>
+              <a:t>→</a:t>
+            </a:r>
+            <a:endParaRPr lang="en-US" sz="1400" dirty="0"/>
+          </a:p>
+        </p:txBody>
+      </p:sp>
+      <p:sp>
+        <p:nvSpPr>
+          <p:cNvPr id="22" name="Text 20"/>
+          <p:cNvSpPr/>
+          <p:nvPr/>
+        </p:nvSpPr>
+        <p:spPr>
+          <a:xfrm>
+            <a:off x="7537996" y="2865388"/>
+            <a:ext cx="664815" cy="749201"/>
+          </a:xfrm>
+          <a:prstGeom prst="roundRect">
+            <a:avLst>
+              <a:gd name="adj" fmla="val 15282"/>
+            </a:avLst>
+          </a:prstGeom>
+          <a:solidFill>
+            <a:srgbClr val="F6F2E8"/>
+          </a:solidFill>
+          <a:ln/>
+        </p:spPr>
+        <p:txBody>
+          <a:bodyPr wrap="square" rtlCol="0" anchor="ctr"/>
+          <a:lstStyle/>
+          <a:p>
+            <a:pPr indent="0" marL="0">
+              <a:buNone/>
+            </a:pPr>
+            <a:endParaRPr lang="en-US" dirty="0"/>
+          </a:p>
+        </p:txBody>
+      </p:sp>
+      <p:sp>
+        <p:nvSpPr>
+          <p:cNvPr id="23" name="Text 21"/>
+          <p:cNvSpPr/>
+          <p:nvPr/>
+        </p:nvSpPr>
+        <p:spPr>
+          <a:xfrm>
+            <a:off x="7712602" y="2992338"/>
+            <a:ext cx="315602" cy="352425"/>
+          </a:xfrm>
+          <a:prstGeom prst="rect">
+            <a:avLst/>
+          </a:prstGeom>
+          <a:noFill/>
+          <a:ln/>
+        </p:spPr>
+        <p:txBody>
+          <a:bodyPr wrap="square" lIns="0" tIns="0" rIns="0" bIns="0" rtlCol="0" anchor="t"/>
+          <a:lstStyle/>
+          <a:p>
+            <a:pPr algn="ctr" indent="0" marL="0">
+              <a:buNone/>
+            </a:pPr>
+            <a:r>
+              <a:rPr lang="en-US" sz="2000" dirty="0">
+                <a:solidFill>
+                  <a:srgbClr val="1E2A38"/>
+                </a:solidFill>
+                <a:latin typeface="Noto Sans SC" pitchFamily="34" charset="0"/>
+                <a:ea typeface="Noto Sans SC" pitchFamily="34" charset="-122"/>
+                <a:cs typeface="Noto Sans SC" pitchFamily="34" charset="-120"/>
+              </a:rPr>
+              <a:t>✍️</a:t>
+            </a:r>
+            <a:endParaRPr lang="en-US" sz="2000" dirty="0"/>
+          </a:p>
+        </p:txBody>
+      </p:sp>
+      <p:sp>
+        <p:nvSpPr>
+          <p:cNvPr id="24" name="Text 22"/>
+          <p:cNvSpPr/>
+          <p:nvPr/>
+        </p:nvSpPr>
+        <p:spPr>
+          <a:xfrm>
+            <a:off x="7712602" y="3344763"/>
+            <a:ext cx="315602" cy="142875"/>
+          </a:xfrm>
+          <a:prstGeom prst="rect">
+            <a:avLst/>
+          </a:prstGeom>
+          <a:noFill/>
+          <a:ln/>
+        </p:spPr>
+        <p:txBody>
+          <a:bodyPr wrap="square" lIns="0" tIns="0" rIns="0" bIns="0" rtlCol="0" anchor="t"/>
+          <a:lstStyle/>
+          <a:p>
+            <a:pPr algn="ctr" indent="0" marL="0">
+              <a:buNone/>
+            </a:pPr>
+            <a:r>
+              <a:rPr lang="en-US" sz="800" b="1" dirty="0">
+                <a:solidFill>
+                  <a:srgbClr val="1E2A38"/>
+                </a:solidFill>
+                <a:latin typeface="Noto Sans SC" pitchFamily="34" charset="0"/>
+                <a:ea typeface="Noto Sans SC" pitchFamily="34" charset="-122"/>
+                <a:cs typeface="Noto Sans SC" pitchFamily="34" charset="-120"/>
+              </a:rPr>
+              <a:t>Write!</a:t>
+            </a:r>
+            <a:endParaRPr lang="en-US" sz="800" dirty="0"/>
+          </a:p>
+        </p:txBody>
+      </p:sp>
+      <p:sp>
+        <p:nvSpPr>
+          <p:cNvPr id="25" name="Text 23"/>
+          <p:cNvSpPr/>
+          <p:nvPr/>
+        </p:nvSpPr>
+        <p:spPr>
+          <a:xfrm>
+            <a:off x="3006030" y="3817739"/>
+            <a:ext cx="1449735" cy="952500"/>
+          </a:xfrm>
+          <a:prstGeom prst="roundRect">
+            <a:avLst>
+              <a:gd name="adj" fmla="val 10667"/>
+            </a:avLst>
+          </a:prstGeom>
+          <a:solidFill>
+            <a:srgbClr val="F6F2E8"/>
+          </a:solidFill>
+          <a:ln/>
+        </p:spPr>
+        <p:txBody>
+          <a:bodyPr wrap="square" rtlCol="0" anchor="ctr"/>
+          <a:lstStyle/>
+          <a:p>
+            <a:pPr indent="0" marL="0">
+              <a:buNone/>
+            </a:pPr>
+            <a:endParaRPr lang="en-US" dirty="0"/>
+          </a:p>
+        </p:txBody>
+      </p:sp>
+      <p:sp>
+        <p:nvSpPr>
+          <p:cNvPr id="26" name="Text 24"/>
+          <p:cNvSpPr/>
+          <p:nvPr/>
+        </p:nvSpPr>
+        <p:spPr>
+          <a:xfrm>
+            <a:off x="3121023" y="3970139"/>
+            <a:ext cx="1219751" cy="123825"/>
+          </a:xfrm>
+          <a:prstGeom prst="rect">
+            <a:avLst/>
+          </a:prstGeom>
+          <a:noFill/>
+          <a:ln/>
+        </p:spPr>
+        <p:txBody>
+          <a:bodyPr wrap="square" lIns="0" tIns="0" rIns="0" bIns="0" rtlCol="0" anchor="t"/>
+          <a:lstStyle/>
+          <a:p>
+            <a:pPr algn="ctr" indent="0" marL="0">
+              <a:buNone/>
+            </a:pPr>
+            <a:r>
+              <a:rPr lang="en-US" sz="700" b="1" dirty="0">
+                <a:solidFill>
+                  <a:srgbClr val="3A7D8C"/>
+                </a:solidFill>
+                <a:latin typeface="Noto Sans SC" pitchFamily="34" charset="0"/>
+                <a:ea typeface="Noto Sans SC" pitchFamily="34" charset="-122"/>
+                <a:cs typeface="Noto Sans SC" pitchFamily="34" charset="-120"/>
+              </a:rPr>
+              <a:t>Round 1</a:t>
+            </a:r>
+            <a:endParaRPr lang="en-US" sz="700" dirty="0"/>
+          </a:p>
+        </p:txBody>
+      </p:sp>
+      <p:sp>
+        <p:nvSpPr>
+          <p:cNvPr id="27" name="Text 25"/>
+          <p:cNvSpPr/>
+          <p:nvPr/>
+        </p:nvSpPr>
+        <p:spPr>
+          <a:xfrm>
+            <a:off x="3121023" y="4093964"/>
+            <a:ext cx="1219751" cy="314325"/>
+          </a:xfrm>
+          <a:prstGeom prst="rect">
+            <a:avLst/>
+          </a:prstGeom>
+          <a:noFill/>
+          <a:ln/>
+        </p:spPr>
+        <p:txBody>
+          <a:bodyPr wrap="square" lIns="0" tIns="0" rIns="0" bIns="0" rtlCol="0" anchor="t"/>
+          <a:lstStyle/>
+          <a:p>
+            <a:pPr algn="ctr" indent="0" marL="0">
+              <a:buNone/>
+            </a:pPr>
+            <a:r>
+              <a:rPr lang="en-US" sz="1800" b="1" dirty="0">
+                <a:solidFill>
+                  <a:srgbClr val="1E2A38"/>
+                </a:solidFill>
+                <a:latin typeface="Noto Serif SC" pitchFamily="34" charset="0"/>
+                <a:ea typeface="Noto Serif SC" pitchFamily="34" charset="-122"/>
+                <a:cs typeface="Noto Serif SC" pitchFamily="34" charset="-120"/>
+              </a:rPr>
+              <a:t>五点</a:t>
+            </a:r>
+            <a:endParaRPr lang="en-US" sz="1800" dirty="0"/>
+          </a:p>
+        </p:txBody>
+      </p:sp>
+      <p:sp>
+        <p:nvSpPr>
+          <p:cNvPr id="28" name="Text 26"/>
+          <p:cNvSpPr/>
+          <p:nvPr/>
+        </p:nvSpPr>
+        <p:spPr>
+          <a:xfrm>
+            <a:off x="3121023" y="4408289"/>
+            <a:ext cx="1219751" cy="142875"/>
+          </a:xfrm>
+          <a:prstGeom prst="rect">
+            <a:avLst/>
+          </a:prstGeom>
+          <a:noFill/>
+          <a:ln/>
+        </p:spPr>
+        <p:txBody>
+          <a:bodyPr wrap="square" lIns="0" tIns="0" rIns="0" bIns="0" rtlCol="0" anchor="t"/>
+          <a:lstStyle/>
+          <a:p>
+            <a:pPr algn="ctr" indent="0" marL="0">
+              <a:buNone/>
+            </a:pPr>
+            <a:r>
+              <a:rPr lang="en-US" sz="800" dirty="0">
+                <a:solidFill>
+                  <a:srgbClr val="8B94A3"/>
+                </a:solidFill>
+                <a:latin typeface="Noto Sans SC" pitchFamily="34" charset="0"/>
+                <a:ea typeface="Noto Sans SC" pitchFamily="34" charset="-122"/>
+                <a:cs typeface="Noto Sans SC" pitchFamily="34" charset="-120"/>
+              </a:rPr>
+              <a:t>5:00</a:t>
+            </a:r>
+            <a:endParaRPr lang="en-US" sz="800" dirty="0"/>
+          </a:p>
+        </p:txBody>
+      </p:sp>
+      <p:sp>
+        <p:nvSpPr>
+          <p:cNvPr id="29" name="Text 27"/>
+          <p:cNvSpPr/>
+          <p:nvPr/>
+        </p:nvSpPr>
+        <p:spPr>
+          <a:xfrm>
+            <a:off x="4582716" y="3817739"/>
+            <a:ext cx="1449735" cy="952500"/>
+          </a:xfrm>
+          <a:prstGeom prst="roundRect">
+            <a:avLst>
+              <a:gd name="adj" fmla="val 10667"/>
+            </a:avLst>
+          </a:prstGeom>
+          <a:solidFill>
+            <a:srgbClr val="F6F2E8"/>
           </a:solidFill>
           <a:ln w="19050">
             <a:solidFill>
-              <a:srgbClr val="C8943E"/>
+              <a:srgbClr val="D4756B"/>
             </a:solidFill>
           </a:ln>
         </p:spPr>
@@ -4345,38 +4324,38 @@
       </p:sp>
       <p:sp>
         <p:nvSpPr>
-          <p:cNvPr id="20" name="Text 18"/>
-          <p:cNvSpPr/>
-          <p:nvPr/>
-        </p:nvSpPr>
-        <p:spPr>
-          <a:xfrm>
-            <a:off x="984052" y="4490889"/>
-            <a:ext cx="2460602" cy="152400"/>
-          </a:xfrm>
-          <a:prstGeom prst="rect">
-            <a:avLst/>
-          </a:prstGeom>
-          <a:noFill/>
-          <a:ln/>
-        </p:spPr>
-        <p:txBody>
-          <a:bodyPr wrap="square" lIns="0" tIns="0" rIns="0" bIns="0" rtlCol="0" anchor="t"/>
-          <a:lstStyle/>
-          <a:p>
-            <a:pPr algn="l" indent="0" marL="0">
+          <p:cNvPr id="30" name="Text 28"/>
+          <p:cNvSpPr/>
+          <p:nvPr/>
+        </p:nvSpPr>
+        <p:spPr>
+          <a:xfrm>
+            <a:off x="4717139" y="3989189"/>
+            <a:ext cx="1180889" cy="152400"/>
+          </a:xfrm>
+          <a:prstGeom prst="rect">
+            <a:avLst/>
+          </a:prstGeom>
+          <a:noFill/>
+          <a:ln/>
+        </p:spPr>
+        <p:txBody>
+          <a:bodyPr wrap="square" lIns="0" tIns="0" rIns="0" bIns="0" rtlCol="0" anchor="t"/>
+          <a:lstStyle/>
+          <a:p>
+            <a:pPr algn="ctr" indent="0" marL="0">
               <a:buNone/>
             </a:pPr>
             <a:r>
               <a:rPr lang="en-US" sz="700" b="1" dirty="0">
                 <a:solidFill>
-                  <a:srgbClr val="C8943E"/>
-                </a:solidFill>
-                <a:latin typeface="Noto Sans SC" pitchFamily="34" charset="0"/>
-                <a:ea typeface="Noto Sans SC" pitchFamily="34" charset="-122"/>
-                <a:cs typeface="Noto Sans SC" pitchFamily="34" charset="-120"/>
-              </a:rPr>
-              <a:t>🚪 Exit Ticket</a:t>
+                  <a:srgbClr val="3A7D8C"/>
+                </a:solidFill>
+                <a:latin typeface="Noto Sans SC" pitchFamily="34" charset="0"/>
+                <a:ea typeface="Noto Sans SC" pitchFamily="34" charset="-122"/>
+                <a:cs typeface="Noto Sans SC" pitchFamily="34" charset="-120"/>
+              </a:rPr>
+              <a:t>Round 2 · ⚠️ 两 Trap!</a:t>
             </a:r>
             <a:endParaRPr lang="en-US" sz="700" dirty="0"/>
           </a:p>
@@ -4384,65 +4363,402 @@
       </p:sp>
       <p:sp>
         <p:nvSpPr>
-          <p:cNvPr id="21" name="Text 19"/>
-          <p:cNvSpPr/>
-          <p:nvPr/>
-        </p:nvSpPr>
-        <p:spPr>
-          <a:xfrm>
-            <a:off x="984052" y="4643289"/>
-            <a:ext cx="2460602" cy="247650"/>
-          </a:xfrm>
-          <a:prstGeom prst="rect">
-            <a:avLst/>
-          </a:prstGeom>
-          <a:noFill/>
-          <a:ln/>
-        </p:spPr>
-        <p:txBody>
-          <a:bodyPr wrap="square" lIns="0" tIns="0" rIns="0" bIns="0" rtlCol="0" anchor="t"/>
-          <a:lstStyle/>
-          <a:p>
-            <a:pPr algn="l" indent="0" marL="0">
-              <a:buNone/>
-            </a:pPr>
-            <a:r>
-              <a:rPr lang="en-US" sz="1400" b="1" dirty="0">
+          <p:cNvPr id="31" name="Text 29"/>
+          <p:cNvSpPr/>
+          <p:nvPr/>
+        </p:nvSpPr>
+        <p:spPr>
+          <a:xfrm>
+            <a:off x="4717139" y="4141589"/>
+            <a:ext cx="1180889" cy="314325"/>
+          </a:xfrm>
+          <a:prstGeom prst="rect">
+            <a:avLst/>
+          </a:prstGeom>
+          <a:noFill/>
+          <a:ln/>
+        </p:spPr>
+        <p:txBody>
+          <a:bodyPr wrap="square" lIns="0" tIns="0" rIns="0" bIns="0" rtlCol="0" anchor="t"/>
+          <a:lstStyle/>
+          <a:p>
+            <a:pPr algn="ctr" indent="0" marL="0">
+              <a:buNone/>
+            </a:pPr>
+            <a:r>
+              <a:rPr lang="en-US" sz="1800" b="1" dirty="0">
+                <a:solidFill>
+                  <a:srgbClr val="D4756B"/>
+                </a:solidFill>
+                <a:latin typeface="Noto Serif SC" pitchFamily="34" charset="0"/>
+                <a:ea typeface="Noto Serif SC" pitchFamily="34" charset="-122"/>
+                <a:cs typeface="Noto Serif SC" pitchFamily="34" charset="-120"/>
+              </a:rPr>
+              <a:t>两点</a:t>
+            </a:r>
+            <a:endParaRPr lang="en-US" sz="1800" dirty="0"/>
+          </a:p>
+        </p:txBody>
+      </p:sp>
+      <p:sp>
+        <p:nvSpPr>
+          <p:cNvPr id="32" name="Text 30"/>
+          <p:cNvSpPr/>
+          <p:nvPr/>
+        </p:nvSpPr>
+        <p:spPr>
+          <a:xfrm>
+            <a:off x="4717139" y="4455914"/>
+            <a:ext cx="1180889" cy="142875"/>
+          </a:xfrm>
+          <a:prstGeom prst="rect">
+            <a:avLst/>
+          </a:prstGeom>
+          <a:noFill/>
+          <a:ln/>
+        </p:spPr>
+        <p:txBody>
+          <a:bodyPr wrap="square" lIns="0" tIns="0" rIns="0" bIns="0" rtlCol="0" anchor="t"/>
+          <a:lstStyle/>
+          <a:p>
+            <a:pPr algn="ctr" indent="0" marL="0">
+              <a:buNone/>
+            </a:pPr>
+            <a:r>
+              <a:rPr lang="en-US" sz="800" dirty="0">
+                <a:solidFill>
+                  <a:srgbClr val="8B94A3"/>
+                </a:solidFill>
+                <a:latin typeface="Noto Sans SC" pitchFamily="34" charset="0"/>
+                <a:ea typeface="Noto Sans SC" pitchFamily="34" charset="-122"/>
+                <a:cs typeface="Noto Sans SC" pitchFamily="34" charset="-120"/>
+              </a:rPr>
+              <a:t>2:00 — NOT 二点!</a:t>
+            </a:r>
+            <a:endParaRPr lang="en-US" sz="800" dirty="0"/>
+          </a:p>
+        </p:txBody>
+      </p:sp>
+      <p:sp>
+        <p:nvSpPr>
+          <p:cNvPr id="33" name="Text 31"/>
+          <p:cNvSpPr/>
+          <p:nvPr/>
+        </p:nvSpPr>
+        <p:spPr>
+          <a:xfrm>
+            <a:off x="6159401" y="3817739"/>
+            <a:ext cx="1449735" cy="952500"/>
+          </a:xfrm>
+          <a:prstGeom prst="roundRect">
+            <a:avLst>
+              <a:gd name="adj" fmla="val 10667"/>
+            </a:avLst>
+          </a:prstGeom>
+          <a:solidFill>
+            <a:srgbClr val="F6F2E8"/>
+          </a:solidFill>
+          <a:ln/>
+        </p:spPr>
+        <p:txBody>
+          <a:bodyPr wrap="square" rtlCol="0" anchor="ctr"/>
+          <a:lstStyle/>
+          <a:p>
+            <a:pPr indent="0" marL="0">
+              <a:buNone/>
+            </a:pPr>
+            <a:endParaRPr lang="en-US" dirty="0"/>
+          </a:p>
+        </p:txBody>
+      </p:sp>
+      <p:sp>
+        <p:nvSpPr>
+          <p:cNvPr id="34" name="Text 32"/>
+          <p:cNvSpPr/>
+          <p:nvPr/>
+        </p:nvSpPr>
+        <p:spPr>
+          <a:xfrm>
+            <a:off x="6274393" y="3970139"/>
+            <a:ext cx="1219751" cy="123825"/>
+          </a:xfrm>
+          <a:prstGeom prst="rect">
+            <a:avLst/>
+          </a:prstGeom>
+          <a:noFill/>
+          <a:ln/>
+        </p:spPr>
+        <p:txBody>
+          <a:bodyPr wrap="square" lIns="0" tIns="0" rIns="0" bIns="0" rtlCol="0" anchor="t"/>
+          <a:lstStyle/>
+          <a:p>
+            <a:pPr algn="ctr" indent="0" marL="0">
+              <a:buNone/>
+            </a:pPr>
+            <a:r>
+              <a:rPr lang="en-US" sz="700" b="1" dirty="0">
+                <a:solidFill>
+                  <a:srgbClr val="3A7D8C"/>
+                </a:solidFill>
+                <a:latin typeface="Noto Sans SC" pitchFamily="34" charset="0"/>
+                <a:ea typeface="Noto Sans SC" pitchFamily="34" charset="-122"/>
+                <a:cs typeface="Noto Sans SC" pitchFamily="34" charset="-120"/>
+              </a:rPr>
+              <a:t>Round 3</a:t>
+            </a:r>
+            <a:endParaRPr lang="en-US" sz="700" dirty="0"/>
+          </a:p>
+        </p:txBody>
+      </p:sp>
+      <p:sp>
+        <p:nvSpPr>
+          <p:cNvPr id="35" name="Text 33"/>
+          <p:cNvSpPr/>
+          <p:nvPr/>
+        </p:nvSpPr>
+        <p:spPr>
+          <a:xfrm>
+            <a:off x="6274393" y="4093964"/>
+            <a:ext cx="1219751" cy="314325"/>
+          </a:xfrm>
+          <a:prstGeom prst="rect">
+            <a:avLst/>
+          </a:prstGeom>
+          <a:noFill/>
+          <a:ln/>
+        </p:spPr>
+        <p:txBody>
+          <a:bodyPr wrap="square" lIns="0" tIns="0" rIns="0" bIns="0" rtlCol="0" anchor="t"/>
+          <a:lstStyle/>
+          <a:p>
+            <a:pPr algn="ctr" indent="0" marL="0">
+              <a:buNone/>
+            </a:pPr>
+            <a:r>
+              <a:rPr lang="en-US" sz="1800" b="1" dirty="0">
                 <a:solidFill>
                   <a:srgbClr val="1E2A38"/>
                 </a:solidFill>
-                <a:latin typeface="Noto Sans SC" pitchFamily="34" charset="0"/>
-                <a:ea typeface="Noto Sans SC" pitchFamily="34" charset="-122"/>
-                <a:cs typeface="Noto Sans SC" pitchFamily="34" charset="-120"/>
-              </a:rPr>
-              <a:t>Write 2 o'clock in Chinese.</a:t>
-            </a:r>
-            <a:endParaRPr lang="en-US" sz="1400" dirty="0"/>
-          </a:p>
-        </p:txBody>
-      </p:sp>
-      <p:sp>
-        <p:nvSpPr>
-          <p:cNvPr id="22" name="Text 20"/>
-          <p:cNvSpPr/>
-          <p:nvPr/>
-        </p:nvSpPr>
-        <p:spPr>
-          <a:xfrm>
-            <a:off x="711101" y="5189339"/>
-            <a:ext cx="1271516" cy="190500"/>
-          </a:xfrm>
-          <a:prstGeom prst="rect">
-            <a:avLst/>
-          </a:prstGeom>
-          <a:noFill/>
-          <a:ln/>
-        </p:spPr>
-        <p:txBody>
-          <a:bodyPr wrap="square" lIns="0" tIns="0" rIns="0" bIns="0" rtlCol="0" anchor="t"/>
-          <a:lstStyle/>
-          <a:p>
-            <a:pPr algn="l" indent="0" marL="0">
+                <a:latin typeface="Noto Serif SC" pitchFamily="34" charset="0"/>
+                <a:ea typeface="Noto Serif SC" pitchFamily="34" charset="-122"/>
+                <a:cs typeface="Noto Serif SC" pitchFamily="34" charset="-120"/>
+              </a:rPr>
+              <a:t>十二点</a:t>
+            </a:r>
+            <a:endParaRPr lang="en-US" sz="1800" dirty="0"/>
+          </a:p>
+        </p:txBody>
+      </p:sp>
+      <p:sp>
+        <p:nvSpPr>
+          <p:cNvPr id="36" name="Text 34"/>
+          <p:cNvSpPr/>
+          <p:nvPr/>
+        </p:nvSpPr>
+        <p:spPr>
+          <a:xfrm>
+            <a:off x="6274393" y="4408289"/>
+            <a:ext cx="1219751" cy="142875"/>
+          </a:xfrm>
+          <a:prstGeom prst="rect">
+            <a:avLst/>
+          </a:prstGeom>
+          <a:noFill/>
+          <a:ln/>
+        </p:spPr>
+        <p:txBody>
+          <a:bodyPr wrap="square" lIns="0" tIns="0" rIns="0" bIns="0" rtlCol="0" anchor="t"/>
+          <a:lstStyle/>
+          <a:p>
+            <a:pPr algn="ctr" indent="0" marL="0">
+              <a:buNone/>
+            </a:pPr>
+            <a:r>
+              <a:rPr lang="en-US" sz="800" dirty="0">
+                <a:solidFill>
+                  <a:srgbClr val="8B94A3"/>
+                </a:solidFill>
+                <a:latin typeface="Noto Sans SC" pitchFamily="34" charset="0"/>
+                <a:ea typeface="Noto Sans SC" pitchFamily="34" charset="-122"/>
+                <a:cs typeface="Noto Sans SC" pitchFamily="34" charset="-120"/>
+              </a:rPr>
+              <a:t>12:00</a:t>
+            </a:r>
+            <a:endParaRPr lang="en-US" sz="800" dirty="0"/>
+          </a:p>
+        </p:txBody>
+      </p:sp>
+      <p:sp>
+        <p:nvSpPr>
+          <p:cNvPr id="37" name="Text 35"/>
+          <p:cNvSpPr/>
+          <p:nvPr/>
+        </p:nvSpPr>
+        <p:spPr>
+          <a:xfrm>
+            <a:off x="7736086" y="3817739"/>
+            <a:ext cx="1449735" cy="952500"/>
+          </a:xfrm>
+          <a:prstGeom prst="roundRect">
+            <a:avLst>
+              <a:gd name="adj" fmla="val 10667"/>
+            </a:avLst>
+          </a:prstGeom>
+          <a:solidFill>
+            <a:srgbClr val="F6F2E8"/>
+          </a:solidFill>
+          <a:ln/>
+        </p:spPr>
+        <p:txBody>
+          <a:bodyPr wrap="square" rtlCol="0" anchor="ctr"/>
+          <a:lstStyle/>
+          <a:p>
+            <a:pPr indent="0" marL="0">
+              <a:buNone/>
+            </a:pPr>
+            <a:endParaRPr lang="en-US" dirty="0"/>
+          </a:p>
+        </p:txBody>
+      </p:sp>
+      <p:sp>
+        <p:nvSpPr>
+          <p:cNvPr id="38" name="Text 36"/>
+          <p:cNvSpPr/>
+          <p:nvPr/>
+        </p:nvSpPr>
+        <p:spPr>
+          <a:xfrm>
+            <a:off x="7851078" y="3970139"/>
+            <a:ext cx="1219751" cy="123825"/>
+          </a:xfrm>
+          <a:prstGeom prst="rect">
+            <a:avLst/>
+          </a:prstGeom>
+          <a:noFill/>
+          <a:ln/>
+        </p:spPr>
+        <p:txBody>
+          <a:bodyPr wrap="square" lIns="0" tIns="0" rIns="0" bIns="0" rtlCol="0" anchor="t"/>
+          <a:lstStyle/>
+          <a:p>
+            <a:pPr algn="ctr" indent="0" marL="0">
+              <a:buNone/>
+            </a:pPr>
+            <a:r>
+              <a:rPr lang="en-US" sz="700" b="1" dirty="0">
+                <a:solidFill>
+                  <a:srgbClr val="3A7D8C"/>
+                </a:solidFill>
+                <a:latin typeface="Noto Sans SC" pitchFamily="34" charset="0"/>
+                <a:ea typeface="Noto Sans SC" pitchFamily="34" charset="-122"/>
+                <a:cs typeface="Noto Sans SC" pitchFamily="34" charset="-120"/>
+              </a:rPr>
+              <a:t>Round 4</a:t>
+            </a:r>
+            <a:endParaRPr lang="en-US" sz="700" dirty="0"/>
+          </a:p>
+        </p:txBody>
+      </p:sp>
+      <p:sp>
+        <p:nvSpPr>
+          <p:cNvPr id="39" name="Text 37"/>
+          <p:cNvSpPr/>
+          <p:nvPr/>
+        </p:nvSpPr>
+        <p:spPr>
+          <a:xfrm>
+            <a:off x="7851078" y="4093964"/>
+            <a:ext cx="1219751" cy="314325"/>
+          </a:xfrm>
+          <a:prstGeom prst="rect">
+            <a:avLst/>
+          </a:prstGeom>
+          <a:noFill/>
+          <a:ln/>
+        </p:spPr>
+        <p:txBody>
+          <a:bodyPr wrap="square" lIns="0" tIns="0" rIns="0" bIns="0" rtlCol="0" anchor="t"/>
+          <a:lstStyle/>
+          <a:p>
+            <a:pPr algn="ctr" indent="0" marL="0">
+              <a:buNone/>
+            </a:pPr>
+            <a:r>
+              <a:rPr lang="en-US" sz="1800" b="1" dirty="0">
+                <a:solidFill>
+                  <a:srgbClr val="1E2A38"/>
+                </a:solidFill>
+                <a:latin typeface="Noto Serif SC" pitchFamily="34" charset="0"/>
+                <a:ea typeface="Noto Serif SC" pitchFamily="34" charset="-122"/>
+                <a:cs typeface="Noto Serif SC" pitchFamily="34" charset="-120"/>
+              </a:rPr>
+              <a:t>八点</a:t>
+            </a:r>
+            <a:endParaRPr lang="en-US" sz="1800" dirty="0"/>
+          </a:p>
+        </p:txBody>
+      </p:sp>
+      <p:sp>
+        <p:nvSpPr>
+          <p:cNvPr id="40" name="Text 38"/>
+          <p:cNvSpPr/>
+          <p:nvPr/>
+        </p:nvSpPr>
+        <p:spPr>
+          <a:xfrm>
+            <a:off x="7851078" y="4408289"/>
+            <a:ext cx="1219751" cy="142875"/>
+          </a:xfrm>
+          <a:prstGeom prst="rect">
+            <a:avLst/>
+          </a:prstGeom>
+          <a:noFill/>
+          <a:ln/>
+        </p:spPr>
+        <p:txBody>
+          <a:bodyPr wrap="square" lIns="0" tIns="0" rIns="0" bIns="0" rtlCol="0" anchor="t"/>
+          <a:lstStyle/>
+          <a:p>
+            <a:pPr algn="ctr" indent="0" marL="0">
+              <a:buNone/>
+            </a:pPr>
+            <a:r>
+              <a:rPr lang="en-US" sz="800" dirty="0">
+                <a:solidFill>
+                  <a:srgbClr val="8B94A3"/>
+                </a:solidFill>
+                <a:latin typeface="Noto Sans SC" pitchFamily="34" charset="0"/>
+                <a:ea typeface="Noto Sans SC" pitchFamily="34" charset="-122"/>
+                <a:cs typeface="Noto Sans SC" pitchFamily="34" charset="-120"/>
+              </a:rPr>
+              <a:t>8:00</a:t>
+            </a:r>
+            <a:endParaRPr lang="en-US" sz="800" dirty="0"/>
+          </a:p>
+        </p:txBody>
+      </p:sp>
+      <p:sp>
+        <p:nvSpPr>
+          <p:cNvPr id="41" name="Text 39"/>
+          <p:cNvSpPr/>
+          <p:nvPr/>
+        </p:nvSpPr>
+        <p:spPr>
+          <a:xfrm>
+            <a:off x="3461052" y="4922639"/>
+            <a:ext cx="1937635" cy="190500"/>
+          </a:xfrm>
+          <a:prstGeom prst="rect">
+            <a:avLst/>
+          </a:prstGeom>
+          <a:noFill/>
+          <a:ln/>
+        </p:spPr>
+        <p:txBody>
+          <a:bodyPr wrap="square" lIns="0" tIns="0" rIns="0" bIns="0" rtlCol="0" anchor="t"/>
+          <a:lstStyle/>
+          <a:p>
+            <a:pPr algn="ctr" indent="0" marL="0">
               <a:buNone/>
             </a:pPr>
             <a:r>
@@ -4454,7 +4770,7 @@
                 <a:ea typeface="Noto Sans SC" pitchFamily="34" charset="-122"/>
                 <a:cs typeface="Noto Sans SC" pitchFamily="34" charset="-120"/>
               </a:rPr>
-              <a:t>☝️ 1 finger = Achieved</a:t>
+              <a:t>🏆 First correct team wins a point</a:t>
             </a:r>
             <a:endParaRPr lang="en-US" sz="900" dirty="0"/>
           </a:p>
@@ -4462,26 +4778,26 @@
       </p:sp>
       <p:sp>
         <p:nvSpPr>
-          <p:cNvPr id="23" name="Text 21"/>
-          <p:cNvSpPr/>
-          <p:nvPr/>
-        </p:nvSpPr>
-        <p:spPr>
-          <a:xfrm>
-            <a:off x="2186285" y="5189339"/>
-            <a:ext cx="1594708" cy="190500"/>
-          </a:xfrm>
-          <a:prstGeom prst="rect">
-            <a:avLst/>
-          </a:prstGeom>
-          <a:noFill/>
-          <a:ln/>
-        </p:spPr>
-        <p:txBody>
-          <a:bodyPr wrap="square" lIns="0" tIns="0" rIns="0" bIns="0" rtlCol="0" anchor="t"/>
-          <a:lstStyle/>
-          <a:p>
-            <a:pPr algn="l" indent="0" marL="0">
+          <p:cNvPr id="42" name="Text 40"/>
+          <p:cNvSpPr/>
+          <p:nvPr/>
+        </p:nvSpPr>
+        <p:spPr>
+          <a:xfrm>
+            <a:off x="5551551" y="4922639"/>
+            <a:ext cx="3191542" cy="190500"/>
+          </a:xfrm>
+          <a:prstGeom prst="rect">
+            <a:avLst/>
+          </a:prstGeom>
+          <a:noFill/>
+          <a:ln/>
+        </p:spPr>
+        <p:txBody>
+          <a:bodyPr wrap="square" lIns="0" tIns="0" rIns="0" bIns="0" rtlCol="0" anchor="t"/>
+          <a:lstStyle/>
+          <a:p>
+            <a:pPr algn="ctr" indent="0" marL="0">
               <a:buNone/>
             </a:pPr>
             <a:r>
@@ -4493,7 +4809,7 @@
                 <a:ea typeface="Noto Sans SC" pitchFamily="34" charset="-122"/>
                 <a:cs typeface="Noto Sans SC" pitchFamily="34" charset="-120"/>
               </a:rPr>
-              <a:t>✌️ 2 fingers = Getting there</a:t>
+              <a:t>📢 After each round: everyone says the answer together</a:t>
             </a:r>
             <a:endParaRPr lang="en-US" sz="900" dirty="0"/>
           </a:p>
@@ -4501,46 +4817,7 @@
       </p:sp>
       <p:sp>
         <p:nvSpPr>
-          <p:cNvPr id="24" name="Text 22"/>
-          <p:cNvSpPr/>
-          <p:nvPr/>
-        </p:nvSpPr>
-        <p:spPr>
-          <a:xfrm>
-            <a:off x="3978325" y="5189339"/>
-            <a:ext cx="1118193" cy="190500"/>
-          </a:xfrm>
-          <a:prstGeom prst="rect">
-            <a:avLst/>
-          </a:prstGeom>
-          <a:noFill/>
-          <a:ln/>
-        </p:spPr>
-        <p:txBody>
-          <a:bodyPr wrap="square" lIns="0" tIns="0" rIns="0" bIns="0" rtlCol="0" anchor="t"/>
-          <a:lstStyle/>
-          <a:p>
-            <a:pPr algn="l" indent="0" marL="0">
-              <a:buNone/>
-            </a:pPr>
-            <a:r>
-              <a:rPr lang="en-US" sz="900" dirty="0">
-                <a:solidFill>
-                  <a:srgbClr val="8B94A3"/>
-                </a:solidFill>
-                <a:latin typeface="Noto Sans SC" pitchFamily="34" charset="0"/>
-                <a:ea typeface="Noto Sans SC" pitchFamily="34" charset="-122"/>
-                <a:cs typeface="Noto Sans SC" pitchFamily="34" charset="-120"/>
-              </a:rPr>
-              <a:t>✊ Fist = Need help</a:t>
-            </a:r>
-            <a:endParaRPr lang="en-US" sz="900" dirty="0"/>
-          </a:p>
-        </p:txBody>
-      </p:sp>
-      <p:sp>
-        <p:nvSpPr>
-          <p:cNvPr id="25" name="Shape 23"/>
+          <p:cNvPr id="43" name="Shape 41"/>
           <p:cNvSpPr/>
           <p:nvPr/>
         </p:nvSpPr>
@@ -4563,7 +4840,7 @@
       </p:sp>
       <p:sp>
         <p:nvSpPr>
-          <p:cNvPr id="26" name="Text 24"/>
+          <p:cNvPr id="44" name="Text 42"/>
           <p:cNvSpPr/>
           <p:nvPr/>
         </p:nvSpPr>
@@ -4634,6 +4911,934 @@
       </p:grpSpPr>
       <p:sp>
         <p:nvSpPr>
+          <p:cNvPr id="2" name="Shape 0"/>
+          <p:cNvSpPr/>
+          <p:nvPr/>
+        </p:nvSpPr>
+        <p:spPr>
+          <a:xfrm>
+            <a:off x="0" y="461962"/>
+            <a:ext cx="12192000" cy="0"/>
+          </a:xfrm>
+          <a:prstGeom prst="line">
+            <a:avLst/>
+          </a:prstGeom>
+          <a:noFill/>
+          <a:ln w="9525">
+            <a:solidFill>
+              <a:srgbClr val="E5DFD0"/>
+            </a:solidFill>
+            <a:prstDash val="solid"/>
+          </a:ln>
+        </p:spPr>
+      </p:sp>
+      <p:sp>
+        <p:nvSpPr>
+          <p:cNvPr id="3" name="Text 1"/>
+          <p:cNvSpPr/>
+          <p:nvPr/>
+        </p:nvSpPr>
+        <p:spPr>
+          <a:xfrm>
+            <a:off x="457200" y="166688"/>
+            <a:ext cx="776329" cy="123825"/>
+          </a:xfrm>
+          <a:prstGeom prst="rect">
+            <a:avLst/>
+          </a:prstGeom>
+          <a:noFill/>
+          <a:ln/>
+        </p:spPr>
+        <p:txBody>
+          <a:bodyPr wrap="square" lIns="0" tIns="0" rIns="0" bIns="0" rtlCol="0" anchor="t"/>
+          <a:lstStyle/>
+          <a:p>
+            <a:pPr algn="l" indent="0" marL="0">
+              <a:buNone/>
+            </a:pPr>
+            <a:r>
+              <a:rPr lang="en-US" sz="700" b="1" dirty="0">
+                <a:solidFill>
+                  <a:srgbClr val="C8943E"/>
+                </a:solidFill>
+                <a:latin typeface="Noto Sans SC" pitchFamily="34" charset="0"/>
+                <a:ea typeface="Noto Sans SC" pitchFamily="34" charset="-122"/>
+                <a:cs typeface="Noto Sans SC" pitchFamily="34" charset="-120"/>
+              </a:rPr>
+              <a:t>L1 · O'CLOCK</a:t>
+            </a:r>
+            <a:endParaRPr lang="en-US" sz="700" dirty="0"/>
+          </a:p>
+        </p:txBody>
+      </p:sp>
+      <p:sp>
+        <p:nvSpPr>
+          <p:cNvPr id="4" name="Text 2"/>
+          <p:cNvSpPr/>
+          <p:nvPr/>
+        </p:nvSpPr>
+        <p:spPr>
+          <a:xfrm>
+            <a:off x="1319808" y="165050"/>
+            <a:ext cx="12650" cy="126950"/>
+          </a:xfrm>
+          <a:prstGeom prst="rect">
+            <a:avLst/>
+          </a:prstGeom>
+          <a:solidFill>
+            <a:srgbClr val="E5DFD0"/>
+          </a:solidFill>
+          <a:ln/>
+        </p:spPr>
+        <p:txBody>
+          <a:bodyPr wrap="square" rtlCol="0" anchor="ctr"/>
+          <a:lstStyle/>
+          <a:p>
+            <a:pPr indent="0" marL="0">
+              <a:buNone/>
+            </a:pPr>
+            <a:endParaRPr lang="en-US" dirty="0"/>
+          </a:p>
+        </p:txBody>
+      </p:sp>
+      <p:sp>
+        <p:nvSpPr>
+          <p:cNvPr id="5" name="Text 3"/>
+          <p:cNvSpPr/>
+          <p:nvPr/>
+        </p:nvSpPr>
+        <p:spPr>
+          <a:xfrm>
+            <a:off x="1433959" y="166688"/>
+            <a:ext cx="323648" cy="123825"/>
+          </a:xfrm>
+          <a:prstGeom prst="rect">
+            <a:avLst/>
+          </a:prstGeom>
+          <a:noFill/>
+          <a:ln/>
+        </p:spPr>
+        <p:txBody>
+          <a:bodyPr wrap="square" lIns="0" tIns="0" rIns="0" bIns="0" rtlCol="0" anchor="t"/>
+          <a:lstStyle/>
+          <a:p>
+            <a:pPr algn="l" indent="0" marL="0">
+              <a:buNone/>
+            </a:pPr>
+            <a:r>
+              <a:rPr lang="en-US" sz="700" dirty="0">
+                <a:solidFill>
+                  <a:srgbClr val="5B6677"/>
+                </a:solidFill>
+                <a:latin typeface="Noto Sans SC" pitchFamily="34" charset="0"/>
+                <a:ea typeface="Noto Sans SC" pitchFamily="34" charset="-122"/>
+                <a:cs typeface="Noto Sans SC" pitchFamily="34" charset="-120"/>
+              </a:rPr>
+              <a:t>Plenary</a:t>
+            </a:r>
+            <a:endParaRPr lang="en-US" sz="700" dirty="0"/>
+          </a:p>
+        </p:txBody>
+      </p:sp>
+      <p:sp>
+        <p:nvSpPr>
+          <p:cNvPr id="6" name="Text 4"/>
+          <p:cNvSpPr/>
+          <p:nvPr/>
+        </p:nvSpPr>
+        <p:spPr>
+          <a:xfrm>
+            <a:off x="457200" y="0"/>
+            <a:ext cx="11277600" cy="38100"/>
+          </a:xfrm>
+          <a:prstGeom prst="rect">
+            <a:avLst/>
+          </a:prstGeom>
+          <a:solidFill>
+            <a:srgbClr val="C8943E"/>
+          </a:solidFill>
+          <a:ln/>
+        </p:spPr>
+        <p:txBody>
+          <a:bodyPr wrap="square" rtlCol="0" anchor="ctr"/>
+          <a:lstStyle/>
+          <a:p>
+            <a:pPr indent="0" marL="0">
+              <a:buNone/>
+            </a:pPr>
+            <a:endParaRPr lang="en-US" dirty="0"/>
+          </a:p>
+        </p:txBody>
+      </p:sp>
+      <p:sp>
+        <p:nvSpPr>
+          <p:cNvPr id="7" name="Text 5"/>
+          <p:cNvSpPr/>
+          <p:nvPr/>
+        </p:nvSpPr>
+        <p:spPr>
+          <a:xfrm>
+            <a:off x="711101" y="1630561"/>
+            <a:ext cx="10985194" cy="142875"/>
+          </a:xfrm>
+          <a:prstGeom prst="rect">
+            <a:avLst/>
+          </a:prstGeom>
+          <a:noFill/>
+          <a:ln/>
+        </p:spPr>
+        <p:txBody>
+          <a:bodyPr wrap="square" lIns="0" tIns="0" rIns="0" bIns="0" rtlCol="0" anchor="t"/>
+          <a:lstStyle/>
+          <a:p>
+            <a:pPr algn="l" indent="0" marL="0">
+              <a:buNone/>
+            </a:pPr>
+            <a:r>
+              <a:rPr lang="en-US" sz="800" b="1" dirty="0">
+                <a:solidFill>
+                  <a:srgbClr val="D4756B"/>
+                </a:solidFill>
+                <a:latin typeface="Noto Sans SC" pitchFamily="34" charset="0"/>
+                <a:ea typeface="Noto Sans SC" pitchFamily="34" charset="-122"/>
+                <a:cs typeface="Noto Sans SC" pitchFamily="34" charset="-120"/>
+              </a:rPr>
+              <a:t>43–50 min · Plenary</a:t>
+            </a:r>
+            <a:endParaRPr lang="en-US" sz="800" dirty="0"/>
+          </a:p>
+        </p:txBody>
+      </p:sp>
+      <p:sp>
+        <p:nvSpPr>
+          <p:cNvPr id="8" name="Text 6"/>
+          <p:cNvSpPr/>
+          <p:nvPr/>
+        </p:nvSpPr>
+        <p:spPr>
+          <a:xfrm>
+            <a:off x="711101" y="1824186"/>
+            <a:ext cx="10985194" cy="390525"/>
+          </a:xfrm>
+          <a:prstGeom prst="rect">
+            <a:avLst/>
+          </a:prstGeom>
+          <a:noFill/>
+          <a:ln/>
+        </p:spPr>
+        <p:txBody>
+          <a:bodyPr wrap="square" lIns="0" tIns="0" rIns="0" bIns="0" rtlCol="0" anchor="t"/>
+          <a:lstStyle/>
+          <a:p>
+            <a:pPr algn="l" indent="0" marL="0">
+              <a:buNone/>
+            </a:pPr>
+            <a:r>
+              <a:rPr lang="en-US" sz="2200" b="1" dirty="0">
+                <a:solidFill>
+                  <a:srgbClr val="1E2A38"/>
+                </a:solidFill>
+                <a:latin typeface="Noto Serif SC" pitchFamily="34" charset="0"/>
+                <a:ea typeface="Noto Serif SC" pitchFamily="34" charset="-122"/>
+                <a:cs typeface="Noto Serif SC" pitchFamily="34" charset="-120"/>
+              </a:rPr>
+              <a:t>Review &amp; Reflect</a:t>
+            </a:r>
+            <a:endParaRPr lang="en-US" sz="2200" dirty="0"/>
+          </a:p>
+        </p:txBody>
+      </p:sp>
+      <p:sp>
+        <p:nvSpPr>
+          <p:cNvPr id="9" name="Text 7"/>
+          <p:cNvSpPr/>
+          <p:nvPr/>
+        </p:nvSpPr>
+        <p:spPr>
+          <a:xfrm>
+            <a:off x="711101" y="2392412"/>
+            <a:ext cx="10985194" cy="123825"/>
+          </a:xfrm>
+          <a:prstGeom prst="rect">
+            <a:avLst/>
+          </a:prstGeom>
+          <a:noFill/>
+          <a:ln/>
+        </p:spPr>
+        <p:txBody>
+          <a:bodyPr wrap="square" lIns="0" tIns="0" rIns="0" bIns="0" rtlCol="0" anchor="t"/>
+          <a:lstStyle/>
+          <a:p>
+            <a:pPr algn="l" indent="0" marL="0">
+              <a:buNone/>
+            </a:pPr>
+            <a:r>
+              <a:rPr lang="en-US" sz="700" b="1" dirty="0">
+                <a:solidFill>
+                  <a:srgbClr val="8B94A3"/>
+                </a:solidFill>
+                <a:latin typeface="Noto Sans SC" pitchFamily="34" charset="0"/>
+                <a:ea typeface="Noto Sans SC" pitchFamily="34" charset="-122"/>
+                <a:cs typeface="Noto Sans SC" pitchFamily="34" charset="-120"/>
+              </a:rPr>
+              <a:t>REVISIT SUCCESS CRITERIA</a:t>
+            </a:r>
+            <a:endParaRPr lang="en-US" sz="700" dirty="0"/>
+          </a:p>
+        </p:txBody>
+      </p:sp>
+      <p:sp>
+        <p:nvSpPr>
+          <p:cNvPr id="10" name="Text 8"/>
+          <p:cNvSpPr/>
+          <p:nvPr/>
+        </p:nvSpPr>
+        <p:spPr>
+          <a:xfrm>
+            <a:off x="711101" y="2635300"/>
+            <a:ext cx="63401" cy="63401"/>
+          </a:xfrm>
+          <a:prstGeom prst="roundRect">
+            <a:avLst>
+              <a:gd name="adj" fmla="val 1442249"/>
+            </a:avLst>
+          </a:prstGeom>
+          <a:solidFill>
+            <a:srgbClr val="C8943E"/>
+          </a:solidFill>
+          <a:ln/>
+        </p:spPr>
+        <p:txBody>
+          <a:bodyPr wrap="square" rtlCol="0" anchor="ctr"/>
+          <a:lstStyle/>
+          <a:p>
+            <a:pPr indent="0" marL="0">
+              <a:buNone/>
+            </a:pPr>
+            <a:endParaRPr lang="en-US" dirty="0"/>
+          </a:p>
+        </p:txBody>
+      </p:sp>
+      <p:sp>
+        <p:nvSpPr>
+          <p:cNvPr id="11" name="Text 9"/>
+          <p:cNvSpPr/>
+          <p:nvPr/>
+        </p:nvSpPr>
+        <p:spPr>
+          <a:xfrm>
+            <a:off x="850702" y="2566988"/>
+            <a:ext cx="3423955" cy="200025"/>
+          </a:xfrm>
+          <a:prstGeom prst="rect">
+            <a:avLst/>
+          </a:prstGeom>
+          <a:noFill/>
+          <a:ln/>
+        </p:spPr>
+        <p:txBody>
+          <a:bodyPr wrap="square" lIns="0" tIns="0" rIns="0" bIns="0" rtlCol="0" anchor="t"/>
+          <a:lstStyle/>
+          <a:p>
+            <a:pPr algn="l" indent="0" marL="0">
+              <a:buNone/>
+            </a:pPr>
+            <a:r>
+              <a:rPr lang="en-US" sz="1100" dirty="0">
+                <a:solidFill>
+                  <a:srgbClr val="5B6677"/>
+                </a:solidFill>
+                <a:latin typeface="Noto Sans SC" pitchFamily="34" charset="0"/>
+                <a:ea typeface="Noto Sans SC" pitchFamily="34" charset="-122"/>
+                <a:cs typeface="Noto Sans SC" pitchFamily="34" charset="-120"/>
+              </a:rPr>
+              <a:t>I can recognise and say numbers 1–12 in Chinese</a:t>
+            </a:r>
+            <a:endParaRPr lang="en-US" sz="1100" dirty="0"/>
+          </a:p>
+        </p:txBody>
+      </p:sp>
+      <p:sp>
+        <p:nvSpPr>
+          <p:cNvPr id="12" name="Text 10"/>
+          <p:cNvSpPr/>
+          <p:nvPr/>
+        </p:nvSpPr>
+        <p:spPr>
+          <a:xfrm>
+            <a:off x="711101" y="2835325"/>
+            <a:ext cx="63401" cy="63401"/>
+          </a:xfrm>
+          <a:prstGeom prst="roundRect">
+            <a:avLst>
+              <a:gd name="adj" fmla="val 1442249"/>
+            </a:avLst>
+          </a:prstGeom>
+          <a:solidFill>
+            <a:srgbClr val="C8943E"/>
+          </a:solidFill>
+          <a:ln/>
+        </p:spPr>
+        <p:txBody>
+          <a:bodyPr wrap="square" rtlCol="0" anchor="ctr"/>
+          <a:lstStyle/>
+          <a:p>
+            <a:pPr indent="0" marL="0">
+              <a:buNone/>
+            </a:pPr>
+            <a:endParaRPr lang="en-US" dirty="0"/>
+          </a:p>
+        </p:txBody>
+      </p:sp>
+      <p:sp>
+        <p:nvSpPr>
+          <p:cNvPr id="13" name="Text 11"/>
+          <p:cNvSpPr/>
+          <p:nvPr/>
+        </p:nvSpPr>
+        <p:spPr>
+          <a:xfrm>
+            <a:off x="850702" y="2767013"/>
+            <a:ext cx="2192819" cy="200025"/>
+          </a:xfrm>
+          <a:prstGeom prst="rect">
+            <a:avLst/>
+          </a:prstGeom>
+          <a:noFill/>
+          <a:ln/>
+        </p:spPr>
+        <p:txBody>
+          <a:bodyPr wrap="square" lIns="0" tIns="0" rIns="0" bIns="0" rtlCol="0" anchor="t"/>
+          <a:lstStyle/>
+          <a:p>
+            <a:pPr algn="l" indent="0" marL="0">
+              <a:buNone/>
+            </a:pPr>
+            <a:r>
+              <a:rPr lang="en-US" sz="1100" dirty="0">
+                <a:solidFill>
+                  <a:srgbClr val="5B6677"/>
+                </a:solidFill>
+                <a:latin typeface="Noto Sans SC" pitchFamily="34" charset="0"/>
+                <a:ea typeface="Noto Sans SC" pitchFamily="34" charset="-122"/>
+                <a:cs typeface="Noto Sans SC" pitchFamily="34" charset="-120"/>
+              </a:rPr>
+              <a:t>I can say o'clock times using 点</a:t>
+            </a:r>
+            <a:endParaRPr lang="en-US" sz="1100" dirty="0"/>
+          </a:p>
+        </p:txBody>
+      </p:sp>
+      <p:sp>
+        <p:nvSpPr>
+          <p:cNvPr id="14" name="Text 12"/>
+          <p:cNvSpPr/>
+          <p:nvPr/>
+        </p:nvSpPr>
+        <p:spPr>
+          <a:xfrm>
+            <a:off x="711101" y="3035350"/>
+            <a:ext cx="63401" cy="63401"/>
+          </a:xfrm>
+          <a:prstGeom prst="roundRect">
+            <a:avLst>
+              <a:gd name="adj" fmla="val 1442249"/>
+            </a:avLst>
+          </a:prstGeom>
+          <a:solidFill>
+            <a:srgbClr val="C8943E"/>
+          </a:solidFill>
+          <a:ln/>
+        </p:spPr>
+        <p:txBody>
+          <a:bodyPr wrap="square" rtlCol="0" anchor="ctr"/>
+          <a:lstStyle/>
+          <a:p>
+            <a:pPr indent="0" marL="0">
+              <a:buNone/>
+            </a:pPr>
+            <a:endParaRPr lang="en-US" dirty="0"/>
+          </a:p>
+        </p:txBody>
+      </p:sp>
+      <p:sp>
+        <p:nvSpPr>
+          <p:cNvPr id="15" name="Text 13"/>
+          <p:cNvSpPr/>
+          <p:nvPr/>
+        </p:nvSpPr>
+        <p:spPr>
+          <a:xfrm>
+            <a:off x="850702" y="2967038"/>
+            <a:ext cx="2933474" cy="200025"/>
+          </a:xfrm>
+          <a:prstGeom prst="rect">
+            <a:avLst/>
+          </a:prstGeom>
+          <a:noFill/>
+          <a:ln/>
+        </p:spPr>
+        <p:txBody>
+          <a:bodyPr wrap="square" lIns="0" tIns="0" rIns="0" bIns="0" rtlCol="0" anchor="t"/>
+          <a:lstStyle/>
+          <a:p>
+            <a:pPr algn="l" indent="0" marL="0">
+              <a:buNone/>
+            </a:pPr>
+            <a:r>
+              <a:rPr lang="en-US" sz="1100" dirty="0">
+                <a:solidFill>
+                  <a:srgbClr val="5B6677"/>
+                </a:solidFill>
+                <a:latin typeface="Noto Sans SC" pitchFamily="34" charset="0"/>
+                <a:ea typeface="Noto Sans SC" pitchFamily="34" charset="-122"/>
+                <a:cs typeface="Noto Sans SC" pitchFamily="34" charset="-120"/>
+              </a:rPr>
+              <a:t>I can tell the difference between 两 and 二</a:t>
+            </a:r>
+            <a:endParaRPr lang="en-US" sz="1100" dirty="0"/>
+          </a:p>
+        </p:txBody>
+      </p:sp>
+      <p:sp>
+        <p:nvSpPr>
+          <p:cNvPr id="16" name="Text 14"/>
+          <p:cNvSpPr/>
+          <p:nvPr/>
+        </p:nvSpPr>
+        <p:spPr>
+          <a:xfrm>
+            <a:off x="711101" y="3370213"/>
+            <a:ext cx="10769798" cy="771525"/>
+          </a:xfrm>
+          <a:prstGeom prst="roundRect">
+            <a:avLst>
+              <a:gd name="adj" fmla="val 13169"/>
+            </a:avLst>
+          </a:prstGeom>
+          <a:solidFill>
+            <a:srgbClr val="F6F2E8"/>
+          </a:solidFill>
+          <a:ln/>
+        </p:spPr>
+        <p:txBody>
+          <a:bodyPr wrap="square" rtlCol="0" anchor="ctr"/>
+          <a:lstStyle/>
+          <a:p>
+            <a:pPr indent="0" marL="0">
+              <a:buNone/>
+            </a:pPr>
+            <a:endParaRPr lang="en-US" dirty="0"/>
+          </a:p>
+        </p:txBody>
+      </p:sp>
+      <p:sp>
+        <p:nvSpPr>
+          <p:cNvPr id="17" name="Text 15"/>
+          <p:cNvSpPr/>
+          <p:nvPr/>
+        </p:nvSpPr>
+        <p:spPr>
+          <a:xfrm>
+            <a:off x="914251" y="3522613"/>
+            <a:ext cx="10570768" cy="190500"/>
+          </a:xfrm>
+          <a:prstGeom prst="rect">
+            <a:avLst/>
+          </a:prstGeom>
+          <a:noFill/>
+          <a:ln/>
+        </p:spPr>
+        <p:txBody>
+          <a:bodyPr wrap="square" lIns="0" tIns="0" rIns="0" bIns="0" rtlCol="0" anchor="t"/>
+          <a:lstStyle/>
+          <a:p>
+            <a:pPr algn="l" indent="0" marL="0">
+              <a:buNone/>
+            </a:pPr>
+            <a:r>
+              <a:rPr lang="en-US" sz="900" b="1" dirty="0">
+                <a:solidFill>
+                  <a:srgbClr val="3A7D8C"/>
+                </a:solidFill>
+                <a:latin typeface="Noto Sans SC" pitchFamily="34" charset="0"/>
+                <a:ea typeface="Noto Sans SC" pitchFamily="34" charset="-122"/>
+                <a:cs typeface="Noto Sans SC" pitchFamily="34" charset="-120"/>
+              </a:rPr>
+              <a:t>📝 Self-Assessment</a:t>
+            </a:r>
+            <a:endParaRPr lang="en-US" sz="900" dirty="0"/>
+          </a:p>
+        </p:txBody>
+      </p:sp>
+      <p:sp>
+        <p:nvSpPr>
+          <p:cNvPr id="18" name="Text 16"/>
+          <p:cNvSpPr/>
+          <p:nvPr/>
+        </p:nvSpPr>
+        <p:spPr>
+          <a:xfrm>
+            <a:off x="914251" y="3789313"/>
+            <a:ext cx="10570768" cy="200025"/>
+          </a:xfrm>
+          <a:prstGeom prst="rect">
+            <a:avLst/>
+          </a:prstGeom>
+          <a:noFill/>
+          <a:ln/>
+        </p:spPr>
+        <p:txBody>
+          <a:bodyPr wrap="square" lIns="0" tIns="0" rIns="0" bIns="0" rtlCol="0" anchor="t"/>
+          <a:lstStyle/>
+          <a:p>
+            <a:pPr algn="l" indent="0" marL="0">
+              <a:buNone/>
+            </a:pPr>
+            <a:r>
+              <a:rPr lang="en-US" sz="1100" dirty="0">
+                <a:solidFill>
+                  <a:srgbClr val="5B6677"/>
+                </a:solidFill>
+                <a:latin typeface="Noto Sans SC" pitchFamily="34" charset="0"/>
+                <a:ea typeface="Noto Sans SC" pitchFamily="34" charset="-122"/>
+                <a:cs typeface="Noto Sans SC" pitchFamily="34" charset="-120"/>
+              </a:rPr>
+              <a:t>On your paper, write the one time you feel most confident saying, and one time you still find tricky.</a:t>
+            </a:r>
+            <a:endParaRPr lang="en-US" sz="1100" dirty="0"/>
+          </a:p>
+        </p:txBody>
+      </p:sp>
+      <p:sp>
+        <p:nvSpPr>
+          <p:cNvPr id="19" name="Text 17"/>
+          <p:cNvSpPr/>
+          <p:nvPr/>
+        </p:nvSpPr>
+        <p:spPr>
+          <a:xfrm>
+            <a:off x="711101" y="4319439"/>
+            <a:ext cx="10769798" cy="742950"/>
+          </a:xfrm>
+          <a:prstGeom prst="roundRect">
+            <a:avLst>
+              <a:gd name="adj" fmla="val 13675"/>
+            </a:avLst>
+          </a:prstGeom>
+          <a:solidFill>
+            <a:srgbClr val="C8943E">
+              <a:alpha val="12000"/>
+            </a:srgbClr>
+          </a:solidFill>
+          <a:ln w="19050">
+            <a:solidFill>
+              <a:srgbClr val="C8943E"/>
+            </a:solidFill>
+          </a:ln>
+        </p:spPr>
+        <p:txBody>
+          <a:bodyPr wrap="square" rtlCol="0" anchor="ctr"/>
+          <a:lstStyle/>
+          <a:p>
+            <a:pPr indent="0" marL="0">
+              <a:buNone/>
+            </a:pPr>
+            <a:endParaRPr lang="en-US" dirty="0"/>
+          </a:p>
+        </p:txBody>
+      </p:sp>
+      <p:sp>
+        <p:nvSpPr>
+          <p:cNvPr id="20" name="Text 18"/>
+          <p:cNvSpPr/>
+          <p:nvPr/>
+        </p:nvSpPr>
+        <p:spPr>
+          <a:xfrm>
+            <a:off x="984052" y="4490889"/>
+            <a:ext cx="2460602" cy="152400"/>
+          </a:xfrm>
+          <a:prstGeom prst="rect">
+            <a:avLst/>
+          </a:prstGeom>
+          <a:noFill/>
+          <a:ln/>
+        </p:spPr>
+        <p:txBody>
+          <a:bodyPr wrap="square" lIns="0" tIns="0" rIns="0" bIns="0" rtlCol="0" anchor="t"/>
+          <a:lstStyle/>
+          <a:p>
+            <a:pPr algn="l" indent="0" marL="0">
+              <a:buNone/>
+            </a:pPr>
+            <a:r>
+              <a:rPr lang="en-US" sz="700" b="1" dirty="0">
+                <a:solidFill>
+                  <a:srgbClr val="C8943E"/>
+                </a:solidFill>
+                <a:latin typeface="Noto Sans SC" pitchFamily="34" charset="0"/>
+                <a:ea typeface="Noto Sans SC" pitchFamily="34" charset="-122"/>
+                <a:cs typeface="Noto Sans SC" pitchFamily="34" charset="-120"/>
+              </a:rPr>
+              <a:t>🚪 Exit Ticket</a:t>
+            </a:r>
+            <a:endParaRPr lang="en-US" sz="700" dirty="0"/>
+          </a:p>
+        </p:txBody>
+      </p:sp>
+      <p:sp>
+        <p:nvSpPr>
+          <p:cNvPr id="21" name="Text 19"/>
+          <p:cNvSpPr/>
+          <p:nvPr/>
+        </p:nvSpPr>
+        <p:spPr>
+          <a:xfrm>
+            <a:off x="984052" y="4643289"/>
+            <a:ext cx="2460602" cy="247650"/>
+          </a:xfrm>
+          <a:prstGeom prst="rect">
+            <a:avLst/>
+          </a:prstGeom>
+          <a:noFill/>
+          <a:ln/>
+        </p:spPr>
+        <p:txBody>
+          <a:bodyPr wrap="square" lIns="0" tIns="0" rIns="0" bIns="0" rtlCol="0" anchor="t"/>
+          <a:lstStyle/>
+          <a:p>
+            <a:pPr algn="l" indent="0" marL="0">
+              <a:buNone/>
+            </a:pPr>
+            <a:r>
+              <a:rPr lang="en-US" sz="1400" b="1" dirty="0">
+                <a:solidFill>
+                  <a:srgbClr val="1E2A38"/>
+                </a:solidFill>
+                <a:latin typeface="Noto Sans SC" pitchFamily="34" charset="0"/>
+                <a:ea typeface="Noto Sans SC" pitchFamily="34" charset="-122"/>
+                <a:cs typeface="Noto Sans SC" pitchFamily="34" charset="-120"/>
+              </a:rPr>
+              <a:t>Write 2 o'clock in Chinese.</a:t>
+            </a:r>
+            <a:endParaRPr lang="en-US" sz="1400" dirty="0"/>
+          </a:p>
+        </p:txBody>
+      </p:sp>
+      <p:sp>
+        <p:nvSpPr>
+          <p:cNvPr id="22" name="Text 20"/>
+          <p:cNvSpPr/>
+          <p:nvPr/>
+        </p:nvSpPr>
+        <p:spPr>
+          <a:xfrm>
+            <a:off x="711101" y="5189339"/>
+            <a:ext cx="1271516" cy="190500"/>
+          </a:xfrm>
+          <a:prstGeom prst="rect">
+            <a:avLst/>
+          </a:prstGeom>
+          <a:noFill/>
+          <a:ln/>
+        </p:spPr>
+        <p:txBody>
+          <a:bodyPr wrap="square" lIns="0" tIns="0" rIns="0" bIns="0" rtlCol="0" anchor="t"/>
+          <a:lstStyle/>
+          <a:p>
+            <a:pPr algn="l" indent="0" marL="0">
+              <a:buNone/>
+            </a:pPr>
+            <a:r>
+              <a:rPr lang="en-US" sz="900" dirty="0">
+                <a:solidFill>
+                  <a:srgbClr val="8B94A3"/>
+                </a:solidFill>
+                <a:latin typeface="Noto Sans SC" pitchFamily="34" charset="0"/>
+                <a:ea typeface="Noto Sans SC" pitchFamily="34" charset="-122"/>
+                <a:cs typeface="Noto Sans SC" pitchFamily="34" charset="-120"/>
+              </a:rPr>
+              <a:t>☝️ 1 finger = Achieved</a:t>
+            </a:r>
+            <a:endParaRPr lang="en-US" sz="900" dirty="0"/>
+          </a:p>
+        </p:txBody>
+      </p:sp>
+      <p:sp>
+        <p:nvSpPr>
+          <p:cNvPr id="23" name="Text 21"/>
+          <p:cNvSpPr/>
+          <p:nvPr/>
+        </p:nvSpPr>
+        <p:spPr>
+          <a:xfrm>
+            <a:off x="2186285" y="5189339"/>
+            <a:ext cx="1594708" cy="190500"/>
+          </a:xfrm>
+          <a:prstGeom prst="rect">
+            <a:avLst/>
+          </a:prstGeom>
+          <a:noFill/>
+          <a:ln/>
+        </p:spPr>
+        <p:txBody>
+          <a:bodyPr wrap="square" lIns="0" tIns="0" rIns="0" bIns="0" rtlCol="0" anchor="t"/>
+          <a:lstStyle/>
+          <a:p>
+            <a:pPr algn="l" indent="0" marL="0">
+              <a:buNone/>
+            </a:pPr>
+            <a:r>
+              <a:rPr lang="en-US" sz="900" dirty="0">
+                <a:solidFill>
+                  <a:srgbClr val="8B94A3"/>
+                </a:solidFill>
+                <a:latin typeface="Noto Sans SC" pitchFamily="34" charset="0"/>
+                <a:ea typeface="Noto Sans SC" pitchFamily="34" charset="-122"/>
+                <a:cs typeface="Noto Sans SC" pitchFamily="34" charset="-120"/>
+              </a:rPr>
+              <a:t>✌️ 2 fingers = Getting there</a:t>
+            </a:r>
+            <a:endParaRPr lang="en-US" sz="900" dirty="0"/>
+          </a:p>
+        </p:txBody>
+      </p:sp>
+      <p:sp>
+        <p:nvSpPr>
+          <p:cNvPr id="24" name="Text 22"/>
+          <p:cNvSpPr/>
+          <p:nvPr/>
+        </p:nvSpPr>
+        <p:spPr>
+          <a:xfrm>
+            <a:off x="3978325" y="5189339"/>
+            <a:ext cx="1118193" cy="190500"/>
+          </a:xfrm>
+          <a:prstGeom prst="rect">
+            <a:avLst/>
+          </a:prstGeom>
+          <a:noFill/>
+          <a:ln/>
+        </p:spPr>
+        <p:txBody>
+          <a:bodyPr wrap="square" lIns="0" tIns="0" rIns="0" bIns="0" rtlCol="0" anchor="t"/>
+          <a:lstStyle/>
+          <a:p>
+            <a:pPr algn="l" indent="0" marL="0">
+              <a:buNone/>
+            </a:pPr>
+            <a:r>
+              <a:rPr lang="en-US" sz="900" dirty="0">
+                <a:solidFill>
+                  <a:srgbClr val="8B94A3"/>
+                </a:solidFill>
+                <a:latin typeface="Noto Sans SC" pitchFamily="34" charset="0"/>
+                <a:ea typeface="Noto Sans SC" pitchFamily="34" charset="-122"/>
+                <a:cs typeface="Noto Sans SC" pitchFamily="34" charset="-120"/>
+              </a:rPr>
+              <a:t>✊ Fist = Need help</a:t>
+            </a:r>
+            <a:endParaRPr lang="en-US" sz="900" dirty="0"/>
+          </a:p>
+        </p:txBody>
+      </p:sp>
+      <p:sp>
+        <p:nvSpPr>
+          <p:cNvPr id="25" name="Shape 23"/>
+          <p:cNvSpPr/>
+          <p:nvPr/>
+        </p:nvSpPr>
+        <p:spPr>
+          <a:xfrm>
+            <a:off x="0" y="6548438"/>
+            <a:ext cx="12192000" cy="0"/>
+          </a:xfrm>
+          <a:prstGeom prst="line">
+            <a:avLst/>
+          </a:prstGeom>
+          <a:noFill/>
+          <a:ln w="9525">
+            <a:solidFill>
+              <a:srgbClr val="E5DFD0"/>
+            </a:solidFill>
+            <a:prstDash val="solid"/>
+          </a:ln>
+        </p:spPr>
+      </p:sp>
+      <p:sp>
+        <p:nvSpPr>
+          <p:cNvPr id="26" name="Text 24"/>
+          <p:cNvSpPr/>
+          <p:nvPr/>
+        </p:nvSpPr>
+        <p:spPr>
+          <a:xfrm>
+            <a:off x="457200" y="6653213"/>
+            <a:ext cx="1295046" cy="104775"/>
+          </a:xfrm>
+          <a:prstGeom prst="rect">
+            <a:avLst/>
+          </a:prstGeom>
+          <a:noFill/>
+          <a:ln/>
+        </p:spPr>
+        <p:txBody>
+          <a:bodyPr wrap="square" lIns="0" tIns="0" rIns="0" bIns="0" rtlCol="0" anchor="t"/>
+          <a:lstStyle/>
+          <a:p>
+            <a:pPr algn="l" indent="0" marL="0">
+              <a:buNone/>
+            </a:pPr>
+            <a:r>
+              <a:rPr lang="en-US" sz="600" dirty="0">
+                <a:solidFill>
+                  <a:srgbClr val="8B94A3"/>
+                </a:solidFill>
+                <a:latin typeface="Noto Sans SC" pitchFamily="34" charset="0"/>
+                <a:ea typeface="Noto Sans SC" pitchFamily="34" charset="-122"/>
+                <a:cs typeface="Noto Sans SC" pitchFamily="34" charset="-120"/>
+              </a:rPr>
+              <a:t>Y7 Chinese · Unit 4.1 Telling Time</a:t>
+            </a:r>
+            <a:endParaRPr lang="en-US" sz="600" dirty="0"/>
+          </a:p>
+        </p:txBody>
+      </p:sp>
+    </p:spTree>
+  </p:cSld>
+  <p:clrMapOvr>
+    <a:masterClrMapping/>
+  </p:clrMapOvr>
+</p:sld>
+</file>
+
+<file path=ppt/slides/slide13.xml><?xml version="1.0" encoding="utf-8"?>
+<p:sld xmlns:a="http://schemas.openxmlformats.org/drawingml/2006/main" xmlns:r="http://schemas.openxmlformats.org/officeDocument/2006/relationships" xmlns:p="http://schemas.openxmlformats.org/presentationml/2006/main">
+  <p:cSld name="Slide 13">
+    <p:bg>
+      <p:bgPr>
+        <a:solidFill>
+          <a:srgbClr val="FEFCF7"/>
+        </a:solidFill>
+      </p:bgPr>
+    </p:bg>
+    <p:spTree>
+      <p:nvGrpSpPr>
+        <p:cNvPr id="1" name=""/>
+        <p:cNvGrpSpPr/>
+        <p:nvPr/>
+      </p:nvGrpSpPr>
+      <p:grpSpPr>
+        <a:xfrm>
+          <a:off x="0" y="0"/>
+          <a:ext cx="0" cy="0"/>
+          <a:chOff x="0" y="0"/>
+          <a:chExt cx="0" cy="0"/>
+        </a:xfrm>
+      </p:grpSpPr>
+      <p:sp>
+        <p:nvSpPr>
           <p:cNvPr id="2" name="Text 0"/>
           <p:cNvSpPr/>
           <p:nvPr/>
@@ -5051,70 +6256,40 @@
         </p:nvSpPr>
         <p:spPr>
           <a:xfrm>
-            <a:off x="1319808" y="165050"/>
-            <a:ext cx="12650" cy="126950"/>
-          </a:xfrm>
-          <a:prstGeom prst="rect">
-            <a:avLst/>
-          </a:prstGeom>
-          <a:solidFill>
-            <a:srgbClr val="E5DFD0"/>
-          </a:solidFill>
-          <a:ln/>
-        </p:spPr>
-        <p:txBody>
-          <a:bodyPr wrap="square" rtlCol="0" anchor="ctr"/>
-          <a:lstStyle/>
-          <a:p>
-            <a:pPr indent="0" marL="0">
-              <a:buNone/>
-            </a:pPr>
-            <a:endParaRPr lang="en-US" dirty="0"/>
+            <a:off x="1218307" y="166688"/>
+            <a:ext cx="1028932" cy="123825"/>
+          </a:xfrm>
+          <a:prstGeom prst="rect">
+            <a:avLst/>
+          </a:prstGeom>
+          <a:noFill/>
+          <a:ln/>
+        </p:spPr>
+        <p:txBody>
+          <a:bodyPr wrap="square" lIns="0" tIns="0" rIns="0" bIns="0" rtlCol="0" anchor="t"/>
+          <a:lstStyle/>
+          <a:p>
+            <a:pPr algn="l" indent="0" marL="0">
+              <a:buNone/>
+            </a:pPr>
+            <a:r>
+              <a:rPr lang="en-US" sz="700" dirty="0">
+                <a:solidFill>
+                  <a:srgbClr val="5B6677"/>
+                </a:solidFill>
+                <a:latin typeface="Noto Sans SC" pitchFamily="34" charset="0"/>
+                <a:ea typeface="Noto Sans SC" pitchFamily="34" charset="-122"/>
+                <a:cs typeface="Noto Sans SC" pitchFamily="34" charset="-120"/>
+              </a:rPr>
+              <a:t>Review · Textbook p84</a:t>
+            </a:r>
+            <a:endParaRPr lang="en-US" sz="700" dirty="0"/>
           </a:p>
         </p:txBody>
       </p:sp>
       <p:sp>
         <p:nvSpPr>
           <p:cNvPr id="5" name="Text 3"/>
-          <p:cNvSpPr/>
-          <p:nvPr/>
-        </p:nvSpPr>
-        <p:spPr>
-          <a:xfrm>
-            <a:off x="1433959" y="166688"/>
-            <a:ext cx="1028932" cy="123825"/>
-          </a:xfrm>
-          <a:prstGeom prst="rect">
-            <a:avLst/>
-          </a:prstGeom>
-          <a:noFill/>
-          <a:ln/>
-        </p:spPr>
-        <p:txBody>
-          <a:bodyPr wrap="square" lIns="0" tIns="0" rIns="0" bIns="0" rtlCol="0" anchor="t"/>
-          <a:lstStyle/>
-          <a:p>
-            <a:pPr algn="l" indent="0" marL="0">
-              <a:buNone/>
-            </a:pPr>
-            <a:r>
-              <a:rPr lang="en-US" sz="700" dirty="0">
-                <a:solidFill>
-                  <a:srgbClr val="5B6677"/>
-                </a:solidFill>
-                <a:latin typeface="Noto Sans SC" pitchFamily="34" charset="0"/>
-                <a:ea typeface="Noto Sans SC" pitchFamily="34" charset="-122"/>
-                <a:cs typeface="Noto Sans SC" pitchFamily="34" charset="-120"/>
-              </a:rPr>
-              <a:t>Review · Textbook p84</a:t>
-            </a:r>
-            <a:endParaRPr lang="en-US" sz="700" dirty="0"/>
-          </a:p>
-        </p:txBody>
-      </p:sp>
-      <p:sp>
-        <p:nvSpPr>
-          <p:cNvPr id="6" name="Text 4"/>
           <p:cNvSpPr/>
           <p:nvPr/>
         </p:nvSpPr>
@@ -5144,7 +6319,7 @@
       </p:sp>
       <p:sp>
         <p:nvSpPr>
-          <p:cNvPr id="7" name="Text 5"/>
+          <p:cNvPr id="6" name="Text 4"/>
           <p:cNvSpPr/>
           <p:nvPr/>
         </p:nvSpPr>
@@ -5183,7 +6358,7 @@
       </p:sp>
       <p:sp>
         <p:nvSpPr>
-          <p:cNvPr id="8" name="Text 6"/>
+          <p:cNvPr id="7" name="Text 5"/>
           <p:cNvSpPr/>
           <p:nvPr/>
         </p:nvSpPr>
@@ -5222,7 +6397,7 @@
       </p:sp>
       <p:sp>
         <p:nvSpPr>
-          <p:cNvPr id="9" name="Text 7"/>
+          <p:cNvPr id="8" name="Text 6"/>
           <p:cNvSpPr/>
           <p:nvPr/>
         </p:nvSpPr>
@@ -5261,7 +6436,7 @@
       </p:sp>
       <p:sp>
         <p:nvSpPr>
-          <p:cNvPr id="10" name="Text 8"/>
+          <p:cNvPr id="9" name="Text 7"/>
           <p:cNvSpPr/>
           <p:nvPr/>
         </p:nvSpPr>
@@ -5293,7 +6468,7 @@
       </p:sp>
       <p:sp>
         <p:nvSpPr>
-          <p:cNvPr id="11" name="Text 9"/>
+          <p:cNvPr id="10" name="Text 8"/>
           <p:cNvSpPr/>
           <p:nvPr/>
         </p:nvSpPr>
@@ -5325,7 +6500,7 @@
       </p:sp>
       <p:sp>
         <p:nvSpPr>
-          <p:cNvPr id="12" name="Text 10"/>
+          <p:cNvPr id="11" name="Text 9"/>
           <p:cNvSpPr/>
           <p:nvPr/>
         </p:nvSpPr>
@@ -5364,7 +6539,7 @@
       </p:sp>
       <p:sp>
         <p:nvSpPr>
-          <p:cNvPr id="13" name="Text 11"/>
+          <p:cNvPr id="12" name="Text 10"/>
           <p:cNvSpPr/>
           <p:nvPr/>
         </p:nvSpPr>
@@ -5403,7 +6578,7 @@
       </p:sp>
       <p:sp>
         <p:nvSpPr>
-          <p:cNvPr id="14" name="Text 12"/>
+          <p:cNvPr id="13" name="Text 11"/>
           <p:cNvSpPr/>
           <p:nvPr/>
         </p:nvSpPr>
@@ -5442,7 +6617,7 @@
       </p:sp>
       <p:sp>
         <p:nvSpPr>
-          <p:cNvPr id="15" name="Text 13"/>
+          <p:cNvPr id="14" name="Text 12"/>
           <p:cNvSpPr/>
           <p:nvPr/>
         </p:nvSpPr>
@@ -5474,7 +6649,7 @@
       </p:sp>
       <p:sp>
         <p:nvSpPr>
-          <p:cNvPr id="16" name="Text 14"/>
+          <p:cNvPr id="15" name="Text 13"/>
           <p:cNvSpPr/>
           <p:nvPr/>
         </p:nvSpPr>
@@ -5506,7 +6681,7 @@
       </p:sp>
       <p:sp>
         <p:nvSpPr>
-          <p:cNvPr id="17" name="Text 15"/>
+          <p:cNvPr id="16" name="Text 14"/>
           <p:cNvSpPr/>
           <p:nvPr/>
         </p:nvSpPr>
@@ -5545,7 +6720,7 @@
       </p:sp>
       <p:sp>
         <p:nvSpPr>
-          <p:cNvPr id="18" name="Text 16"/>
+          <p:cNvPr id="17" name="Text 15"/>
           <p:cNvSpPr/>
           <p:nvPr/>
         </p:nvSpPr>
@@ -5584,7 +6759,7 @@
       </p:sp>
       <p:sp>
         <p:nvSpPr>
-          <p:cNvPr id="19" name="Text 17"/>
+          <p:cNvPr id="18" name="Text 16"/>
           <p:cNvSpPr/>
           <p:nvPr/>
         </p:nvSpPr>
@@ -5623,7 +6798,7 @@
       </p:sp>
       <p:sp>
         <p:nvSpPr>
-          <p:cNvPr id="20" name="Text 18"/>
+          <p:cNvPr id="19" name="Text 17"/>
           <p:cNvSpPr/>
           <p:nvPr/>
         </p:nvSpPr>
@@ -5655,7 +6830,7 @@
       </p:sp>
       <p:sp>
         <p:nvSpPr>
-          <p:cNvPr id="21" name="Text 19"/>
+          <p:cNvPr id="20" name="Text 18"/>
           <p:cNvSpPr/>
           <p:nvPr/>
         </p:nvSpPr>
@@ -5687,7 +6862,7 @@
       </p:sp>
       <p:sp>
         <p:nvSpPr>
-          <p:cNvPr id="22" name="Text 20"/>
+          <p:cNvPr id="21" name="Text 19"/>
           <p:cNvSpPr/>
           <p:nvPr/>
         </p:nvSpPr>
@@ -5726,7 +6901,7 @@
       </p:sp>
       <p:sp>
         <p:nvSpPr>
-          <p:cNvPr id="23" name="Text 21"/>
+          <p:cNvPr id="22" name="Text 20"/>
           <p:cNvSpPr/>
           <p:nvPr/>
         </p:nvSpPr>
@@ -5765,7 +6940,7 @@
       </p:sp>
       <p:sp>
         <p:nvSpPr>
-          <p:cNvPr id="24" name="Text 22"/>
+          <p:cNvPr id="23" name="Text 21"/>
           <p:cNvSpPr/>
           <p:nvPr/>
         </p:nvSpPr>
@@ -5804,7 +6979,7 @@
       </p:sp>
       <p:sp>
         <p:nvSpPr>
-          <p:cNvPr id="25" name="Text 23"/>
+          <p:cNvPr id="24" name="Text 22"/>
           <p:cNvSpPr/>
           <p:nvPr/>
         </p:nvSpPr>
@@ -5836,7 +7011,7 @@
       </p:sp>
       <p:sp>
         <p:nvSpPr>
-          <p:cNvPr id="26" name="Text 24"/>
+          <p:cNvPr id="25" name="Text 23"/>
           <p:cNvSpPr/>
           <p:nvPr/>
         </p:nvSpPr>
@@ -5868,7 +7043,7 @@
       </p:sp>
       <p:sp>
         <p:nvSpPr>
-          <p:cNvPr id="27" name="Text 25"/>
+          <p:cNvPr id="26" name="Text 24"/>
           <p:cNvSpPr/>
           <p:nvPr/>
         </p:nvSpPr>
@@ -5907,7 +7082,7 @@
       </p:sp>
       <p:sp>
         <p:nvSpPr>
-          <p:cNvPr id="28" name="Text 26"/>
+          <p:cNvPr id="27" name="Text 25"/>
           <p:cNvSpPr/>
           <p:nvPr/>
         </p:nvSpPr>
@@ -5946,7 +7121,7 @@
       </p:sp>
       <p:sp>
         <p:nvSpPr>
-          <p:cNvPr id="29" name="Text 27"/>
+          <p:cNvPr id="28" name="Text 26"/>
           <p:cNvSpPr/>
           <p:nvPr/>
         </p:nvSpPr>
@@ -5985,7 +7160,7 @@
       </p:sp>
       <p:sp>
         <p:nvSpPr>
-          <p:cNvPr id="30" name="Text 28"/>
+          <p:cNvPr id="29" name="Text 27"/>
           <p:cNvSpPr/>
           <p:nvPr/>
         </p:nvSpPr>
@@ -6017,7 +7192,7 @@
       </p:sp>
       <p:sp>
         <p:nvSpPr>
-          <p:cNvPr id="31" name="Text 29"/>
+          <p:cNvPr id="30" name="Text 28"/>
           <p:cNvSpPr/>
           <p:nvPr/>
         </p:nvSpPr>
@@ -6049,7 +7224,7 @@
       </p:sp>
       <p:sp>
         <p:nvSpPr>
-          <p:cNvPr id="32" name="Text 30"/>
+          <p:cNvPr id="31" name="Text 29"/>
           <p:cNvSpPr/>
           <p:nvPr/>
         </p:nvSpPr>
@@ -6088,7 +7263,7 @@
       </p:sp>
       <p:sp>
         <p:nvSpPr>
-          <p:cNvPr id="33" name="Text 31"/>
+          <p:cNvPr id="32" name="Text 30"/>
           <p:cNvSpPr/>
           <p:nvPr/>
         </p:nvSpPr>
@@ -6127,7 +7302,7 @@
       </p:sp>
       <p:sp>
         <p:nvSpPr>
-          <p:cNvPr id="34" name="Text 32"/>
+          <p:cNvPr id="33" name="Text 31"/>
           <p:cNvSpPr/>
           <p:nvPr/>
         </p:nvSpPr>
@@ -6166,7 +7341,7 @@
       </p:sp>
       <p:sp>
         <p:nvSpPr>
-          <p:cNvPr id="35" name="Text 33"/>
+          <p:cNvPr id="34" name="Text 32"/>
           <p:cNvSpPr/>
           <p:nvPr/>
         </p:nvSpPr>
@@ -6198,7 +7373,7 @@
       </p:sp>
       <p:sp>
         <p:nvSpPr>
-          <p:cNvPr id="36" name="Text 34"/>
+          <p:cNvPr id="35" name="Text 33"/>
           <p:cNvSpPr/>
           <p:nvPr/>
         </p:nvSpPr>
@@ -6230,7 +7405,7 @@
       </p:sp>
       <p:sp>
         <p:nvSpPr>
-          <p:cNvPr id="37" name="Text 35"/>
+          <p:cNvPr id="36" name="Text 34"/>
           <p:cNvSpPr/>
           <p:nvPr/>
         </p:nvSpPr>
@@ -6269,7 +7444,7 @@
       </p:sp>
       <p:sp>
         <p:nvSpPr>
-          <p:cNvPr id="38" name="Text 36"/>
+          <p:cNvPr id="37" name="Text 35"/>
           <p:cNvSpPr/>
           <p:nvPr/>
         </p:nvSpPr>
@@ -6308,7 +7483,7 @@
       </p:sp>
       <p:sp>
         <p:nvSpPr>
-          <p:cNvPr id="39" name="Text 37"/>
+          <p:cNvPr id="38" name="Text 36"/>
           <p:cNvSpPr/>
           <p:nvPr/>
         </p:nvSpPr>
@@ -6347,7 +7522,7 @@
       </p:sp>
       <p:sp>
         <p:nvSpPr>
-          <p:cNvPr id="40" name="Text 38"/>
+          <p:cNvPr id="39" name="Text 37"/>
           <p:cNvSpPr/>
           <p:nvPr/>
         </p:nvSpPr>
@@ -6379,7 +7554,7 @@
       </p:sp>
       <p:sp>
         <p:nvSpPr>
-          <p:cNvPr id="41" name="Text 39"/>
+          <p:cNvPr id="40" name="Text 38"/>
           <p:cNvSpPr/>
           <p:nvPr/>
         </p:nvSpPr>
@@ -6411,7 +7586,7 @@
       </p:sp>
       <p:sp>
         <p:nvSpPr>
-          <p:cNvPr id="42" name="Text 40"/>
+          <p:cNvPr id="41" name="Text 39"/>
           <p:cNvSpPr/>
           <p:nvPr/>
         </p:nvSpPr>
@@ -6450,7 +7625,7 @@
       </p:sp>
       <p:sp>
         <p:nvSpPr>
-          <p:cNvPr id="43" name="Text 41"/>
+          <p:cNvPr id="42" name="Text 40"/>
           <p:cNvSpPr/>
           <p:nvPr/>
         </p:nvSpPr>
@@ -6489,7 +7664,7 @@
       </p:sp>
       <p:sp>
         <p:nvSpPr>
-          <p:cNvPr id="44" name="Text 42"/>
+          <p:cNvPr id="43" name="Text 41"/>
           <p:cNvSpPr/>
           <p:nvPr/>
         </p:nvSpPr>
@@ -6528,7 +7703,7 @@
       </p:sp>
       <p:sp>
         <p:nvSpPr>
-          <p:cNvPr id="45" name="Shape 43"/>
+          <p:cNvPr id="44" name="Shape 42"/>
           <p:cNvSpPr/>
           <p:nvPr/>
         </p:nvSpPr>
@@ -6551,7 +7726,7 @@
       </p:sp>
       <p:sp>
         <p:nvSpPr>
-          <p:cNvPr id="46" name="Text 44"/>
+          <p:cNvPr id="45" name="Text 43"/>
           <p:cNvSpPr/>
           <p:nvPr/>
         </p:nvSpPr>
@@ -10734,7 +11909,7 @@
         <p:spPr>
           <a:xfrm>
             <a:off x="1320552" y="2452836"/>
-            <a:ext cx="9367867" cy="209550"/>
+            <a:ext cx="10182299" cy="209550"/>
           </a:xfrm>
           <a:prstGeom prst="rect">
             <a:avLst/>
@@ -10767,45 +11942,6 @@
       <p:sp>
         <p:nvSpPr>
           <p:cNvPr id="12" name="Text 10"/>
-          <p:cNvSpPr/>
-          <p:nvPr/>
-        </p:nvSpPr>
-        <p:spPr>
-          <a:xfrm>
-            <a:off x="10618256" y="2452836"/>
-            <a:ext cx="684943" cy="209550"/>
-          </a:xfrm>
-          <a:prstGeom prst="rect">
-            <a:avLst/>
-          </a:prstGeom>
-          <a:noFill/>
-          <a:ln/>
-        </p:spPr>
-        <p:txBody>
-          <a:bodyPr wrap="square" lIns="0" tIns="0" rIns="0" bIns="0" rtlCol="0" anchor="t"/>
-          <a:lstStyle/>
-          <a:p>
-            <a:pPr algn="r" indent="0" marL="0">
-              <a:buNone/>
-            </a:pPr>
-            <a:r>
-              <a:rPr lang="en-US" sz="1000" dirty="0">
-                <a:solidFill>
-                  <a:srgbClr val="3A7D8C"/>
-                </a:solidFill>
-                <a:latin typeface="Noto Sans SC" pitchFamily="34" charset="0"/>
-                <a:ea typeface="Noto Sans SC" pitchFamily="34" charset="-122"/>
-                <a:cs typeface="Noto Sans SC" pitchFamily="34" charset="-120"/>
-              </a:rPr>
-              <a:t>✅ 1 finger</a:t>
-            </a:r>
-            <a:endParaRPr lang="en-US" sz="1000" dirty="0"/>
-          </a:p>
-        </p:txBody>
-      </p:sp>
-      <p:sp>
-        <p:nvSpPr>
-          <p:cNvPr id="13" name="Text 11"/>
           <p:cNvSpPr/>
           <p:nvPr/>
         </p:nvSpPr>
@@ -10837,7 +11973,7 @@
       </p:sp>
       <p:sp>
         <p:nvSpPr>
-          <p:cNvPr id="14" name="Text 12"/>
+          <p:cNvPr id="13" name="Text 11"/>
           <p:cNvSpPr/>
           <p:nvPr/>
         </p:nvSpPr>
@@ -10878,85 +12014,46 @@
       </p:sp>
       <p:sp>
         <p:nvSpPr>
+          <p:cNvPr id="14" name="Text 12"/>
+          <p:cNvSpPr/>
+          <p:nvPr/>
+        </p:nvSpPr>
+        <p:spPr>
+          <a:xfrm>
+            <a:off x="1320552" y="3224213"/>
+            <a:ext cx="10182299" cy="209550"/>
+          </a:xfrm>
+          <a:prstGeom prst="rect">
+            <a:avLst/>
+          </a:prstGeom>
+          <a:noFill/>
+          <a:ln/>
+        </p:spPr>
+        <p:txBody>
+          <a:bodyPr wrap="square" lIns="0" tIns="0" rIns="0" bIns="0" rtlCol="0" anchor="t"/>
+          <a:lstStyle/>
+          <a:p>
+            <a:pPr algn="l" indent="0" marL="0">
+              <a:buNone/>
+            </a:pPr>
+            <a:r>
+              <a:rPr lang="en-US" sz="1200" dirty="0">
+                <a:solidFill>
+                  <a:srgbClr val="1E2A38"/>
+                </a:solidFill>
+                <a:latin typeface="Noto Sans SC" pitchFamily="34" charset="0"/>
+                <a:ea typeface="Noto Sans SC" pitchFamily="34" charset="-122"/>
+                <a:cs typeface="Noto Sans SC" pitchFamily="34" charset="-120"/>
+              </a:rPr>
+              <a:t>「二点」is correct — 1 finger = yes, 2 fingers = no.</a:t>
+            </a:r>
+            <a:endParaRPr lang="en-US" sz="1200" dirty="0"/>
+          </a:p>
+        </p:txBody>
+      </p:sp>
+      <p:sp>
+        <p:nvSpPr>
           <p:cNvPr id="15" name="Text 13"/>
-          <p:cNvSpPr/>
-          <p:nvPr/>
-        </p:nvSpPr>
-        <p:spPr>
-          <a:xfrm>
-            <a:off x="1320552" y="3224213"/>
-            <a:ext cx="8112746" cy="209550"/>
-          </a:xfrm>
-          <a:prstGeom prst="rect">
-            <a:avLst/>
-          </a:prstGeom>
-          <a:noFill/>
-          <a:ln/>
-        </p:spPr>
-        <p:txBody>
-          <a:bodyPr wrap="square" lIns="0" tIns="0" rIns="0" bIns="0" rtlCol="0" anchor="t"/>
-          <a:lstStyle/>
-          <a:p>
-            <a:pPr algn="l" indent="0" marL="0">
-              <a:buNone/>
-            </a:pPr>
-            <a:r>
-              <a:rPr lang="en-US" sz="1200" dirty="0">
-                <a:solidFill>
-                  <a:srgbClr val="1E2A38"/>
-                </a:solidFill>
-                <a:latin typeface="Noto Sans SC" pitchFamily="34" charset="0"/>
-                <a:ea typeface="Noto Sans SC" pitchFamily="34" charset="-122"/>
-                <a:cs typeface="Noto Sans SC" pitchFamily="34" charset="-120"/>
-              </a:rPr>
-              <a:t>「二点」is correct — 1 finger = yes, 2 fingers = no.</a:t>
-            </a:r>
-            <a:endParaRPr lang="en-US" sz="1200" dirty="0"/>
-          </a:p>
-        </p:txBody>
-      </p:sp>
-      <p:sp>
-        <p:nvSpPr>
-          <p:cNvPr id="16" name="Text 14"/>
-          <p:cNvSpPr/>
-          <p:nvPr/>
-        </p:nvSpPr>
-        <p:spPr>
-          <a:xfrm>
-            <a:off x="9363135" y="3224213"/>
-            <a:ext cx="1940064" cy="209550"/>
-          </a:xfrm>
-          <a:prstGeom prst="rect">
-            <a:avLst/>
-          </a:prstGeom>
-          <a:noFill/>
-          <a:ln/>
-        </p:spPr>
-        <p:txBody>
-          <a:bodyPr wrap="square" lIns="0" tIns="0" rIns="0" bIns="0" rtlCol="0" anchor="t"/>
-          <a:lstStyle/>
-          <a:p>
-            <a:pPr algn="r" indent="0" marL="0">
-              <a:buNone/>
-            </a:pPr>
-            <a:r>
-              <a:rPr lang="en-US" sz="1000" dirty="0">
-                <a:solidFill>
-                  <a:srgbClr val="3A7D8C"/>
-                </a:solidFill>
-                <a:latin typeface="Noto Sans SC" pitchFamily="34" charset="0"/>
-                <a:ea typeface="Noto Sans SC" pitchFamily="34" charset="-122"/>
-                <a:cs typeface="Noto Sans SC" pitchFamily="34" charset="-120"/>
-              </a:rPr>
-              <a:t>❌ 2 fingers — must use 两点!</a:t>
-            </a:r>
-            <a:endParaRPr lang="en-US" sz="1000" dirty="0"/>
-          </a:p>
-        </p:txBody>
-      </p:sp>
-      <p:sp>
-        <p:nvSpPr>
-          <p:cNvPr id="17" name="Text 15"/>
           <p:cNvSpPr/>
           <p:nvPr/>
         </p:nvSpPr>
@@ -10988,7 +12085,7 @@
       </p:sp>
       <p:sp>
         <p:nvSpPr>
-          <p:cNvPr id="18" name="Text 16"/>
+          <p:cNvPr id="16" name="Text 14"/>
           <p:cNvSpPr/>
           <p:nvPr/>
         </p:nvSpPr>
@@ -11029,14 +12126,14 @@
       </p:sp>
       <p:sp>
         <p:nvSpPr>
-          <p:cNvPr id="19" name="Text 17"/>
+          <p:cNvPr id="17" name="Text 15"/>
           <p:cNvSpPr/>
           <p:nvPr/>
         </p:nvSpPr>
         <p:spPr>
           <a:xfrm>
             <a:off x="1320552" y="3995589"/>
-            <a:ext cx="9367867" cy="209550"/>
+            <a:ext cx="10182299" cy="209550"/>
           </a:xfrm>
           <a:prstGeom prst="rect">
             <a:avLst/>
@@ -11068,46 +12165,7 @@
       </p:sp>
       <p:sp>
         <p:nvSpPr>
-          <p:cNvPr id="20" name="Text 18"/>
-          <p:cNvSpPr/>
-          <p:nvPr/>
-        </p:nvSpPr>
-        <p:spPr>
-          <a:xfrm>
-            <a:off x="10618256" y="3995589"/>
-            <a:ext cx="684943" cy="209550"/>
-          </a:xfrm>
-          <a:prstGeom prst="rect">
-            <a:avLst/>
-          </a:prstGeom>
-          <a:noFill/>
-          <a:ln/>
-        </p:spPr>
-        <p:txBody>
-          <a:bodyPr wrap="square" lIns="0" tIns="0" rIns="0" bIns="0" rtlCol="0" anchor="t"/>
-          <a:lstStyle/>
-          <a:p>
-            <a:pPr algn="r" indent="0" marL="0">
-              <a:buNone/>
-            </a:pPr>
-            <a:r>
-              <a:rPr lang="en-US" sz="1000" dirty="0">
-                <a:solidFill>
-                  <a:srgbClr val="3A7D8C"/>
-                </a:solidFill>
-                <a:latin typeface="Noto Sans SC" pitchFamily="34" charset="0"/>
-                <a:ea typeface="Noto Sans SC" pitchFamily="34" charset="-122"/>
-                <a:cs typeface="Noto Sans SC" pitchFamily="34" charset="-120"/>
-              </a:rPr>
-              <a:t>✅ 1 finger</a:t>
-            </a:r>
-            <a:endParaRPr lang="en-US" sz="1000" dirty="0"/>
-          </a:p>
-        </p:txBody>
-      </p:sp>
-      <p:sp>
-        <p:nvSpPr>
-          <p:cNvPr id="21" name="Text 19"/>
+          <p:cNvPr id="18" name="Text 16"/>
           <p:cNvSpPr/>
           <p:nvPr/>
         </p:nvSpPr>
@@ -11139,7 +12197,7 @@
       </p:sp>
       <p:sp>
         <p:nvSpPr>
-          <p:cNvPr id="22" name="Text 20"/>
+          <p:cNvPr id="19" name="Text 17"/>
           <p:cNvSpPr/>
           <p:nvPr/>
         </p:nvSpPr>
@@ -11180,14 +12238,14 @@
       </p:sp>
       <p:sp>
         <p:nvSpPr>
-          <p:cNvPr id="23" name="Text 21"/>
+          <p:cNvPr id="20" name="Text 18"/>
           <p:cNvSpPr/>
           <p:nvPr/>
         </p:nvSpPr>
         <p:spPr>
           <a:xfrm>
             <a:off x="1320552" y="4766965"/>
-            <a:ext cx="9797171" cy="209550"/>
+            <a:ext cx="10182299" cy="209550"/>
           </a:xfrm>
           <a:prstGeom prst="rect">
             <a:avLst/>
@@ -11219,46 +12277,7 @@
       </p:sp>
       <p:sp>
         <p:nvSpPr>
-          <p:cNvPr id="24" name="Text 22"/>
-          <p:cNvSpPr/>
-          <p:nvPr/>
-        </p:nvSpPr>
-        <p:spPr>
-          <a:xfrm>
-            <a:off x="11047559" y="4781252"/>
-            <a:ext cx="255639" cy="180975"/>
-          </a:xfrm>
-          <a:prstGeom prst="rect">
-            <a:avLst/>
-          </a:prstGeom>
-          <a:noFill/>
-          <a:ln/>
-        </p:spPr>
-        <p:txBody>
-          <a:bodyPr wrap="square" lIns="0" tIns="0" rIns="0" bIns="0" rtlCol="0" anchor="t"/>
-          <a:lstStyle/>
-          <a:p>
-            <a:pPr algn="r" indent="0" marL="0">
-              <a:buNone/>
-            </a:pPr>
-            <a:r>
-              <a:rPr lang="en-US" sz="1000" dirty="0">
-                <a:solidFill>
-                  <a:srgbClr val="3A7D8C"/>
-                </a:solidFill>
-                <a:latin typeface="Noto Sans SC" pitchFamily="34" charset="0"/>
-                <a:ea typeface="Noto Sans SC" pitchFamily="34" charset="-122"/>
-                <a:cs typeface="Noto Sans SC" pitchFamily="34" charset="-120"/>
-              </a:rPr>
-              <a:t>→ 9</a:t>
-            </a:r>
-            <a:endParaRPr lang="en-US" sz="1000" dirty="0"/>
-          </a:p>
-        </p:txBody>
-      </p:sp>
-      <p:sp>
-        <p:nvSpPr>
-          <p:cNvPr id="25" name="Text 23"/>
+          <p:cNvPr id="21" name="Text 19"/>
           <p:cNvSpPr/>
           <p:nvPr/>
         </p:nvSpPr>
@@ -11297,7 +12316,7 @@
       </p:sp>
       <p:sp>
         <p:nvSpPr>
-          <p:cNvPr id="26" name="Text 24"/>
+          <p:cNvPr id="22" name="Text 20"/>
           <p:cNvSpPr/>
           <p:nvPr/>
         </p:nvSpPr>
@@ -11336,7 +12355,7 @@
       </p:sp>
       <p:sp>
         <p:nvSpPr>
-          <p:cNvPr id="27" name="Shape 25"/>
+          <p:cNvPr id="23" name="Shape 21"/>
           <p:cNvSpPr/>
           <p:nvPr/>
         </p:nvSpPr>
@@ -11359,7 +12378,7 @@
       </p:sp>
       <p:sp>
         <p:nvSpPr>
-          <p:cNvPr id="28" name="Text 26"/>
+          <p:cNvPr id="24" name="Text 22"/>
           <p:cNvSpPr/>
           <p:nvPr/>
         </p:nvSpPr>
@@ -11529,7 +12548,7 @@
         <p:spPr>
           <a:xfrm>
             <a:off x="1433959" y="166688"/>
-            <a:ext cx="1234324" cy="123825"/>
+            <a:ext cx="957584" cy="123825"/>
           </a:xfrm>
           <a:prstGeom prst="rect">
             <a:avLst/>
@@ -11553,7 +12572,7 @@
                 <a:ea typeface="Noto Sans SC" pitchFamily="34" charset="-122"/>
                 <a:cs typeface="Noto Sans SC" pitchFamily="34" charset="-120"/>
               </a:rPr>
-              <a:t>We Do · Choral Clock Flash</a:t>
+              <a:t>I Do · CFU · Answers</a:t>
             </a:r>
             <a:endParaRPr lang="en-US" sz="700" dirty="0"/>
           </a:p>
@@ -11597,8 +12616,8 @@
         </p:nvSpPr>
         <p:spPr>
           <a:xfrm>
-            <a:off x="406301" y="2259211"/>
-            <a:ext cx="11606986" cy="142875"/>
+            <a:off x="711101" y="1311771"/>
+            <a:ext cx="10985194" cy="142875"/>
           </a:xfrm>
           <a:prstGeom prst="rect">
             <a:avLst/>
@@ -11616,13 +12635,13 @@
             <a:r>
               <a:rPr lang="en-US" sz="800" b="1" dirty="0">
                 <a:solidFill>
-                  <a:srgbClr val="3A7D8C"/>
-                </a:solidFill>
-                <a:latin typeface="Noto Sans SC" pitchFamily="34" charset="0"/>
-                <a:ea typeface="Noto Sans SC" pitchFamily="34" charset="-122"/>
-                <a:cs typeface="Noto Sans SC" pitchFamily="34" charset="-120"/>
-              </a:rPr>
-              <a:t>Activity 1 · 8 min</a:t>
+                  <a:srgbClr val="C8943E"/>
+                </a:solidFill>
+                <a:latin typeface="Noto Sans SC" pitchFamily="34" charset="0"/>
+                <a:ea typeface="Noto Sans SC" pitchFamily="34" charset="-122"/>
+                <a:cs typeface="Noto Sans SC" pitchFamily="34" charset="-120"/>
+              </a:rPr>
+              <a:t>12–20 min · CFU Checkpoints</a:t>
             </a:r>
             <a:endParaRPr lang="en-US" sz="800" dirty="0"/>
           </a:p>
@@ -11636,8 +12655,40 @@
         </p:nvSpPr>
         <p:spPr>
           <a:xfrm>
-            <a:off x="406301" y="2452836"/>
-            <a:ext cx="11606986" cy="352425"/>
+            <a:off x="711101" y="1505396"/>
+            <a:ext cx="10769798" cy="174427"/>
+          </a:xfrm>
+          <a:prstGeom prst="roundRect">
+            <a:avLst>
+              <a:gd name="adj" fmla="val 21843"/>
+            </a:avLst>
+          </a:prstGeom>
+          <a:solidFill>
+            <a:srgbClr val="C8943E"/>
+          </a:solidFill>
+          <a:ln/>
+        </p:spPr>
+        <p:txBody>
+          <a:bodyPr wrap="square" rtlCol="0" anchor="ctr"/>
+          <a:lstStyle/>
+          <a:p>
+            <a:pPr indent="0" marL="0">
+              <a:buNone/>
+            </a:pPr>
+            <a:endParaRPr lang="en-US" dirty="0"/>
+          </a:p>
+        </p:txBody>
+      </p:sp>
+      <p:sp>
+        <p:nvSpPr>
+          <p:cNvPr id="9" name="Text 7"/>
+          <p:cNvSpPr/>
+          <p:nvPr/>
+        </p:nvSpPr>
+        <p:spPr>
+          <a:xfrm>
+            <a:off x="812602" y="1530697"/>
+            <a:ext cx="10778133" cy="123825"/>
           </a:xfrm>
           <a:prstGeom prst="rect">
             <a:avLst/>
@@ -11653,7 +12704,46 @@
               <a:buNone/>
             </a:pPr>
             <a:r>
-              <a:rPr lang="en-US" sz="2000" b="1" dirty="0">
+              <a:rPr lang="en-US" sz="700" b="1" dirty="0">
+                <a:solidFill>
+                  <a:srgbClr val="FFFFFF"/>
+                </a:solidFill>
+                <a:latin typeface="Noto Sans SC" pitchFamily="34" charset="0"/>
+                <a:ea typeface="Noto Sans SC" pitchFamily="34" charset="-122"/>
+                <a:cs typeface="Noto Sans SC" pitchFamily="34" charset="-120"/>
+              </a:rPr>
+              <a:t>ANSWERS</a:t>
+            </a:r>
+            <a:endParaRPr lang="en-US" sz="700" dirty="0"/>
+          </a:p>
+        </p:txBody>
+      </p:sp>
+      <p:sp>
+        <p:nvSpPr>
+          <p:cNvPr id="10" name="Text 8"/>
+          <p:cNvSpPr/>
+          <p:nvPr/>
+        </p:nvSpPr>
+        <p:spPr>
+          <a:xfrm>
+            <a:off x="711101" y="1806773"/>
+            <a:ext cx="10985194" cy="390525"/>
+          </a:xfrm>
+          <a:prstGeom prst="rect">
+            <a:avLst/>
+          </a:prstGeom>
+          <a:noFill/>
+          <a:ln/>
+        </p:spPr>
+        <p:txBody>
+          <a:bodyPr wrap="square" lIns="0" tIns="0" rIns="0" bIns="0" rtlCol="0" anchor="t"/>
+          <a:lstStyle/>
+          <a:p>
+            <a:pPr algn="l" indent="0" marL="0">
+              <a:buNone/>
+            </a:pPr>
+            <a:r>
+              <a:rPr lang="en-US" sz="2200" b="1" dirty="0">
                 <a:solidFill>
                   <a:srgbClr val="1E2A38"/>
                 </a:solidFill>
@@ -11661,65 +12751,26 @@
                 <a:ea typeface="Noto Serif SC" pitchFamily="34" charset="-122"/>
                 <a:cs typeface="Noto Serif SC" pitchFamily="34" charset="-120"/>
               </a:rPr>
-              <a:t>Choral Clock Flash · 钟表闪卡</a:t>
-            </a:r>
-            <a:endParaRPr lang="en-US" sz="2000" dirty="0"/>
-          </a:p>
-        </p:txBody>
-      </p:sp>
-      <p:sp>
-        <p:nvSpPr>
-          <p:cNvPr id="9" name="Text 7"/>
-          <p:cNvSpPr/>
-          <p:nvPr/>
-        </p:nvSpPr>
-        <p:spPr>
-          <a:xfrm>
-            <a:off x="406301" y="2830562"/>
-            <a:ext cx="11606986" cy="161925"/>
-          </a:xfrm>
-          <a:prstGeom prst="rect">
-            <a:avLst/>
-          </a:prstGeom>
-          <a:noFill/>
-          <a:ln/>
-        </p:spPr>
-        <p:txBody>
-          <a:bodyPr wrap="square" lIns="0" tIns="0" rIns="0" bIns="0" rtlCol="0" anchor="t"/>
-          <a:lstStyle/>
-          <a:p>
-            <a:pPr algn="l" indent="0" marL="0">
-              <a:buNone/>
-            </a:pPr>
-            <a:r>
-              <a:rPr lang="en-US" sz="900" dirty="0">
-                <a:solidFill>
-                  <a:srgbClr val="8B94A3"/>
-                </a:solidFill>
-                <a:latin typeface="Noto Sans SC" pitchFamily="34" charset="0"/>
-                <a:ea typeface="Noto Sans SC" pitchFamily="34" charset="-122"/>
-                <a:cs typeface="Noto Sans SC" pitchFamily="34" charset="-120"/>
-              </a:rPr>
-              <a:t>Whole class chorally says the time. Start slow, speed up!</a:t>
-            </a:r>
-            <a:endParaRPr lang="en-US" sz="900" dirty="0"/>
-          </a:p>
-        </p:txBody>
-      </p:sp>
-      <p:sp>
-        <p:nvSpPr>
-          <p:cNvPr id="10" name="Text 8"/>
-          <p:cNvSpPr/>
-          <p:nvPr/>
-        </p:nvSpPr>
-        <p:spPr>
-          <a:xfrm>
-            <a:off x="406301" y="3144887"/>
-            <a:ext cx="2768650" cy="501551"/>
+              <a:t>Check for Understanding</a:t>
+            </a:r>
+            <a:endParaRPr lang="en-US" sz="2200" dirty="0"/>
+          </a:p>
+        </p:txBody>
+      </p:sp>
+      <p:sp>
+        <p:nvSpPr>
+          <p:cNvPr id="11" name="Text 9"/>
+          <p:cNvSpPr/>
+          <p:nvPr/>
+        </p:nvSpPr>
+        <p:spPr>
+          <a:xfrm>
+            <a:off x="711101" y="2400449"/>
+            <a:ext cx="10769798" cy="644426"/>
           </a:xfrm>
           <a:prstGeom prst="roundRect">
             <a:avLst>
-              <a:gd name="adj" fmla="val 20257"/>
+              <a:gd name="adj" fmla="val 11824"/>
             </a:avLst>
           </a:prstGeom>
           <a:solidFill>
@@ -11740,14 +12791,14 @@
       </p:sp>
       <p:sp>
         <p:nvSpPr>
-          <p:cNvPr id="11" name="Text 9"/>
-          <p:cNvSpPr/>
-          <p:nvPr/>
-        </p:nvSpPr>
-        <p:spPr>
-          <a:xfrm>
-            <a:off x="508104" y="3271838"/>
-            <a:ext cx="2565044" cy="247650"/>
+          <p:cNvPr id="12" name="Text 10"/>
+          <p:cNvSpPr/>
+          <p:nvPr/>
+        </p:nvSpPr>
+        <p:spPr>
+          <a:xfrm>
+            <a:off x="885754" y="2527399"/>
+            <a:ext cx="310896" cy="390525"/>
           </a:xfrm>
           <a:prstGeom prst="rect">
             <a:avLst/>
@@ -11763,34 +12814,114 @@
               <a:buNone/>
             </a:pPr>
             <a:r>
-              <a:rPr lang="en-US" sz="1400" b="1" dirty="0">
-                <a:solidFill>
-                  <a:srgbClr val="1E2A38"/>
+              <a:rPr lang="en-US" sz="2200" b="1" dirty="0">
+                <a:solidFill>
+                  <a:srgbClr val="C8943E">
+                    <a:alpha val="30000"/>
+                  </a:srgbClr>
                 </a:solidFill>
                 <a:latin typeface="Noto Serif SC" pitchFamily="34" charset="0"/>
                 <a:ea typeface="Noto Serif SC" pitchFamily="34" charset="-122"/>
                 <a:cs typeface="Noto Serif SC" pitchFamily="34" charset="-120"/>
               </a:rPr>
-              <a:t>一点</a:t>
-            </a:r>
-            <a:endParaRPr lang="en-US" sz="1400" dirty="0"/>
-          </a:p>
-        </p:txBody>
-      </p:sp>
-      <p:sp>
-        <p:nvSpPr>
-          <p:cNvPr id="12" name="Text 10"/>
-          <p:cNvSpPr/>
-          <p:nvPr/>
-        </p:nvSpPr>
-        <p:spPr>
-          <a:xfrm>
-            <a:off x="3276451" y="3144887"/>
-            <a:ext cx="2768798" cy="501551"/>
+              <a:t>1</a:t>
+            </a:r>
+            <a:endParaRPr lang="en-US" sz="2200" dirty="0"/>
+          </a:p>
+        </p:txBody>
+      </p:sp>
+      <p:sp>
+        <p:nvSpPr>
+          <p:cNvPr id="13" name="Text 11"/>
+          <p:cNvSpPr/>
+          <p:nvPr/>
+        </p:nvSpPr>
+        <p:spPr>
+          <a:xfrm>
+            <a:off x="1320552" y="2617887"/>
+            <a:ext cx="9578724" cy="209550"/>
+          </a:xfrm>
+          <a:prstGeom prst="rect">
+            <a:avLst/>
+          </a:prstGeom>
+          <a:noFill/>
+          <a:ln/>
+        </p:spPr>
+        <p:txBody>
+          <a:bodyPr wrap="square" lIns="0" tIns="0" rIns="0" bIns="0" rtlCol="0" anchor="t"/>
+          <a:lstStyle/>
+          <a:p>
+            <a:pPr algn="l" indent="0" marL="0">
+              <a:buNone/>
+            </a:pPr>
+            <a:r>
+              <a:rPr lang="en-US" sz="1200" dirty="0">
+                <a:solidFill>
+                  <a:srgbClr val="1E2A38"/>
+                </a:solidFill>
+                <a:latin typeface="Noto Sans SC" pitchFamily="34" charset="0"/>
+                <a:ea typeface="Noto Sans SC" pitchFamily="34" charset="-122"/>
+                <a:cs typeface="Noto Sans SC" pitchFamily="34" charset="-120"/>
+              </a:rPr>
+              <a:t>「一点」is 1 o'clock — 1 finger = yes, 2 fingers = no.</a:t>
+            </a:r>
+            <a:endParaRPr lang="en-US" sz="1200" dirty="0"/>
+          </a:p>
+        </p:txBody>
+      </p:sp>
+      <p:sp>
+        <p:nvSpPr>
+          <p:cNvPr id="14" name="Text 12"/>
+          <p:cNvSpPr/>
+          <p:nvPr/>
+        </p:nvSpPr>
+        <p:spPr>
+          <a:xfrm>
+            <a:off x="10829112" y="2632174"/>
+            <a:ext cx="474086" cy="180975"/>
+          </a:xfrm>
+          <a:prstGeom prst="rect">
+            <a:avLst/>
+          </a:prstGeom>
+          <a:noFill/>
+          <a:ln/>
+        </p:spPr>
+        <p:txBody>
+          <a:bodyPr wrap="square" lIns="0" tIns="0" rIns="0" bIns="0" rtlCol="0" anchor="t"/>
+          <a:lstStyle/>
+          <a:p>
+            <a:pPr algn="r" indent="0" marL="0">
+              <a:buNone/>
+            </a:pPr>
+            <a:r>
+              <a:rPr lang="en-US" sz="1000" dirty="0">
+                <a:solidFill>
+                  <a:srgbClr val="3A7D8C"/>
+                </a:solidFill>
+                <a:latin typeface="Noto Sans SC" pitchFamily="34" charset="0"/>
+                <a:ea typeface="Noto Sans SC" pitchFamily="34" charset="-122"/>
+                <a:cs typeface="Noto Sans SC" pitchFamily="34" charset="-120"/>
+              </a:rPr>
+              <a:t>1 finger</a:t>
+            </a:r>
+            <a:endParaRPr lang="en-US" sz="1000" dirty="0"/>
+          </a:p>
+        </p:txBody>
+      </p:sp>
+      <p:sp>
+        <p:nvSpPr>
+          <p:cNvPr id="15" name="Text 13"/>
+          <p:cNvSpPr/>
+          <p:nvPr/>
+        </p:nvSpPr>
+        <p:spPr>
+          <a:xfrm>
+            <a:off x="711101" y="3171825"/>
+            <a:ext cx="10769798" cy="644426"/>
           </a:xfrm>
           <a:prstGeom prst="roundRect">
             <a:avLst>
-              <a:gd name="adj" fmla="val 20257"/>
+              <a:gd name="adj" fmla="val 11824"/>
             </a:avLst>
           </a:prstGeom>
           <a:solidFill>
@@ -11811,14 +12942,14 @@
       </p:sp>
       <p:sp>
         <p:nvSpPr>
-          <p:cNvPr id="13" name="Text 11"/>
-          <p:cNvSpPr/>
-          <p:nvPr/>
-        </p:nvSpPr>
-        <p:spPr>
-          <a:xfrm>
-            <a:off x="3378253" y="3271838"/>
-            <a:ext cx="2565196" cy="247650"/>
+          <p:cNvPr id="16" name="Text 14"/>
+          <p:cNvSpPr/>
+          <p:nvPr/>
+        </p:nvSpPr>
+        <p:spPr>
+          <a:xfrm>
+            <a:off x="885754" y="3298775"/>
+            <a:ext cx="310896" cy="390525"/>
           </a:xfrm>
           <a:prstGeom prst="rect">
             <a:avLst/>
@@ -11834,34 +12965,114 @@
               <a:buNone/>
             </a:pPr>
             <a:r>
-              <a:rPr lang="en-US" sz="1400" b="1" dirty="0">
-                <a:solidFill>
-                  <a:srgbClr val="1E2A38"/>
+              <a:rPr lang="en-US" sz="2200" b="1" dirty="0">
+                <a:solidFill>
+                  <a:srgbClr val="C8943E">
+                    <a:alpha val="30000"/>
+                  </a:srgbClr>
                 </a:solidFill>
                 <a:latin typeface="Noto Serif SC" pitchFamily="34" charset="0"/>
                 <a:ea typeface="Noto Serif SC" pitchFamily="34" charset="-122"/>
                 <a:cs typeface="Noto Serif SC" pitchFamily="34" charset="-120"/>
               </a:rPr>
-              <a:t>三点</a:t>
-            </a:r>
-            <a:endParaRPr lang="en-US" sz="1400" dirty="0"/>
-          </a:p>
-        </p:txBody>
-      </p:sp>
-      <p:sp>
-        <p:nvSpPr>
-          <p:cNvPr id="14" name="Text 12"/>
-          <p:cNvSpPr/>
-          <p:nvPr/>
-        </p:nvSpPr>
-        <p:spPr>
-          <a:xfrm>
-            <a:off x="6146750" y="3144887"/>
-            <a:ext cx="2768650" cy="501551"/>
+              <a:t>2</a:t>
+            </a:r>
+            <a:endParaRPr lang="en-US" sz="2200" dirty="0"/>
+          </a:p>
+        </p:txBody>
+      </p:sp>
+      <p:sp>
+        <p:nvSpPr>
+          <p:cNvPr id="17" name="Text 15"/>
+          <p:cNvSpPr/>
+          <p:nvPr/>
+        </p:nvSpPr>
+        <p:spPr>
+          <a:xfrm>
+            <a:off x="1320552" y="3389263"/>
+            <a:ext cx="8323603" cy="209550"/>
+          </a:xfrm>
+          <a:prstGeom prst="rect">
+            <a:avLst/>
+          </a:prstGeom>
+          <a:noFill/>
+          <a:ln/>
+        </p:spPr>
+        <p:txBody>
+          <a:bodyPr wrap="square" lIns="0" tIns="0" rIns="0" bIns="0" rtlCol="0" anchor="t"/>
+          <a:lstStyle/>
+          <a:p>
+            <a:pPr algn="l" indent="0" marL="0">
+              <a:buNone/>
+            </a:pPr>
+            <a:r>
+              <a:rPr lang="en-US" sz="1200" dirty="0">
+                <a:solidFill>
+                  <a:srgbClr val="1E2A38"/>
+                </a:solidFill>
+                <a:latin typeface="Noto Sans SC" pitchFamily="34" charset="0"/>
+                <a:ea typeface="Noto Sans SC" pitchFamily="34" charset="-122"/>
+                <a:cs typeface="Noto Sans SC" pitchFamily="34" charset="-120"/>
+              </a:rPr>
+              <a:t>「二点」is correct — 1 finger = yes, 2 fingers = no.</a:t>
+            </a:r>
+            <a:endParaRPr lang="en-US" sz="1200" dirty="0"/>
+          </a:p>
+        </p:txBody>
+      </p:sp>
+      <p:sp>
+        <p:nvSpPr>
+          <p:cNvPr id="18" name="Text 16"/>
+          <p:cNvSpPr/>
+          <p:nvPr/>
+        </p:nvSpPr>
+        <p:spPr>
+          <a:xfrm>
+            <a:off x="9573991" y="3403550"/>
+            <a:ext cx="1729207" cy="180975"/>
+          </a:xfrm>
+          <a:prstGeom prst="rect">
+            <a:avLst/>
+          </a:prstGeom>
+          <a:noFill/>
+          <a:ln/>
+        </p:spPr>
+        <p:txBody>
+          <a:bodyPr wrap="square" lIns="0" tIns="0" rIns="0" bIns="0" rtlCol="0" anchor="t"/>
+          <a:lstStyle/>
+          <a:p>
+            <a:pPr algn="r" indent="0" marL="0">
+              <a:buNone/>
+            </a:pPr>
+            <a:r>
+              <a:rPr lang="en-US" sz="1000" dirty="0">
+                <a:solidFill>
+                  <a:srgbClr val="3A7D8C"/>
+                </a:solidFill>
+                <a:latin typeface="Noto Sans SC" pitchFamily="34" charset="0"/>
+                <a:ea typeface="Noto Sans SC" pitchFamily="34" charset="-122"/>
+                <a:cs typeface="Noto Sans SC" pitchFamily="34" charset="-120"/>
+              </a:rPr>
+              <a:t>2 fingers — must use 两点!</a:t>
+            </a:r>
+            <a:endParaRPr lang="en-US" sz="1000" dirty="0"/>
+          </a:p>
+        </p:txBody>
+      </p:sp>
+      <p:sp>
+        <p:nvSpPr>
+          <p:cNvPr id="19" name="Text 17"/>
+          <p:cNvSpPr/>
+          <p:nvPr/>
+        </p:nvSpPr>
+        <p:spPr>
+          <a:xfrm>
+            <a:off x="711101" y="3943201"/>
+            <a:ext cx="10769798" cy="644426"/>
           </a:xfrm>
           <a:prstGeom prst="roundRect">
             <a:avLst>
-              <a:gd name="adj" fmla="val 20257"/>
+              <a:gd name="adj" fmla="val 11824"/>
             </a:avLst>
           </a:prstGeom>
           <a:solidFill>
@@ -11882,14 +13093,14 @@
       </p:sp>
       <p:sp>
         <p:nvSpPr>
-          <p:cNvPr id="15" name="Text 13"/>
-          <p:cNvSpPr/>
-          <p:nvPr/>
-        </p:nvSpPr>
-        <p:spPr>
-          <a:xfrm>
-            <a:off x="6248553" y="3271838"/>
-            <a:ext cx="2565044" cy="247650"/>
+          <p:cNvPr id="20" name="Text 18"/>
+          <p:cNvSpPr/>
+          <p:nvPr/>
+        </p:nvSpPr>
+        <p:spPr>
+          <a:xfrm>
+            <a:off x="885754" y="4070152"/>
+            <a:ext cx="310896" cy="390525"/>
           </a:xfrm>
           <a:prstGeom prst="rect">
             <a:avLst/>
@@ -11905,34 +13116,114 @@
               <a:buNone/>
             </a:pPr>
             <a:r>
-              <a:rPr lang="en-US" sz="1400" b="1" dirty="0">
-                <a:solidFill>
-                  <a:srgbClr val="1E2A38"/>
+              <a:rPr lang="en-US" sz="2200" b="1" dirty="0">
+                <a:solidFill>
+                  <a:srgbClr val="C8943E">
+                    <a:alpha val="30000"/>
+                  </a:srgbClr>
                 </a:solidFill>
                 <a:latin typeface="Noto Serif SC" pitchFamily="34" charset="0"/>
                 <a:ea typeface="Noto Serif SC" pitchFamily="34" charset="-122"/>
                 <a:cs typeface="Noto Serif SC" pitchFamily="34" charset="-120"/>
               </a:rPr>
-              <a:t>五点</a:t>
-            </a:r>
-            <a:endParaRPr lang="en-US" sz="1400" dirty="0"/>
-          </a:p>
-        </p:txBody>
-      </p:sp>
-      <p:sp>
-        <p:nvSpPr>
-          <p:cNvPr id="16" name="Text 14"/>
-          <p:cNvSpPr/>
-          <p:nvPr/>
-        </p:nvSpPr>
-        <p:spPr>
-          <a:xfrm>
-            <a:off x="9016901" y="3144887"/>
-            <a:ext cx="2768798" cy="501551"/>
+              <a:t>3</a:t>
+            </a:r>
+            <a:endParaRPr lang="en-US" sz="2200" dirty="0"/>
+          </a:p>
+        </p:txBody>
+      </p:sp>
+      <p:sp>
+        <p:nvSpPr>
+          <p:cNvPr id="21" name="Text 19"/>
+          <p:cNvSpPr/>
+          <p:nvPr/>
+        </p:nvSpPr>
+        <p:spPr>
+          <a:xfrm>
+            <a:off x="1320552" y="4160639"/>
+            <a:ext cx="9578724" cy="209550"/>
+          </a:xfrm>
+          <a:prstGeom prst="rect">
+            <a:avLst/>
+          </a:prstGeom>
+          <a:noFill/>
+          <a:ln/>
+        </p:spPr>
+        <p:txBody>
+          <a:bodyPr wrap="square" lIns="0" tIns="0" rIns="0" bIns="0" rtlCol="0" anchor="t"/>
+          <a:lstStyle/>
+          <a:p>
+            <a:pPr algn="l" indent="0" marL="0">
+              <a:buNone/>
+            </a:pPr>
+            <a:r>
+              <a:rPr lang="en-US" sz="1200" dirty="0">
+                <a:solidFill>
+                  <a:srgbClr val="1E2A38"/>
+                </a:solidFill>
+                <a:latin typeface="Noto Sans SC" pitchFamily="34" charset="0"/>
+                <a:ea typeface="Noto Sans SC" pitchFamily="34" charset="-122"/>
+                <a:cs typeface="Noto Sans SC" pitchFamily="34" charset="-120"/>
+              </a:rPr>
+              <a:t>「三点」的拼音是 sān diǎn — fingers?</a:t>
+            </a:r>
+            <a:endParaRPr lang="en-US" sz="1200" dirty="0"/>
+          </a:p>
+        </p:txBody>
+      </p:sp>
+      <p:sp>
+        <p:nvSpPr>
+          <p:cNvPr id="22" name="Text 20"/>
+          <p:cNvSpPr/>
+          <p:nvPr/>
+        </p:nvSpPr>
+        <p:spPr>
+          <a:xfrm>
+            <a:off x="10829112" y="4174927"/>
+            <a:ext cx="474086" cy="180975"/>
+          </a:xfrm>
+          <a:prstGeom prst="rect">
+            <a:avLst/>
+          </a:prstGeom>
+          <a:noFill/>
+          <a:ln/>
+        </p:spPr>
+        <p:txBody>
+          <a:bodyPr wrap="square" lIns="0" tIns="0" rIns="0" bIns="0" rtlCol="0" anchor="t"/>
+          <a:lstStyle/>
+          <a:p>
+            <a:pPr algn="r" indent="0" marL="0">
+              <a:buNone/>
+            </a:pPr>
+            <a:r>
+              <a:rPr lang="en-US" sz="1000" dirty="0">
+                <a:solidFill>
+                  <a:srgbClr val="3A7D8C"/>
+                </a:solidFill>
+                <a:latin typeface="Noto Sans SC" pitchFamily="34" charset="0"/>
+                <a:ea typeface="Noto Sans SC" pitchFamily="34" charset="-122"/>
+                <a:cs typeface="Noto Sans SC" pitchFamily="34" charset="-120"/>
+              </a:rPr>
+              <a:t>1 finger</a:t>
+            </a:r>
+            <a:endParaRPr lang="en-US" sz="1000" dirty="0"/>
+          </a:p>
+        </p:txBody>
+      </p:sp>
+      <p:sp>
+        <p:nvSpPr>
+          <p:cNvPr id="23" name="Text 21"/>
+          <p:cNvSpPr/>
+          <p:nvPr/>
+        </p:nvSpPr>
+        <p:spPr>
+          <a:xfrm>
+            <a:off x="711101" y="4714577"/>
+            <a:ext cx="10769798" cy="644426"/>
           </a:xfrm>
           <a:prstGeom prst="roundRect">
             <a:avLst>
-              <a:gd name="adj" fmla="val 20257"/>
+              <a:gd name="adj" fmla="val 11824"/>
             </a:avLst>
           </a:prstGeom>
           <a:solidFill>
@@ -11953,14 +13244,14 @@
       </p:sp>
       <p:sp>
         <p:nvSpPr>
-          <p:cNvPr id="17" name="Text 15"/>
-          <p:cNvSpPr/>
-          <p:nvPr/>
-        </p:nvSpPr>
-        <p:spPr>
-          <a:xfrm>
-            <a:off x="9118702" y="3271838"/>
-            <a:ext cx="2565196" cy="247650"/>
+          <p:cNvPr id="24" name="Text 22"/>
+          <p:cNvSpPr/>
+          <p:nvPr/>
+        </p:nvSpPr>
+        <p:spPr>
+          <a:xfrm>
+            <a:off x="885754" y="4841528"/>
+            <a:ext cx="310896" cy="390525"/>
           </a:xfrm>
           <a:prstGeom prst="rect">
             <a:avLst/>
@@ -11976,305 +13267,58 @@
               <a:buNone/>
             </a:pPr>
             <a:r>
-              <a:rPr lang="en-US" sz="1400" b="1" dirty="0">
-                <a:solidFill>
-                  <a:srgbClr val="1E2A38"/>
+              <a:rPr lang="en-US" sz="2200" b="1" dirty="0">
+                <a:solidFill>
+                  <a:srgbClr val="C8943E">
+                    <a:alpha val="30000"/>
+                  </a:srgbClr>
                 </a:solidFill>
                 <a:latin typeface="Noto Serif SC" pitchFamily="34" charset="0"/>
                 <a:ea typeface="Noto Serif SC" pitchFamily="34" charset="-122"/>
                 <a:cs typeface="Noto Serif SC" pitchFamily="34" charset="-120"/>
               </a:rPr>
-              <a:t>七点</a:t>
-            </a:r>
-            <a:endParaRPr lang="en-US" sz="1400" dirty="0"/>
-          </a:p>
-        </p:txBody>
-      </p:sp>
-      <p:sp>
-        <p:nvSpPr>
-          <p:cNvPr id="18" name="Text 16"/>
-          <p:cNvSpPr/>
-          <p:nvPr/>
-        </p:nvSpPr>
-        <p:spPr>
-          <a:xfrm>
-            <a:off x="406301" y="3747939"/>
-            <a:ext cx="2768650" cy="558701"/>
-          </a:xfrm>
-          <a:prstGeom prst="roundRect">
-            <a:avLst>
-              <a:gd name="adj" fmla="val 18185"/>
-            </a:avLst>
-          </a:prstGeom>
-          <a:solidFill>
-            <a:srgbClr val="F6F2E8"/>
-          </a:solidFill>
-          <a:ln/>
-        </p:spPr>
-        <p:txBody>
-          <a:bodyPr wrap="square" rtlCol="0" anchor="ctr"/>
-          <a:lstStyle/>
-          <a:p>
-            <a:pPr indent="0" marL="0">
-              <a:buNone/>
-            </a:pPr>
-            <a:endParaRPr lang="en-US" dirty="0"/>
-          </a:p>
-        </p:txBody>
-      </p:sp>
-      <p:sp>
-        <p:nvSpPr>
-          <p:cNvPr id="19" name="Text 17"/>
-          <p:cNvSpPr/>
-          <p:nvPr/>
-        </p:nvSpPr>
-        <p:spPr>
-          <a:xfrm>
-            <a:off x="508104" y="3874889"/>
-            <a:ext cx="2565044" cy="247650"/>
-          </a:xfrm>
-          <a:prstGeom prst="rect">
-            <a:avLst/>
-          </a:prstGeom>
-          <a:noFill/>
-          <a:ln/>
-        </p:spPr>
-        <p:txBody>
-          <a:bodyPr wrap="square" lIns="0" tIns="0" rIns="0" bIns="0" rtlCol="0" anchor="t"/>
-          <a:lstStyle/>
-          <a:p>
-            <a:pPr algn="ctr" indent="0" marL="0">
-              <a:buNone/>
-            </a:pPr>
-            <a:r>
-              <a:rPr lang="en-US" sz="1400" b="1" dirty="0">
+              <a:t>4</a:t>
+            </a:r>
+            <a:endParaRPr lang="en-US" sz="2200" dirty="0"/>
+          </a:p>
+        </p:txBody>
+      </p:sp>
+      <p:sp>
+        <p:nvSpPr>
+          <p:cNvPr id="25" name="Text 23"/>
+          <p:cNvSpPr/>
+          <p:nvPr/>
+        </p:nvSpPr>
+        <p:spPr>
+          <a:xfrm>
+            <a:off x="1320552" y="4932015"/>
+            <a:ext cx="9797171" cy="209550"/>
+          </a:xfrm>
+          <a:prstGeom prst="rect">
+            <a:avLst/>
+          </a:prstGeom>
+          <a:noFill/>
+          <a:ln/>
+        </p:spPr>
+        <p:txBody>
+          <a:bodyPr wrap="square" lIns="0" tIns="0" rIns="0" bIns="0" rtlCol="0" anchor="t"/>
+          <a:lstStyle/>
+          <a:p>
+            <a:pPr algn="l" indent="0" marL="0">
+              <a:buNone/>
+            </a:pPr>
+            <a:r>
+              <a:rPr lang="en-US" sz="1200" dirty="0">
                 <a:solidFill>
                   <a:srgbClr val="1E2A38"/>
                 </a:solidFill>
-                <a:latin typeface="Noto Serif SC" pitchFamily="34" charset="0"/>
-                <a:ea typeface="Noto Serif SC" pitchFamily="34" charset="-122"/>
-                <a:cs typeface="Noto Serif SC" pitchFamily="34" charset="-120"/>
-              </a:rPr>
-              <a:t>九点</a:t>
-            </a:r>
-            <a:endParaRPr lang="en-US" sz="1400" dirty="0"/>
-          </a:p>
-        </p:txBody>
-      </p:sp>
-      <p:sp>
-        <p:nvSpPr>
-          <p:cNvPr id="20" name="Text 18"/>
-          <p:cNvSpPr/>
-          <p:nvPr/>
-        </p:nvSpPr>
-        <p:spPr>
-          <a:xfrm>
-            <a:off x="3276451" y="3747939"/>
-            <a:ext cx="2768798" cy="558701"/>
-          </a:xfrm>
-          <a:prstGeom prst="roundRect">
-            <a:avLst>
-              <a:gd name="adj" fmla="val 18185"/>
-            </a:avLst>
-          </a:prstGeom>
-          <a:solidFill>
-            <a:srgbClr val="F6F2E8"/>
-          </a:solidFill>
-          <a:ln/>
-        </p:spPr>
-        <p:txBody>
-          <a:bodyPr wrap="square" rtlCol="0" anchor="ctr"/>
-          <a:lstStyle/>
-          <a:p>
-            <a:pPr indent="0" marL="0">
-              <a:buNone/>
-            </a:pPr>
-            <a:endParaRPr lang="en-US" dirty="0"/>
-          </a:p>
-        </p:txBody>
-      </p:sp>
-      <p:sp>
-        <p:nvSpPr>
-          <p:cNvPr id="21" name="Text 19"/>
-          <p:cNvSpPr/>
-          <p:nvPr/>
-        </p:nvSpPr>
-        <p:spPr>
-          <a:xfrm>
-            <a:off x="3378253" y="3874889"/>
-            <a:ext cx="2565196" cy="247650"/>
-          </a:xfrm>
-          <a:prstGeom prst="rect">
-            <a:avLst/>
-          </a:prstGeom>
-          <a:noFill/>
-          <a:ln/>
-        </p:spPr>
-        <p:txBody>
-          <a:bodyPr wrap="square" lIns="0" tIns="0" rIns="0" bIns="0" rtlCol="0" anchor="t"/>
-          <a:lstStyle/>
-          <a:p>
-            <a:pPr algn="ctr" indent="0" marL="0">
-              <a:buNone/>
-            </a:pPr>
-            <a:r>
-              <a:rPr lang="en-US" sz="1400" b="1" dirty="0">
-                <a:solidFill>
-                  <a:srgbClr val="1E2A38"/>
-                </a:solidFill>
-                <a:latin typeface="Noto Serif SC" pitchFamily="34" charset="0"/>
-                <a:ea typeface="Noto Serif SC" pitchFamily="34" charset="-122"/>
-                <a:cs typeface="Noto Serif SC" pitchFamily="34" charset="-120"/>
-              </a:rPr>
-              <a:t>十一点</a:t>
-            </a:r>
-            <a:endParaRPr lang="en-US" sz="1400" dirty="0"/>
-          </a:p>
-        </p:txBody>
-      </p:sp>
-      <p:sp>
-        <p:nvSpPr>
-          <p:cNvPr id="22" name="Text 20"/>
-          <p:cNvSpPr/>
-          <p:nvPr/>
-        </p:nvSpPr>
-        <p:spPr>
-          <a:xfrm>
-            <a:off x="6146750" y="3747939"/>
-            <a:ext cx="2768650" cy="558701"/>
-          </a:xfrm>
-          <a:prstGeom prst="roundRect">
-            <a:avLst>
-              <a:gd name="adj" fmla="val 18185"/>
-            </a:avLst>
-          </a:prstGeom>
-          <a:solidFill>
-            <a:srgbClr val="F6F2E8"/>
-          </a:solidFill>
-          <a:ln w="19050">
-            <a:solidFill>
-              <a:srgbClr val="D4756B"/>
-            </a:solidFill>
-          </a:ln>
-        </p:spPr>
-        <p:txBody>
-          <a:bodyPr wrap="square" rtlCol="0" anchor="ctr"/>
-          <a:lstStyle/>
-          <a:p>
-            <a:pPr indent="0" marL="0">
-              <a:buNone/>
-            </a:pPr>
-            <a:endParaRPr lang="en-US" dirty="0"/>
-          </a:p>
-        </p:txBody>
-      </p:sp>
-      <p:sp>
-        <p:nvSpPr>
-          <p:cNvPr id="23" name="Text 21"/>
-          <p:cNvSpPr/>
-          <p:nvPr/>
-        </p:nvSpPr>
-        <p:spPr>
-          <a:xfrm>
-            <a:off x="6267984" y="3893939"/>
-            <a:ext cx="2526182" cy="266700"/>
-          </a:xfrm>
-          <a:prstGeom prst="rect">
-            <a:avLst/>
-          </a:prstGeom>
-          <a:noFill/>
-          <a:ln/>
-        </p:spPr>
-        <p:txBody>
-          <a:bodyPr wrap="square" lIns="0" tIns="0" rIns="0" bIns="0" rtlCol="0" anchor="t"/>
-          <a:lstStyle/>
-          <a:p>
-            <a:pPr algn="ctr" indent="0" marL="0">
-              <a:buNone/>
-            </a:pPr>
-            <a:r>
-              <a:rPr lang="en-US" sz="1400" b="1" dirty="0">
-                <a:solidFill>
-                  <a:srgbClr val="D4756B"/>
-                </a:solidFill>
-                <a:latin typeface="Noto Serif SC" pitchFamily="34" charset="0"/>
-                <a:ea typeface="Noto Serif SC" pitchFamily="34" charset="-122"/>
-                <a:cs typeface="Noto Serif SC" pitchFamily="34" charset="-120"/>
-              </a:rPr>
-              <a:t>两点 ⚠️</a:t>
-            </a:r>
-            <a:endParaRPr lang="en-US" sz="1400" dirty="0"/>
-          </a:p>
-        </p:txBody>
-      </p:sp>
-      <p:sp>
-        <p:nvSpPr>
-          <p:cNvPr id="24" name="Text 22"/>
-          <p:cNvSpPr/>
-          <p:nvPr/>
-        </p:nvSpPr>
-        <p:spPr>
-          <a:xfrm>
-            <a:off x="9016901" y="3747939"/>
-            <a:ext cx="2768798" cy="558701"/>
-          </a:xfrm>
-          <a:prstGeom prst="roundRect">
-            <a:avLst>
-              <a:gd name="adj" fmla="val 18185"/>
-            </a:avLst>
-          </a:prstGeom>
-          <a:solidFill>
-            <a:srgbClr val="F6F2E8"/>
-          </a:solidFill>
-          <a:ln/>
-        </p:spPr>
-        <p:txBody>
-          <a:bodyPr wrap="square" rtlCol="0" anchor="ctr"/>
-          <a:lstStyle/>
-          <a:p>
-            <a:pPr indent="0" marL="0">
-              <a:buNone/>
-            </a:pPr>
-            <a:endParaRPr lang="en-US" dirty="0"/>
-          </a:p>
-        </p:txBody>
-      </p:sp>
-      <p:sp>
-        <p:nvSpPr>
-          <p:cNvPr id="25" name="Text 23"/>
-          <p:cNvSpPr/>
-          <p:nvPr/>
-        </p:nvSpPr>
-        <p:spPr>
-          <a:xfrm>
-            <a:off x="9118702" y="3874889"/>
-            <a:ext cx="2565196" cy="247650"/>
-          </a:xfrm>
-          <a:prstGeom prst="rect">
-            <a:avLst/>
-          </a:prstGeom>
-          <a:noFill/>
-          <a:ln/>
-        </p:spPr>
-        <p:txBody>
-          <a:bodyPr wrap="square" lIns="0" tIns="0" rIns="0" bIns="0" rtlCol="0" anchor="t"/>
-          <a:lstStyle/>
-          <a:p>
-            <a:pPr algn="ctr" indent="0" marL="0">
-              <a:buNone/>
-            </a:pPr>
-            <a:r>
-              <a:rPr lang="en-US" sz="1400" b="1" dirty="0">
-                <a:solidFill>
-                  <a:srgbClr val="1E2A38"/>
-                </a:solidFill>
-                <a:latin typeface="Noto Serif SC" pitchFamily="34" charset="0"/>
-                <a:ea typeface="Noto Serif SC" pitchFamily="34" charset="-122"/>
-                <a:cs typeface="Noto Serif SC" pitchFamily="34" charset="-120"/>
-              </a:rPr>
-              <a:t>十二点</a:t>
-            </a:r>
-            <a:endParaRPr lang="en-US" sz="1400" dirty="0"/>
+                <a:latin typeface="Noto Sans SC" pitchFamily="34" charset="0"/>
+                <a:ea typeface="Noto Sans SC" pitchFamily="34" charset="-122"/>
+                <a:cs typeface="Noto Sans SC" pitchFamily="34" charset="-120"/>
+              </a:rPr>
+              <a:t>Teacher says「九点」. Write the DIGIT on paper, hold it up.</a:t>
+            </a:r>
+            <a:endParaRPr lang="en-US" sz="1200" dirty="0"/>
           </a:p>
         </p:txBody>
       </p:sp>
@@ -12286,27 +13330,34 @@
         </p:nvSpPr>
         <p:spPr>
           <a:xfrm>
-            <a:off x="406301" y="4459039"/>
-            <a:ext cx="3072854" cy="292001"/>
-          </a:xfrm>
-          <a:prstGeom prst="roundRect">
-            <a:avLst>
-              <a:gd name="adj" fmla="val 4344951"/>
-            </a:avLst>
-          </a:prstGeom>
-          <a:solidFill>
-            <a:srgbClr val="EDE7D7"/>
-          </a:solidFill>
-          <a:ln/>
-        </p:spPr>
-        <p:txBody>
-          <a:bodyPr wrap="square" rtlCol="0" anchor="ctr"/>
-          <a:lstStyle/>
-          <a:p>
-            <a:pPr indent="0" marL="0">
-              <a:buNone/>
-            </a:pPr>
-            <a:endParaRPr lang="en-US" dirty="0"/>
+            <a:off x="11047559" y="4946303"/>
+            <a:ext cx="255639" cy="180975"/>
+          </a:xfrm>
+          <a:prstGeom prst="rect">
+            <a:avLst/>
+          </a:prstGeom>
+          <a:noFill/>
+          <a:ln/>
+        </p:spPr>
+        <p:txBody>
+          <a:bodyPr wrap="square" lIns="0" tIns="0" rIns="0" bIns="0" rtlCol="0" anchor="t"/>
+          <a:lstStyle/>
+          <a:p>
+            <a:pPr algn="r" indent="0" marL="0">
+              <a:buNone/>
+            </a:pPr>
+            <a:r>
+              <a:rPr lang="en-US" sz="1000" dirty="0">
+                <a:solidFill>
+                  <a:srgbClr val="3A7D8C"/>
+                </a:solidFill>
+                <a:latin typeface="Noto Sans SC" pitchFamily="34" charset="0"/>
+                <a:ea typeface="Noto Sans SC" pitchFamily="34" charset="-122"/>
+                <a:cs typeface="Noto Sans SC" pitchFamily="34" charset="-120"/>
+              </a:rPr>
+              <a:t>→ 9</a:t>
+            </a:r>
+            <a:endParaRPr lang="en-US" sz="1000" dirty="0"/>
           </a:p>
         </p:txBody>
       </p:sp>
@@ -12318,8 +13369,8 @@
         </p:nvSpPr>
         <p:spPr>
           <a:xfrm>
-            <a:off x="533251" y="4509790"/>
-            <a:ext cx="2875333" cy="190500"/>
+            <a:off x="711101" y="5536704"/>
+            <a:ext cx="1254818" cy="161925"/>
           </a:xfrm>
           <a:prstGeom prst="rect">
             <a:avLst/>
@@ -12337,13 +13388,13 @@
             <a:r>
               <a:rPr lang="en-US" sz="900" dirty="0">
                 <a:solidFill>
-                  <a:srgbClr val="5B6677"/>
-                </a:solidFill>
-                <a:latin typeface="Noto Sans SC" pitchFamily="34" charset="0"/>
-                <a:ea typeface="Noto Sans SC" pitchFamily="34" charset="-122"/>
-                <a:cs typeface="Noto Sans SC" pitchFamily="34" charset="-120"/>
-              </a:rPr>
-              <a:t>📢 Choral response — everyone speaks every time</a:t>
+                  <a:srgbClr val="8B94A3"/>
+                </a:solidFill>
+                <a:latin typeface="Noto Sans SC" pitchFamily="34" charset="0"/>
+                <a:ea typeface="Noto Sans SC" pitchFamily="34" charset="-122"/>
+                <a:cs typeface="Noto Sans SC" pitchFamily="34" charset="-120"/>
+              </a:rPr>
+              <a:t>1 finger = Yes / Agree</a:t>
             </a:r>
             <a:endParaRPr lang="en-US" sz="900" dirty="0"/>
           </a:p>
@@ -12357,40 +13408,8 @@
         </p:nvSpPr>
         <p:spPr>
           <a:xfrm>
-            <a:off x="3682305" y="4459039"/>
-            <a:ext cx="2671465" cy="292001"/>
-          </a:xfrm>
-          <a:prstGeom prst="roundRect">
-            <a:avLst>
-              <a:gd name="adj" fmla="val 4344951"/>
-            </a:avLst>
-          </a:prstGeom>
-          <a:solidFill>
-            <a:srgbClr val="EDE7D7"/>
-          </a:solidFill>
-          <a:ln/>
-        </p:spPr>
-        <p:txBody>
-          <a:bodyPr wrap="square" rtlCol="0" anchor="ctr"/>
-          <a:lstStyle/>
-          <a:p>
-            <a:pPr indent="0" marL="0">
-              <a:buNone/>
-            </a:pPr>
-            <a:endParaRPr lang="en-US" dirty="0"/>
-          </a:p>
-        </p:txBody>
-      </p:sp>
-      <p:sp>
-        <p:nvSpPr>
-          <p:cNvPr id="29" name="Text 27"/>
-          <p:cNvSpPr/>
-          <p:nvPr/>
-        </p:nvSpPr>
-        <p:spPr>
-          <a:xfrm>
-            <a:off x="3809256" y="4509790"/>
-            <a:ext cx="2465915" cy="190500"/>
+            <a:off x="2093714" y="5536704"/>
+            <a:ext cx="1455807" cy="161925"/>
           </a:xfrm>
           <a:prstGeom prst="rect">
             <a:avLst/>
@@ -12408,13 +13427,13 @@
             <a:r>
               <a:rPr lang="en-US" sz="900" dirty="0">
                 <a:solidFill>
-                  <a:srgbClr val="5B6677"/>
-                </a:solidFill>
-                <a:latin typeface="Noto Sans SC" pitchFamily="34" charset="0"/>
-                <a:ea typeface="Noto Sans SC" pitchFamily="34" charset="-122"/>
-                <a:cs typeface="Noto Sans SC" pitchFamily="34" charset="-120"/>
-              </a:rPr>
-              <a:t>🔤 Scaffold: Number + 点 formula on board</a:t>
+                  <a:srgbClr val="8B94A3"/>
+                </a:solidFill>
+                <a:latin typeface="Noto Sans SC" pitchFamily="34" charset="0"/>
+                <a:ea typeface="Noto Sans SC" pitchFamily="34" charset="-122"/>
+                <a:cs typeface="Noto Sans SC" pitchFamily="34" charset="-120"/>
+              </a:rPr>
+              <a:t>2 fingers = No / Disagree</a:t>
             </a:r>
             <a:endParaRPr lang="en-US" sz="900" dirty="0"/>
           </a:p>
@@ -12422,78 +13441,7 @@
       </p:sp>
       <p:sp>
         <p:nvSpPr>
-          <p:cNvPr id="30" name="Text 28"/>
-          <p:cNvSpPr/>
-          <p:nvPr/>
-        </p:nvSpPr>
-        <p:spPr>
-          <a:xfrm>
-            <a:off x="6556921" y="4459039"/>
-            <a:ext cx="1900535" cy="292001"/>
-          </a:xfrm>
-          <a:prstGeom prst="roundRect">
-            <a:avLst>
-              <a:gd name="adj" fmla="val 4344951"/>
-            </a:avLst>
-          </a:prstGeom>
-          <a:solidFill>
-            <a:srgbClr val="EDE7D7"/>
-          </a:solidFill>
-          <a:ln/>
-        </p:spPr>
-        <p:txBody>
-          <a:bodyPr wrap="square" rtlCol="0" anchor="ctr"/>
-          <a:lstStyle/>
-          <a:p>
-            <a:pPr indent="0" marL="0">
-              <a:buNone/>
-            </a:pPr>
-            <a:endParaRPr lang="en-US" dirty="0"/>
-          </a:p>
-        </p:txBody>
-      </p:sp>
-      <p:sp>
-        <p:nvSpPr>
-          <p:cNvPr id="31" name="Text 29"/>
-          <p:cNvSpPr/>
-          <p:nvPr/>
-        </p:nvSpPr>
-        <p:spPr>
-          <a:xfrm>
-            <a:off x="6683871" y="4509790"/>
-            <a:ext cx="1679567" cy="190500"/>
-          </a:xfrm>
-          <a:prstGeom prst="rect">
-            <a:avLst/>
-          </a:prstGeom>
-          <a:noFill/>
-          <a:ln/>
-        </p:spPr>
-        <p:txBody>
-          <a:bodyPr wrap="square" lIns="0" tIns="0" rIns="0" bIns="0" rtlCol="0" anchor="t"/>
-          <a:lstStyle/>
-          <a:p>
-            <a:pPr algn="l" indent="0" marL="0">
-              <a:buNone/>
-            </a:pPr>
-            <a:r>
-              <a:rPr lang="en-US" sz="900" dirty="0">
-                <a:solidFill>
-                  <a:srgbClr val="5B6677"/>
-                </a:solidFill>
-                <a:latin typeface="Noto Sans SC" pitchFamily="34" charset="0"/>
-                <a:ea typeface="Noto Sans SC" pitchFamily="34" charset="-122"/>
-                <a:cs typeface="Noto Sans SC" pitchFamily="34" charset="-120"/>
-              </a:rPr>
-              <a:t>🚀 Extension: add 早上 / 下午</a:t>
-            </a:r>
-            <a:endParaRPr lang="en-US" sz="900" dirty="0"/>
-          </a:p>
-        </p:txBody>
-      </p:sp>
-      <p:sp>
-        <p:nvSpPr>
-          <p:cNvPr id="32" name="Shape 30"/>
+          <p:cNvPr id="29" name="Shape 27"/>
           <p:cNvSpPr/>
           <p:nvPr/>
         </p:nvSpPr>
@@ -12516,7 +13464,7 @@
       </p:sp>
       <p:sp>
         <p:nvSpPr>
-          <p:cNvPr id="33" name="Text 31"/>
+          <p:cNvPr id="30" name="Text 28"/>
           <p:cNvSpPr/>
           <p:nvPr/>
         </p:nvSpPr>
@@ -12686,7 +13634,7 @@
         <p:spPr>
           <a:xfrm>
             <a:off x="1433959" y="166688"/>
-            <a:ext cx="1456718" cy="123825"/>
+            <a:ext cx="1234324" cy="123825"/>
           </a:xfrm>
           <a:prstGeom prst="rect">
             <a:avLst/>
@@ -12710,7 +13658,7 @@
                 <a:ea typeface="Noto Sans SC" pitchFamily="34" charset="-122"/>
                 <a:cs typeface="Noto Sans SC" pitchFamily="34" charset="-120"/>
               </a:rPr>
-              <a:t>You Do · Clock Hands Challenge</a:t>
+              <a:t>We Do · Choral Clock Flash</a:t>
             </a:r>
             <a:endParaRPr lang="en-US" sz="700" dirty="0"/>
           </a:p>
@@ -12754,8 +13702,8 @@
         </p:nvSpPr>
         <p:spPr>
           <a:xfrm>
-            <a:off x="609600" y="1357610"/>
-            <a:ext cx="11192256" cy="142875"/>
+            <a:off x="406301" y="2259211"/>
+            <a:ext cx="11606986" cy="142875"/>
           </a:xfrm>
           <a:prstGeom prst="rect">
             <a:avLst/>
@@ -12779,7 +13727,7 @@
                 <a:ea typeface="Noto Sans SC" pitchFamily="34" charset="-122"/>
                 <a:cs typeface="Noto Sans SC" pitchFamily="34" charset="-120"/>
               </a:rPr>
-              <a:t>Activity 2 · 8 min — Textbook p85</a:t>
+              <a:t>Activity 1 · 8 min</a:t>
             </a:r>
             <a:endParaRPr lang="en-US" sz="800" dirty="0"/>
           </a:p>
@@ -12793,8 +13741,8 @@
         </p:nvSpPr>
         <p:spPr>
           <a:xfrm>
-            <a:off x="609600" y="1551236"/>
-            <a:ext cx="11192256" cy="352425"/>
+            <a:off x="406301" y="2452836"/>
+            <a:ext cx="11606986" cy="352425"/>
           </a:xfrm>
           <a:prstGeom prst="rect">
             <a:avLst/>
@@ -12818,7 +13766,7 @@
                 <a:ea typeface="Noto Serif SC" pitchFamily="34" charset="-122"/>
                 <a:cs typeface="Noto Serif SC" pitchFamily="34" charset="-120"/>
               </a:rPr>
-              <a:t>Clock Hands Challenge · 画钟表</a:t>
+              <a:t>Choral Clock Flash · 钟表闪卡</a:t>
             </a:r>
             <a:endParaRPr lang="en-US" sz="2000" dirty="0"/>
           </a:p>
@@ -12832,8 +13780,8 @@
         </p:nvSpPr>
         <p:spPr>
           <a:xfrm>
-            <a:off x="609600" y="1928961"/>
-            <a:ext cx="11192256" cy="161925"/>
+            <a:off x="406301" y="2830562"/>
+            <a:ext cx="11606986" cy="161925"/>
           </a:xfrm>
           <a:prstGeom prst="rect">
             <a:avLst/>
@@ -12857,7 +13805,7 @@
                 <a:ea typeface="Noto Sans SC" pitchFamily="34" charset="-122"/>
                 <a:cs typeface="Noto Sans SC" pitchFamily="34" charset="-120"/>
               </a:rPr>
-              <a:t>Draw the clock hands on your A4 paper. Hold it up!</a:t>
+              <a:t>Whole class chorally says the time. Start slow, speed up!</a:t>
             </a:r>
             <a:endParaRPr lang="en-US" sz="900" dirty="0"/>
           </a:p>
@@ -12871,8 +13819,40 @@
         </p:nvSpPr>
         <p:spPr>
           <a:xfrm>
-            <a:off x="556768" y="2268587"/>
-            <a:ext cx="5388915" cy="228600"/>
+            <a:off x="406301" y="3144887"/>
+            <a:ext cx="2768650" cy="501551"/>
+          </a:xfrm>
+          <a:prstGeom prst="roundRect">
+            <a:avLst>
+              <a:gd name="adj" fmla="val 20257"/>
+            </a:avLst>
+          </a:prstGeom>
+          <a:solidFill>
+            <a:srgbClr val="F6F2E8"/>
+          </a:solidFill>
+          <a:ln/>
+        </p:spPr>
+        <p:txBody>
+          <a:bodyPr wrap="square" rtlCol="0" anchor="ctr"/>
+          <a:lstStyle/>
+          <a:p>
+            <a:pPr indent="0" marL="0">
+              <a:buNone/>
+            </a:pPr>
+            <a:endParaRPr lang="en-US" dirty="0"/>
+          </a:p>
+        </p:txBody>
+      </p:sp>
+      <p:sp>
+        <p:nvSpPr>
+          <p:cNvPr id="11" name="Text 9"/>
+          <p:cNvSpPr/>
+          <p:nvPr/>
+        </p:nvSpPr>
+        <p:spPr>
+          <a:xfrm>
+            <a:off x="508104" y="3271838"/>
+            <a:ext cx="2565044" cy="247650"/>
           </a:xfrm>
           <a:prstGeom prst="rect">
             <a:avLst/>
@@ -12888,56 +13868,17 @@
               <a:buNone/>
             </a:pPr>
             <a:r>
-              <a:rPr lang="en-US" sz="1100" b="1" dirty="0">
-                <a:solidFill>
-                  <a:srgbClr val="3A7D8C"/>
-                </a:solidFill>
-                <a:latin typeface="Noto Sans SC" pitchFamily="34" charset="0"/>
-                <a:ea typeface="Noto Sans SC" pitchFamily="34" charset="-122"/>
-                <a:cs typeface="Noto Sans SC" pitchFamily="34" charset="-120"/>
-              </a:rPr>
-              <a:t>🎧 Listen &amp; Draw</a:t>
-            </a:r>
-            <a:endParaRPr lang="en-US" sz="1100" dirty="0"/>
-          </a:p>
-        </p:txBody>
-      </p:sp>
-      <p:sp>
-        <p:nvSpPr>
-          <p:cNvPr id="11" name="Text 9"/>
-          <p:cNvSpPr/>
-          <p:nvPr/>
-        </p:nvSpPr>
-        <p:spPr>
-          <a:xfrm>
-            <a:off x="556768" y="2624138"/>
-            <a:ext cx="5388915" cy="504825"/>
-          </a:xfrm>
-          <a:prstGeom prst="rect">
-            <a:avLst/>
-          </a:prstGeom>
-          <a:noFill/>
-          <a:ln/>
-        </p:spPr>
-        <p:txBody>
-          <a:bodyPr wrap="square" lIns="0" tIns="0" rIns="0" bIns="0" rtlCol="0" anchor="t"/>
-          <a:lstStyle/>
-          <a:p>
-            <a:pPr algn="ctr" indent="0" marL="0">
-              <a:buNone/>
-            </a:pPr>
-            <a:r>
-              <a:rPr lang="en-US" sz="2800" b="1" dirty="0">
-                <a:solidFill>
-                  <a:srgbClr val="C8943E"/>
+              <a:rPr lang="en-US" sz="1400" b="1" dirty="0">
+                <a:solidFill>
+                  <a:srgbClr val="1E2A38"/>
                 </a:solidFill>
                 <a:latin typeface="Noto Serif SC" pitchFamily="34" charset="0"/>
                 <a:ea typeface="Noto Serif SC" pitchFamily="34" charset="-122"/>
                 <a:cs typeface="Noto Serif SC" pitchFamily="34" charset="-120"/>
               </a:rPr>
-              <a:t>三点</a:t>
-            </a:r>
-            <a:endParaRPr lang="en-US" sz="2800" dirty="0"/>
+              <a:t>一点</a:t>
+            </a:r>
+            <a:endParaRPr lang="en-US" sz="1400" dirty="0"/>
           </a:p>
         </p:txBody>
       </p:sp>
@@ -12949,59 +13890,375 @@
         </p:nvSpPr>
         <p:spPr>
           <a:xfrm>
-            <a:off x="556768" y="3179713"/>
-            <a:ext cx="5388915" cy="180975"/>
-          </a:xfrm>
-          <a:prstGeom prst="rect">
-            <a:avLst/>
-          </a:prstGeom>
-          <a:noFill/>
-          <a:ln/>
-        </p:spPr>
-        <p:txBody>
-          <a:bodyPr wrap="square" lIns="0" tIns="0" rIns="0" bIns="0" rtlCol="0" anchor="t"/>
-          <a:lstStyle/>
-          <a:p>
-            <a:pPr algn="ctr" indent="0" marL="0">
-              <a:buNone/>
-            </a:pPr>
-            <a:r>
-              <a:rPr lang="en-US" sz="1000" dirty="0">
-                <a:solidFill>
-                  <a:srgbClr val="8B94A3"/>
-                </a:solidFill>
-                <a:latin typeface="Noto Sans SC" pitchFamily="34" charset="0"/>
-                <a:ea typeface="Noto Sans SC" pitchFamily="34" charset="-122"/>
-                <a:cs typeface="Noto Sans SC" pitchFamily="34" charset="-120"/>
-              </a:rPr>
-              <a:t>3:00</a:t>
-            </a:r>
-            <a:endParaRPr lang="en-US" sz="1000" dirty="0"/>
-          </a:p>
-        </p:txBody>
-      </p:sp>
-      <p:sp>
-        <p:nvSpPr>
-          <p:cNvPr id="13" name="Text 11"/>
-          <p:cNvSpPr/>
-          <p:nvPr/>
-        </p:nvSpPr>
-        <p:spPr>
-          <a:xfrm>
-            <a:off x="2597200" y="3487638"/>
-            <a:ext cx="1308050" cy="1308050"/>
+            <a:off x="3276451" y="3144887"/>
+            <a:ext cx="2768798" cy="501551"/>
           </a:xfrm>
           <a:prstGeom prst="roundRect">
             <a:avLst>
-              <a:gd name="adj" fmla="val 69906"/>
+              <a:gd name="adj" fmla="val 20257"/>
             </a:avLst>
           </a:prstGeom>
           <a:solidFill>
-            <a:srgbClr val="FFFFFF"/>
+            <a:srgbClr val="F6F2E8"/>
+          </a:solidFill>
+          <a:ln/>
+        </p:spPr>
+        <p:txBody>
+          <a:bodyPr wrap="square" rtlCol="0" anchor="ctr"/>
+          <a:lstStyle/>
+          <a:p>
+            <a:pPr indent="0" marL="0">
+              <a:buNone/>
+            </a:pPr>
+            <a:endParaRPr lang="en-US" dirty="0"/>
+          </a:p>
+        </p:txBody>
+      </p:sp>
+      <p:sp>
+        <p:nvSpPr>
+          <p:cNvPr id="13" name="Text 11"/>
+          <p:cNvSpPr/>
+          <p:nvPr/>
+        </p:nvSpPr>
+        <p:spPr>
+          <a:xfrm>
+            <a:off x="3378253" y="3271838"/>
+            <a:ext cx="2565196" cy="247650"/>
+          </a:xfrm>
+          <a:prstGeom prst="rect">
+            <a:avLst/>
+          </a:prstGeom>
+          <a:noFill/>
+          <a:ln/>
+        </p:spPr>
+        <p:txBody>
+          <a:bodyPr wrap="square" lIns="0" tIns="0" rIns="0" bIns="0" rtlCol="0" anchor="t"/>
+          <a:lstStyle/>
+          <a:p>
+            <a:pPr algn="ctr" indent="0" marL="0">
+              <a:buNone/>
+            </a:pPr>
+            <a:r>
+              <a:rPr lang="en-US" sz="1400" b="1" dirty="0">
+                <a:solidFill>
+                  <a:srgbClr val="1E2A38"/>
+                </a:solidFill>
+                <a:latin typeface="Noto Serif SC" pitchFamily="34" charset="0"/>
+                <a:ea typeface="Noto Serif SC" pitchFamily="34" charset="-122"/>
+                <a:cs typeface="Noto Serif SC" pitchFamily="34" charset="-120"/>
+              </a:rPr>
+              <a:t>三点</a:t>
+            </a:r>
+            <a:endParaRPr lang="en-US" sz="1400" dirty="0"/>
+          </a:p>
+        </p:txBody>
+      </p:sp>
+      <p:sp>
+        <p:nvSpPr>
+          <p:cNvPr id="14" name="Text 12"/>
+          <p:cNvSpPr/>
+          <p:nvPr/>
+        </p:nvSpPr>
+        <p:spPr>
+          <a:xfrm>
+            <a:off x="6146750" y="3144887"/>
+            <a:ext cx="2768650" cy="501551"/>
+          </a:xfrm>
+          <a:prstGeom prst="roundRect">
+            <a:avLst>
+              <a:gd name="adj" fmla="val 20257"/>
+            </a:avLst>
+          </a:prstGeom>
+          <a:solidFill>
+            <a:srgbClr val="F6F2E8"/>
+          </a:solidFill>
+          <a:ln/>
+        </p:spPr>
+        <p:txBody>
+          <a:bodyPr wrap="square" rtlCol="0" anchor="ctr"/>
+          <a:lstStyle/>
+          <a:p>
+            <a:pPr indent="0" marL="0">
+              <a:buNone/>
+            </a:pPr>
+            <a:endParaRPr lang="en-US" dirty="0"/>
+          </a:p>
+        </p:txBody>
+      </p:sp>
+      <p:sp>
+        <p:nvSpPr>
+          <p:cNvPr id="15" name="Text 13"/>
+          <p:cNvSpPr/>
+          <p:nvPr/>
+        </p:nvSpPr>
+        <p:spPr>
+          <a:xfrm>
+            <a:off x="6248553" y="3271838"/>
+            <a:ext cx="2565044" cy="247650"/>
+          </a:xfrm>
+          <a:prstGeom prst="rect">
+            <a:avLst/>
+          </a:prstGeom>
+          <a:noFill/>
+          <a:ln/>
+        </p:spPr>
+        <p:txBody>
+          <a:bodyPr wrap="square" lIns="0" tIns="0" rIns="0" bIns="0" rtlCol="0" anchor="t"/>
+          <a:lstStyle/>
+          <a:p>
+            <a:pPr algn="ctr" indent="0" marL="0">
+              <a:buNone/>
+            </a:pPr>
+            <a:r>
+              <a:rPr lang="en-US" sz="1400" b="1" dirty="0">
+                <a:solidFill>
+                  <a:srgbClr val="1E2A38"/>
+                </a:solidFill>
+                <a:latin typeface="Noto Serif SC" pitchFamily="34" charset="0"/>
+                <a:ea typeface="Noto Serif SC" pitchFamily="34" charset="-122"/>
+                <a:cs typeface="Noto Serif SC" pitchFamily="34" charset="-120"/>
+              </a:rPr>
+              <a:t>五点</a:t>
+            </a:r>
+            <a:endParaRPr lang="en-US" sz="1400" dirty="0"/>
+          </a:p>
+        </p:txBody>
+      </p:sp>
+      <p:sp>
+        <p:nvSpPr>
+          <p:cNvPr id="16" name="Text 14"/>
+          <p:cNvSpPr/>
+          <p:nvPr/>
+        </p:nvSpPr>
+        <p:spPr>
+          <a:xfrm>
+            <a:off x="9016901" y="3144887"/>
+            <a:ext cx="2768798" cy="501551"/>
+          </a:xfrm>
+          <a:prstGeom prst="roundRect">
+            <a:avLst>
+              <a:gd name="adj" fmla="val 20257"/>
+            </a:avLst>
+          </a:prstGeom>
+          <a:solidFill>
+            <a:srgbClr val="F6F2E8"/>
+          </a:solidFill>
+          <a:ln/>
+        </p:spPr>
+        <p:txBody>
+          <a:bodyPr wrap="square" rtlCol="0" anchor="ctr"/>
+          <a:lstStyle/>
+          <a:p>
+            <a:pPr indent="0" marL="0">
+              <a:buNone/>
+            </a:pPr>
+            <a:endParaRPr lang="en-US" dirty="0"/>
+          </a:p>
+        </p:txBody>
+      </p:sp>
+      <p:sp>
+        <p:nvSpPr>
+          <p:cNvPr id="17" name="Text 15"/>
+          <p:cNvSpPr/>
+          <p:nvPr/>
+        </p:nvSpPr>
+        <p:spPr>
+          <a:xfrm>
+            <a:off x="9118702" y="3271838"/>
+            <a:ext cx="2565196" cy="247650"/>
+          </a:xfrm>
+          <a:prstGeom prst="rect">
+            <a:avLst/>
+          </a:prstGeom>
+          <a:noFill/>
+          <a:ln/>
+        </p:spPr>
+        <p:txBody>
+          <a:bodyPr wrap="square" lIns="0" tIns="0" rIns="0" bIns="0" rtlCol="0" anchor="t"/>
+          <a:lstStyle/>
+          <a:p>
+            <a:pPr algn="ctr" indent="0" marL="0">
+              <a:buNone/>
+            </a:pPr>
+            <a:r>
+              <a:rPr lang="en-US" sz="1400" b="1" dirty="0">
+                <a:solidFill>
+                  <a:srgbClr val="1E2A38"/>
+                </a:solidFill>
+                <a:latin typeface="Noto Serif SC" pitchFamily="34" charset="0"/>
+                <a:ea typeface="Noto Serif SC" pitchFamily="34" charset="-122"/>
+                <a:cs typeface="Noto Serif SC" pitchFamily="34" charset="-120"/>
+              </a:rPr>
+              <a:t>七点</a:t>
+            </a:r>
+            <a:endParaRPr lang="en-US" sz="1400" dirty="0"/>
+          </a:p>
+        </p:txBody>
+      </p:sp>
+      <p:sp>
+        <p:nvSpPr>
+          <p:cNvPr id="18" name="Text 16"/>
+          <p:cNvSpPr/>
+          <p:nvPr/>
+        </p:nvSpPr>
+        <p:spPr>
+          <a:xfrm>
+            <a:off x="406301" y="3747939"/>
+            <a:ext cx="2768650" cy="558701"/>
+          </a:xfrm>
+          <a:prstGeom prst="roundRect">
+            <a:avLst>
+              <a:gd name="adj" fmla="val 18185"/>
+            </a:avLst>
+          </a:prstGeom>
+          <a:solidFill>
+            <a:srgbClr val="F6F2E8"/>
+          </a:solidFill>
+          <a:ln/>
+        </p:spPr>
+        <p:txBody>
+          <a:bodyPr wrap="square" rtlCol="0" anchor="ctr"/>
+          <a:lstStyle/>
+          <a:p>
+            <a:pPr indent="0" marL="0">
+              <a:buNone/>
+            </a:pPr>
+            <a:endParaRPr lang="en-US" dirty="0"/>
+          </a:p>
+        </p:txBody>
+      </p:sp>
+      <p:sp>
+        <p:nvSpPr>
+          <p:cNvPr id="19" name="Text 17"/>
+          <p:cNvSpPr/>
+          <p:nvPr/>
+        </p:nvSpPr>
+        <p:spPr>
+          <a:xfrm>
+            <a:off x="508104" y="3874889"/>
+            <a:ext cx="2565044" cy="247650"/>
+          </a:xfrm>
+          <a:prstGeom prst="rect">
+            <a:avLst/>
+          </a:prstGeom>
+          <a:noFill/>
+          <a:ln/>
+        </p:spPr>
+        <p:txBody>
+          <a:bodyPr wrap="square" lIns="0" tIns="0" rIns="0" bIns="0" rtlCol="0" anchor="t"/>
+          <a:lstStyle/>
+          <a:p>
+            <a:pPr algn="ctr" indent="0" marL="0">
+              <a:buNone/>
+            </a:pPr>
+            <a:r>
+              <a:rPr lang="en-US" sz="1400" b="1" dirty="0">
+                <a:solidFill>
+                  <a:srgbClr val="1E2A38"/>
+                </a:solidFill>
+                <a:latin typeface="Noto Serif SC" pitchFamily="34" charset="0"/>
+                <a:ea typeface="Noto Serif SC" pitchFamily="34" charset="-122"/>
+                <a:cs typeface="Noto Serif SC" pitchFamily="34" charset="-120"/>
+              </a:rPr>
+              <a:t>九点</a:t>
+            </a:r>
+            <a:endParaRPr lang="en-US" sz="1400" dirty="0"/>
+          </a:p>
+        </p:txBody>
+      </p:sp>
+      <p:sp>
+        <p:nvSpPr>
+          <p:cNvPr id="20" name="Text 18"/>
+          <p:cNvSpPr/>
+          <p:nvPr/>
+        </p:nvSpPr>
+        <p:spPr>
+          <a:xfrm>
+            <a:off x="3276451" y="3747939"/>
+            <a:ext cx="2768798" cy="558701"/>
+          </a:xfrm>
+          <a:prstGeom prst="roundRect">
+            <a:avLst>
+              <a:gd name="adj" fmla="val 18185"/>
+            </a:avLst>
+          </a:prstGeom>
+          <a:solidFill>
+            <a:srgbClr val="F6F2E8"/>
+          </a:solidFill>
+          <a:ln/>
+        </p:spPr>
+        <p:txBody>
+          <a:bodyPr wrap="square" rtlCol="0" anchor="ctr"/>
+          <a:lstStyle/>
+          <a:p>
+            <a:pPr indent="0" marL="0">
+              <a:buNone/>
+            </a:pPr>
+            <a:endParaRPr lang="en-US" dirty="0"/>
+          </a:p>
+        </p:txBody>
+      </p:sp>
+      <p:sp>
+        <p:nvSpPr>
+          <p:cNvPr id="21" name="Text 19"/>
+          <p:cNvSpPr/>
+          <p:nvPr/>
+        </p:nvSpPr>
+        <p:spPr>
+          <a:xfrm>
+            <a:off x="3378253" y="3874889"/>
+            <a:ext cx="2565196" cy="247650"/>
+          </a:xfrm>
+          <a:prstGeom prst="rect">
+            <a:avLst/>
+          </a:prstGeom>
+          <a:noFill/>
+          <a:ln/>
+        </p:spPr>
+        <p:txBody>
+          <a:bodyPr wrap="square" lIns="0" tIns="0" rIns="0" bIns="0" rtlCol="0" anchor="t"/>
+          <a:lstStyle/>
+          <a:p>
+            <a:pPr algn="ctr" indent="0" marL="0">
+              <a:buNone/>
+            </a:pPr>
+            <a:r>
+              <a:rPr lang="en-US" sz="1400" b="1" dirty="0">
+                <a:solidFill>
+                  <a:srgbClr val="1E2A38"/>
+                </a:solidFill>
+                <a:latin typeface="Noto Serif SC" pitchFamily="34" charset="0"/>
+                <a:ea typeface="Noto Serif SC" pitchFamily="34" charset="-122"/>
+                <a:cs typeface="Noto Serif SC" pitchFamily="34" charset="-120"/>
+              </a:rPr>
+              <a:t>十一点</a:t>
+            </a:r>
+            <a:endParaRPr lang="en-US" sz="1400" dirty="0"/>
+          </a:p>
+        </p:txBody>
+      </p:sp>
+      <p:sp>
+        <p:nvSpPr>
+          <p:cNvPr id="22" name="Text 20"/>
+          <p:cNvSpPr/>
+          <p:nvPr/>
+        </p:nvSpPr>
+        <p:spPr>
+          <a:xfrm>
+            <a:off x="6146750" y="3747939"/>
+            <a:ext cx="2768650" cy="558701"/>
+          </a:xfrm>
+          <a:prstGeom prst="roundRect">
+            <a:avLst>
+              <a:gd name="adj" fmla="val 18185"/>
+            </a:avLst>
+          </a:prstGeom>
+          <a:solidFill>
+            <a:srgbClr val="F6F2E8"/>
           </a:solidFill>
           <a:ln w="19050">
             <a:solidFill>
-              <a:srgbClr val="C8943E"/>
+              <a:srgbClr val="D4756B"/>
             </a:solidFill>
           </a:ln>
         </p:spPr>
@@ -13018,14 +14275,14 @@
       </p:sp>
       <p:sp>
         <p:nvSpPr>
-          <p:cNvPr id="14" name="Text 12"/>
-          <p:cNvSpPr/>
-          <p:nvPr/>
-        </p:nvSpPr>
-        <p:spPr>
-          <a:xfrm>
-            <a:off x="556768" y="4897189"/>
-            <a:ext cx="5388915" cy="142875"/>
+          <p:cNvPr id="23" name="Text 21"/>
+          <p:cNvSpPr/>
+          <p:nvPr/>
+        </p:nvSpPr>
+        <p:spPr>
+          <a:xfrm>
+            <a:off x="6267984" y="3893939"/>
+            <a:ext cx="2526182" cy="266700"/>
           </a:xfrm>
           <a:prstGeom prst="rect">
             <a:avLst/>
@@ -13038,163 +14295,37 @@
           <a:lstStyle/>
           <a:p>
             <a:pPr algn="ctr" indent="0" marL="0">
-              <a:spcBef>
-                <a:spcPts val="800"/>
-              </a:spcBef>
-              <a:spcAft>
-                <a:spcPts val="800"/>
-              </a:spcAft>
-              <a:buNone/>
-            </a:pPr>
-            <a:r>
-              <a:rPr lang="en-US" sz="800" dirty="0">
-                <a:solidFill>
-                  <a:srgbClr val="8B94A3"/>
-                </a:solidFill>
-                <a:latin typeface="Noto Sans SC" pitchFamily="34" charset="0"/>
-                <a:ea typeface="Noto Sans SC" pitchFamily="34" charset="-122"/>
-                <a:cs typeface="Noto Sans SC" pitchFamily="34" charset="-120"/>
-              </a:rPr>
-              <a:t>Teacher says the time → students DRAW the hands</a:t>
-            </a:r>
-            <a:endParaRPr lang="en-US" sz="800" dirty="0"/>
-          </a:p>
-        </p:txBody>
-      </p:sp>
-      <p:sp>
-        <p:nvSpPr>
-          <p:cNvPr id="15" name="Text 13"/>
-          <p:cNvSpPr/>
-          <p:nvPr/>
-        </p:nvSpPr>
-        <p:spPr>
-          <a:xfrm>
-            <a:off x="6246318" y="2268587"/>
-            <a:ext cx="5388915" cy="228600"/>
-          </a:xfrm>
-          <a:prstGeom prst="rect">
-            <a:avLst/>
-          </a:prstGeom>
-          <a:noFill/>
-          <a:ln/>
-        </p:spPr>
-        <p:txBody>
-          <a:bodyPr wrap="square" lIns="0" tIns="0" rIns="0" bIns="0" rtlCol="0" anchor="t"/>
-          <a:lstStyle/>
-          <a:p>
-            <a:pPr algn="ctr" indent="0" marL="0">
-              <a:buNone/>
-            </a:pPr>
-            <a:r>
-              <a:rPr lang="en-US" sz="1100" b="1" dirty="0">
-                <a:solidFill>
-                  <a:srgbClr val="3A7D8C"/>
-                </a:solidFill>
-                <a:latin typeface="Noto Sans SC" pitchFamily="34" charset="0"/>
-                <a:ea typeface="Noto Sans SC" pitchFamily="34" charset="-122"/>
-                <a:cs typeface="Noto Sans SC" pitchFamily="34" charset="-120"/>
-              </a:rPr>
-              <a:t>👀 See &amp; Write</a:t>
-            </a:r>
-            <a:endParaRPr lang="en-US" sz="1100" dirty="0"/>
-          </a:p>
-        </p:txBody>
-      </p:sp>
-      <p:sp>
-        <p:nvSpPr>
-          <p:cNvPr id="16" name="Text 14"/>
-          <p:cNvSpPr/>
-          <p:nvPr/>
-        </p:nvSpPr>
-        <p:spPr>
-          <a:xfrm>
-            <a:off x="8286750" y="2624138"/>
-            <a:ext cx="1308050" cy="1308050"/>
+              <a:buNone/>
+            </a:pPr>
+            <a:r>
+              <a:rPr lang="en-US" sz="1400" b="1" dirty="0">
+                <a:solidFill>
+                  <a:srgbClr val="D4756B"/>
+                </a:solidFill>
+                <a:latin typeface="Noto Serif SC" pitchFamily="34" charset="0"/>
+                <a:ea typeface="Noto Serif SC" pitchFamily="34" charset="-122"/>
+                <a:cs typeface="Noto Serif SC" pitchFamily="34" charset="-120"/>
+              </a:rPr>
+              <a:t>两点 ⚠️</a:t>
+            </a:r>
+            <a:endParaRPr lang="en-US" sz="1400" dirty="0"/>
+          </a:p>
+        </p:txBody>
+      </p:sp>
+      <p:sp>
+        <p:nvSpPr>
+          <p:cNvPr id="24" name="Text 22"/>
+          <p:cNvSpPr/>
+          <p:nvPr/>
+        </p:nvSpPr>
+        <p:spPr>
+          <a:xfrm>
+            <a:off x="9016901" y="3747939"/>
+            <a:ext cx="2768798" cy="558701"/>
           </a:xfrm>
           <a:prstGeom prst="roundRect">
             <a:avLst>
-              <a:gd name="adj" fmla="val 69906"/>
-            </a:avLst>
-          </a:prstGeom>
-          <a:solidFill>
-            <a:srgbClr val="FFFFFF"/>
-          </a:solidFill>
-          <a:ln w="19050">
-            <a:solidFill>
-              <a:srgbClr val="C8943E"/>
-            </a:solidFill>
-          </a:ln>
-        </p:spPr>
-        <p:txBody>
-          <a:bodyPr wrap="square" rtlCol="0" anchor="ctr"/>
-          <a:lstStyle/>
-          <a:p>
-            <a:pPr indent="0" marL="0">
-              <a:buNone/>
-            </a:pPr>
-            <a:endParaRPr lang="en-US" dirty="0"/>
-          </a:p>
-        </p:txBody>
-      </p:sp>
-      <p:sp>
-        <p:nvSpPr>
-          <p:cNvPr id="17" name="Text 15"/>
-          <p:cNvSpPr/>
-          <p:nvPr/>
-        </p:nvSpPr>
-        <p:spPr>
-          <a:xfrm>
-            <a:off x="6246318" y="4033689"/>
-            <a:ext cx="5388915" cy="142875"/>
-          </a:xfrm>
-          <a:prstGeom prst="rect">
-            <a:avLst/>
-          </a:prstGeom>
-          <a:noFill/>
-          <a:ln/>
-        </p:spPr>
-        <p:txBody>
-          <a:bodyPr wrap="square" lIns="0" tIns="0" rIns="0" bIns="0" rtlCol="0" anchor="t"/>
-          <a:lstStyle/>
-          <a:p>
-            <a:pPr algn="ctr" indent="0" marL="0">
-              <a:spcBef>
-                <a:spcPts val="800"/>
-              </a:spcBef>
-              <a:spcAft>
-                <a:spcPts val="800"/>
-              </a:spcAft>
-              <a:buNone/>
-            </a:pPr>
-            <a:r>
-              <a:rPr lang="en-US" sz="800" dirty="0">
-                <a:solidFill>
-                  <a:srgbClr val="8B94A3"/>
-                </a:solidFill>
-                <a:latin typeface="Noto Sans SC" pitchFamily="34" charset="0"/>
-                <a:ea typeface="Noto Sans SC" pitchFamily="34" charset="-122"/>
-                <a:cs typeface="Noto Sans SC" pitchFamily="34" charset="-120"/>
-              </a:rPr>
-              <a:t>Teacher shows clock → students WRITE the Chinese</a:t>
-            </a:r>
-            <a:endParaRPr lang="en-US" sz="800" dirty="0"/>
-          </a:p>
-        </p:txBody>
-      </p:sp>
-      <p:sp>
-        <p:nvSpPr>
-          <p:cNvPr id="18" name="Text 16"/>
-          <p:cNvSpPr/>
-          <p:nvPr/>
-        </p:nvSpPr>
-        <p:spPr>
-          <a:xfrm>
-            <a:off x="3169593" y="5319266"/>
-            <a:ext cx="1846957" cy="333375"/>
-          </a:xfrm>
-          <a:prstGeom prst="roundRect">
-            <a:avLst>
-              <a:gd name="adj" fmla="val 3805714"/>
+              <a:gd name="adj" fmla="val 18185"/>
             </a:avLst>
           </a:prstGeom>
           <a:solidFill>
@@ -13215,22 +14346,61 @@
       </p:sp>
       <p:sp>
         <p:nvSpPr>
-          <p:cNvPr id="19" name="Text 17"/>
-          <p:cNvSpPr/>
-          <p:nvPr/>
-        </p:nvSpPr>
-        <p:spPr>
-          <a:xfrm>
-            <a:off x="3321993" y="5397103"/>
-            <a:ext cx="177701" cy="177701"/>
+          <p:cNvPr id="25" name="Text 23"/>
+          <p:cNvSpPr/>
+          <p:nvPr/>
+        </p:nvSpPr>
+        <p:spPr>
+          <a:xfrm>
+            <a:off x="9118702" y="3874889"/>
+            <a:ext cx="2565196" cy="247650"/>
+          </a:xfrm>
+          <a:prstGeom prst="rect">
+            <a:avLst/>
+          </a:prstGeom>
+          <a:noFill/>
+          <a:ln/>
+        </p:spPr>
+        <p:txBody>
+          <a:bodyPr wrap="square" lIns="0" tIns="0" rIns="0" bIns="0" rtlCol="0" anchor="t"/>
+          <a:lstStyle/>
+          <a:p>
+            <a:pPr algn="ctr" indent="0" marL="0">
+              <a:buNone/>
+            </a:pPr>
+            <a:r>
+              <a:rPr lang="en-US" sz="1400" b="1" dirty="0">
+                <a:solidFill>
+                  <a:srgbClr val="1E2A38"/>
+                </a:solidFill>
+                <a:latin typeface="Noto Serif SC" pitchFamily="34" charset="0"/>
+                <a:ea typeface="Noto Serif SC" pitchFamily="34" charset="-122"/>
+                <a:cs typeface="Noto Serif SC" pitchFamily="34" charset="-120"/>
+              </a:rPr>
+              <a:t>十二点</a:t>
+            </a:r>
+            <a:endParaRPr lang="en-US" sz="1400" dirty="0"/>
+          </a:p>
+        </p:txBody>
+      </p:sp>
+      <p:sp>
+        <p:nvSpPr>
+          <p:cNvPr id="26" name="Text 24"/>
+          <p:cNvSpPr/>
+          <p:nvPr/>
+        </p:nvSpPr>
+        <p:spPr>
+          <a:xfrm>
+            <a:off x="406301" y="4459039"/>
+            <a:ext cx="3072854" cy="292001"/>
           </a:xfrm>
           <a:prstGeom prst="roundRect">
             <a:avLst>
-              <a:gd name="adj" fmla="val 514572"/>
+              <a:gd name="adj" fmla="val 4344951"/>
             </a:avLst>
           </a:prstGeom>
           <a:solidFill>
-            <a:srgbClr val="C8943E"/>
+            <a:srgbClr val="EDE7D7"/>
           </a:solidFill>
           <a:ln/>
         </p:spPr>
@@ -13247,14 +14417,14 @@
       </p:sp>
       <p:sp>
         <p:nvSpPr>
-          <p:cNvPr id="20" name="Text 18"/>
-          <p:cNvSpPr/>
-          <p:nvPr/>
-        </p:nvSpPr>
-        <p:spPr>
-          <a:xfrm>
-            <a:off x="3390602" y="5424041"/>
-            <a:ext cx="41139" cy="123825"/>
+          <p:cNvPr id="27" name="Text 25"/>
+          <p:cNvSpPr/>
+          <p:nvPr/>
+        </p:nvSpPr>
+        <p:spPr>
+          <a:xfrm>
+            <a:off x="533251" y="4509790"/>
+            <a:ext cx="2875333" cy="190500"/>
           </a:xfrm>
           <a:prstGeom prst="rect">
             <a:avLst/>
@@ -13270,46 +14440,7 @@
               <a:buNone/>
             </a:pPr>
             <a:r>
-              <a:rPr lang="en-US" sz="700" b="1" dirty="0">
-                <a:solidFill>
-                  <a:srgbClr val="FFFFFF"/>
-                </a:solidFill>
-                <a:latin typeface="Noto Sans SC" pitchFamily="34" charset="0"/>
-                <a:ea typeface="Noto Sans SC" pitchFamily="34" charset="-122"/>
-                <a:cs typeface="Noto Sans SC" pitchFamily="34" charset="-120"/>
-              </a:rPr>
-              <a:t>1</a:t>
-            </a:r>
-            <a:endParaRPr lang="en-US" sz="700" dirty="0"/>
-          </a:p>
-        </p:txBody>
-      </p:sp>
-      <p:sp>
-        <p:nvSpPr>
-          <p:cNvPr id="21" name="Text 19"/>
-          <p:cNvSpPr/>
-          <p:nvPr/>
-        </p:nvSpPr>
-        <p:spPr>
-          <a:xfrm>
-            <a:off x="3575893" y="5395466"/>
-            <a:ext cx="1314021" cy="180975"/>
-          </a:xfrm>
-          <a:prstGeom prst="rect">
-            <a:avLst/>
-          </a:prstGeom>
-          <a:noFill/>
-          <a:ln/>
-        </p:spPr>
-        <p:txBody>
-          <a:bodyPr wrap="square" lIns="0" tIns="0" rIns="0" bIns="0" rtlCol="0" anchor="t"/>
-          <a:lstStyle/>
-          <a:p>
-            <a:pPr algn="l" indent="0" marL="0">
-              <a:buNone/>
-            </a:pPr>
-            <a:r>
-              <a:rPr lang="en-US" sz="1000" dirty="0">
+              <a:rPr lang="en-US" sz="900" dirty="0">
                 <a:solidFill>
                   <a:srgbClr val="5B6677"/>
                 </a:solidFill>
@@ -13317,30 +14448,30 @@
                 <a:ea typeface="Noto Sans SC" pitchFamily="34" charset="-122"/>
                 <a:cs typeface="Noto Sans SC" pitchFamily="34" charset="-120"/>
               </a:rPr>
-              <a:t>Listen to the teacher</a:t>
-            </a:r>
-            <a:endParaRPr lang="en-US" sz="1000" dirty="0"/>
-          </a:p>
-        </p:txBody>
-      </p:sp>
-      <p:sp>
-        <p:nvSpPr>
-          <p:cNvPr id="22" name="Text 20"/>
-          <p:cNvSpPr/>
-          <p:nvPr/>
-        </p:nvSpPr>
-        <p:spPr>
-          <a:xfrm>
-            <a:off x="5321350" y="5319266"/>
-            <a:ext cx="2190304" cy="333375"/>
+              <a:t>📢 Choral response — everyone speaks every time</a:t>
+            </a:r>
+            <a:endParaRPr lang="en-US" sz="900" dirty="0"/>
+          </a:p>
+        </p:txBody>
+      </p:sp>
+      <p:sp>
+        <p:nvSpPr>
+          <p:cNvPr id="28" name="Text 26"/>
+          <p:cNvSpPr/>
+          <p:nvPr/>
+        </p:nvSpPr>
+        <p:spPr>
+          <a:xfrm>
+            <a:off x="3682305" y="4459039"/>
+            <a:ext cx="2671465" cy="292001"/>
           </a:xfrm>
           <a:prstGeom prst="roundRect">
             <a:avLst>
-              <a:gd name="adj" fmla="val 3805714"/>
+              <a:gd name="adj" fmla="val 4344951"/>
             </a:avLst>
           </a:prstGeom>
           <a:solidFill>
-            <a:srgbClr val="F6F2E8"/>
+            <a:srgbClr val="EDE7D7"/>
           </a:solidFill>
           <a:ln/>
         </p:spPr>
@@ -13357,22 +14488,61 @@
       </p:sp>
       <p:sp>
         <p:nvSpPr>
-          <p:cNvPr id="23" name="Text 21"/>
-          <p:cNvSpPr/>
-          <p:nvPr/>
-        </p:nvSpPr>
-        <p:spPr>
-          <a:xfrm>
-            <a:off x="5473750" y="5397103"/>
-            <a:ext cx="177701" cy="177701"/>
+          <p:cNvPr id="29" name="Text 27"/>
+          <p:cNvSpPr/>
+          <p:nvPr/>
+        </p:nvSpPr>
+        <p:spPr>
+          <a:xfrm>
+            <a:off x="3809256" y="4509790"/>
+            <a:ext cx="2465915" cy="190500"/>
+          </a:xfrm>
+          <a:prstGeom prst="rect">
+            <a:avLst/>
+          </a:prstGeom>
+          <a:noFill/>
+          <a:ln/>
+        </p:spPr>
+        <p:txBody>
+          <a:bodyPr wrap="square" lIns="0" tIns="0" rIns="0" bIns="0" rtlCol="0" anchor="t"/>
+          <a:lstStyle/>
+          <a:p>
+            <a:pPr algn="l" indent="0" marL="0">
+              <a:buNone/>
+            </a:pPr>
+            <a:r>
+              <a:rPr lang="en-US" sz="900" dirty="0">
+                <a:solidFill>
+                  <a:srgbClr val="5B6677"/>
+                </a:solidFill>
+                <a:latin typeface="Noto Sans SC" pitchFamily="34" charset="0"/>
+                <a:ea typeface="Noto Sans SC" pitchFamily="34" charset="-122"/>
+                <a:cs typeface="Noto Sans SC" pitchFamily="34" charset="-120"/>
+              </a:rPr>
+              <a:t>🔤 Scaffold: Number + 点 formula on board</a:t>
+            </a:r>
+            <a:endParaRPr lang="en-US" sz="900" dirty="0"/>
+          </a:p>
+        </p:txBody>
+      </p:sp>
+      <p:sp>
+        <p:nvSpPr>
+          <p:cNvPr id="30" name="Text 28"/>
+          <p:cNvSpPr/>
+          <p:nvPr/>
+        </p:nvSpPr>
+        <p:spPr>
+          <a:xfrm>
+            <a:off x="6556921" y="4459039"/>
+            <a:ext cx="1900535" cy="292001"/>
           </a:xfrm>
           <a:prstGeom prst="roundRect">
             <a:avLst>
-              <a:gd name="adj" fmla="val 514572"/>
+              <a:gd name="adj" fmla="val 4344951"/>
             </a:avLst>
           </a:prstGeom>
           <a:solidFill>
-            <a:srgbClr val="C8943E"/>
+            <a:srgbClr val="EDE7D7"/>
           </a:solidFill>
           <a:ln/>
         </p:spPr>
@@ -13389,14 +14559,14 @@
       </p:sp>
       <p:sp>
         <p:nvSpPr>
-          <p:cNvPr id="24" name="Text 22"/>
-          <p:cNvSpPr/>
-          <p:nvPr/>
-        </p:nvSpPr>
-        <p:spPr>
-          <a:xfrm>
-            <a:off x="5534323" y="5424041"/>
-            <a:ext cx="57686" cy="123825"/>
+          <p:cNvPr id="31" name="Text 29"/>
+          <p:cNvSpPr/>
+          <p:nvPr/>
+        </p:nvSpPr>
+        <p:spPr>
+          <a:xfrm>
+            <a:off x="6683871" y="4509790"/>
+            <a:ext cx="1679567" cy="190500"/>
           </a:xfrm>
           <a:prstGeom prst="rect">
             <a:avLst/>
@@ -13412,46 +14582,7 @@
               <a:buNone/>
             </a:pPr>
             <a:r>
-              <a:rPr lang="en-US" sz="700" b="1" dirty="0">
-                <a:solidFill>
-                  <a:srgbClr val="FFFFFF"/>
-                </a:solidFill>
-                <a:latin typeface="Noto Sans SC" pitchFamily="34" charset="0"/>
-                <a:ea typeface="Noto Sans SC" pitchFamily="34" charset="-122"/>
-                <a:cs typeface="Noto Sans SC" pitchFamily="34" charset="-120"/>
-              </a:rPr>
-              <a:t>2</a:t>
-            </a:r>
-            <a:endParaRPr lang="en-US" sz="700" dirty="0"/>
-          </a:p>
-        </p:txBody>
-      </p:sp>
-      <p:sp>
-        <p:nvSpPr>
-          <p:cNvPr id="25" name="Text 23"/>
-          <p:cNvSpPr/>
-          <p:nvPr/>
-        </p:nvSpPr>
-        <p:spPr>
-          <a:xfrm>
-            <a:off x="5727650" y="5395466"/>
-            <a:ext cx="1664235" cy="180975"/>
-          </a:xfrm>
-          <a:prstGeom prst="rect">
-            <a:avLst/>
-          </a:prstGeom>
-          <a:noFill/>
-          <a:ln/>
-        </p:spPr>
-        <p:txBody>
-          <a:bodyPr wrap="square" lIns="0" tIns="0" rIns="0" bIns="0" rtlCol="0" anchor="t"/>
-          <a:lstStyle/>
-          <a:p>
-            <a:pPr algn="l" indent="0" marL="0">
-              <a:buNone/>
-            </a:pPr>
-            <a:r>
-              <a:rPr lang="en-US" sz="1000" dirty="0">
+              <a:rPr lang="en-US" sz="900" dirty="0">
                 <a:solidFill>
                   <a:srgbClr val="5B6677"/>
                 </a:solidFill>
@@ -13459,157 +14590,15 @@
                 <a:ea typeface="Noto Sans SC" pitchFamily="34" charset="-122"/>
                 <a:cs typeface="Noto Sans SC" pitchFamily="34" charset="-120"/>
               </a:rPr>
-              <a:t>Draw or write on A4 paper</a:t>
-            </a:r>
-            <a:endParaRPr lang="en-US" sz="1000" dirty="0"/>
-          </a:p>
-        </p:txBody>
-      </p:sp>
-      <p:sp>
-        <p:nvSpPr>
-          <p:cNvPr id="26" name="Text 24"/>
-          <p:cNvSpPr/>
-          <p:nvPr/>
-        </p:nvSpPr>
-        <p:spPr>
-          <a:xfrm>
-            <a:off x="7816453" y="5319266"/>
-            <a:ext cx="1205805" cy="333375"/>
-          </a:xfrm>
-          <a:prstGeom prst="roundRect">
-            <a:avLst>
-              <a:gd name="adj" fmla="val 3805714"/>
-            </a:avLst>
-          </a:prstGeom>
-          <a:solidFill>
-            <a:srgbClr val="F6F2E8"/>
-          </a:solidFill>
-          <a:ln/>
-        </p:spPr>
-        <p:txBody>
-          <a:bodyPr wrap="square" rtlCol="0" anchor="ctr"/>
-          <a:lstStyle/>
-          <a:p>
-            <a:pPr indent="0" marL="0">
-              <a:buNone/>
-            </a:pPr>
-            <a:endParaRPr lang="en-US" dirty="0"/>
-          </a:p>
-        </p:txBody>
-      </p:sp>
-      <p:sp>
-        <p:nvSpPr>
-          <p:cNvPr id="27" name="Text 25"/>
-          <p:cNvSpPr/>
-          <p:nvPr/>
-        </p:nvSpPr>
-        <p:spPr>
-          <a:xfrm>
-            <a:off x="7968853" y="5397103"/>
-            <a:ext cx="177701" cy="177701"/>
-          </a:xfrm>
-          <a:prstGeom prst="roundRect">
-            <a:avLst>
-              <a:gd name="adj" fmla="val 514572"/>
-            </a:avLst>
-          </a:prstGeom>
-          <a:solidFill>
-            <a:srgbClr val="C8943E"/>
-          </a:solidFill>
-          <a:ln/>
-        </p:spPr>
-        <p:txBody>
-          <a:bodyPr wrap="square" rtlCol="0" anchor="ctr"/>
-          <a:lstStyle/>
-          <a:p>
-            <a:pPr indent="0" marL="0">
-              <a:buNone/>
-            </a:pPr>
-            <a:endParaRPr lang="en-US" dirty="0"/>
-          </a:p>
-        </p:txBody>
-      </p:sp>
-      <p:sp>
-        <p:nvSpPr>
-          <p:cNvPr id="28" name="Text 26"/>
-          <p:cNvSpPr/>
-          <p:nvPr/>
-        </p:nvSpPr>
-        <p:spPr>
-          <a:xfrm>
-            <a:off x="8029129" y="5424041"/>
-            <a:ext cx="58141" cy="123825"/>
-          </a:xfrm>
-          <a:prstGeom prst="rect">
-            <a:avLst/>
-          </a:prstGeom>
-          <a:noFill/>
-          <a:ln/>
-        </p:spPr>
-        <p:txBody>
-          <a:bodyPr wrap="square" lIns="0" tIns="0" rIns="0" bIns="0" rtlCol="0" anchor="t"/>
-          <a:lstStyle/>
-          <a:p>
-            <a:pPr algn="l" indent="0" marL="0">
-              <a:buNone/>
-            </a:pPr>
-            <a:r>
-              <a:rPr lang="en-US" sz="700" b="1" dirty="0">
-                <a:solidFill>
-                  <a:srgbClr val="FFFFFF"/>
-                </a:solidFill>
-                <a:latin typeface="Noto Sans SC" pitchFamily="34" charset="0"/>
-                <a:ea typeface="Noto Sans SC" pitchFamily="34" charset="-122"/>
-                <a:cs typeface="Noto Sans SC" pitchFamily="34" charset="-120"/>
-              </a:rPr>
-              <a:t>3</a:t>
-            </a:r>
-            <a:endParaRPr lang="en-US" sz="700" dirty="0"/>
-          </a:p>
-        </p:txBody>
-      </p:sp>
-      <p:sp>
-        <p:nvSpPr>
-          <p:cNvPr id="29" name="Text 27"/>
-          <p:cNvSpPr/>
-          <p:nvPr/>
-        </p:nvSpPr>
-        <p:spPr>
-          <a:xfrm>
-            <a:off x="8222754" y="5395466"/>
-            <a:ext cx="660047" cy="180975"/>
-          </a:xfrm>
-          <a:prstGeom prst="rect">
-            <a:avLst/>
-          </a:prstGeom>
-          <a:noFill/>
-          <a:ln/>
-        </p:spPr>
-        <p:txBody>
-          <a:bodyPr wrap="square" lIns="0" tIns="0" rIns="0" bIns="0" rtlCol="0" anchor="t"/>
-          <a:lstStyle/>
-          <a:p>
-            <a:pPr algn="l" indent="0" marL="0">
-              <a:buNone/>
-            </a:pPr>
-            <a:r>
-              <a:rPr lang="en-US" sz="1000" dirty="0">
-                <a:solidFill>
-                  <a:srgbClr val="5B6677"/>
-                </a:solidFill>
-                <a:latin typeface="Noto Sans SC" pitchFamily="34" charset="0"/>
-                <a:ea typeface="Noto Sans SC" pitchFamily="34" charset="-122"/>
-                <a:cs typeface="Noto Sans SC" pitchFamily="34" charset="-120"/>
-              </a:rPr>
-              <a:t>Hold it up!</a:t>
-            </a:r>
-            <a:endParaRPr lang="en-US" sz="1000" dirty="0"/>
-          </a:p>
-        </p:txBody>
-      </p:sp>
-      <p:sp>
-        <p:nvSpPr>
-          <p:cNvPr id="30" name="Shape 28"/>
+              <a:t>🚀 Extension: add 早上 / 下午</a:t>
+            </a:r>
+            <a:endParaRPr lang="en-US" sz="900" dirty="0"/>
+          </a:p>
+        </p:txBody>
+      </p:sp>
+      <p:sp>
+        <p:nvSpPr>
+          <p:cNvPr id="32" name="Shape 30"/>
           <p:cNvSpPr/>
           <p:nvPr/>
         </p:nvSpPr>
@@ -13632,7 +14621,7 @@
       </p:sp>
       <p:sp>
         <p:nvSpPr>
-          <p:cNvPr id="31" name="Text 29"/>
+          <p:cNvPr id="33" name="Text 31"/>
           <p:cNvSpPr/>
           <p:nvPr/>
         </p:nvSpPr>
